--- a/Module 1/class_1.4/deep_learning_course_class_1.4.pptx
+++ b/Module 1/class_1.4/deep_learning_course_class_1.4.pptx
@@ -808,7 +808,7 @@
   <p:cSld>
     <p:spTree>
       <p:nvGrpSpPr>
-        <p:cNvPr id="155" name="Shape 155"/>
+        <p:cNvPr id="157" name="Shape 157"/>
         <p:cNvGrpSpPr/>
         <p:nvPr/>
       </p:nvGrpSpPr>
@@ -822,7 +822,7 @@
       </p:grpSpPr>
       <p:sp>
         <p:nvSpPr>
-          <p:cNvPr id="156" name="Google Shape;156;g372865cd5e0_0_43:notes"/>
+          <p:cNvPr id="158" name="Google Shape;158;g372865cd5e0_0_43:notes"/>
           <p:cNvSpPr/>
           <p:nvPr>
             <p:ph idx="2" type="sldImg"/>
@@ -857,7 +857,7 @@
       </p:sp>
       <p:sp>
         <p:nvSpPr>
-          <p:cNvPr id="157" name="Google Shape;157;g372865cd5e0_0_43:notes"/>
+          <p:cNvPr id="159" name="Google Shape;159;g372865cd5e0_0_43:notes"/>
           <p:cNvSpPr txBox="1"/>
           <p:nvPr>
             <p:ph idx="1" type="body"/>
@@ -907,7 +907,7 @@
   <p:cSld>
     <p:spTree>
       <p:nvGrpSpPr>
-        <p:cNvPr id="164" name="Shape 164"/>
+        <p:cNvPr id="166" name="Shape 166"/>
         <p:cNvGrpSpPr/>
         <p:nvPr/>
       </p:nvGrpSpPr>
@@ -921,7 +921,7 @@
       </p:grpSpPr>
       <p:sp>
         <p:nvSpPr>
-          <p:cNvPr id="165" name="Google Shape;165;g372865cd5e0_0_50:notes"/>
+          <p:cNvPr id="167" name="Google Shape;167;g372865cd5e0_0_50:notes"/>
           <p:cNvSpPr/>
           <p:nvPr>
             <p:ph idx="2" type="sldImg"/>
@@ -956,7 +956,7 @@
       </p:sp>
       <p:sp>
         <p:nvSpPr>
-          <p:cNvPr id="166" name="Google Shape;166;g372865cd5e0_0_50:notes"/>
+          <p:cNvPr id="168" name="Google Shape;168;g372865cd5e0_0_50:notes"/>
           <p:cNvSpPr txBox="1"/>
           <p:nvPr>
             <p:ph idx="1" type="body"/>
@@ -1006,7 +1006,7 @@
   <p:cSld>
     <p:spTree>
       <p:nvGrpSpPr>
-        <p:cNvPr id="172" name="Shape 172"/>
+        <p:cNvPr id="174" name="Shape 174"/>
         <p:cNvGrpSpPr/>
         <p:nvPr/>
       </p:nvGrpSpPr>
@@ -1020,7 +1020,7 @@
       </p:grpSpPr>
       <p:sp>
         <p:nvSpPr>
-          <p:cNvPr id="173" name="Google Shape;173;g38bec3a3a05_0_3:notes"/>
+          <p:cNvPr id="175" name="Google Shape;175;g38bec3a3a05_0_3:notes"/>
           <p:cNvSpPr/>
           <p:nvPr>
             <p:ph idx="2" type="sldImg"/>
@@ -1055,7 +1055,7 @@
       </p:sp>
       <p:sp>
         <p:nvSpPr>
-          <p:cNvPr id="174" name="Google Shape;174;g38bec3a3a05_0_3:notes"/>
+          <p:cNvPr id="176" name="Google Shape;176;g38bec3a3a05_0_3:notes"/>
           <p:cNvSpPr txBox="1"/>
           <p:nvPr>
             <p:ph idx="1" type="body"/>
@@ -1105,7 +1105,7 @@
   <p:cSld>
     <p:spTree>
       <p:nvGrpSpPr>
-        <p:cNvPr id="179" name="Shape 179"/>
+        <p:cNvPr id="181" name="Shape 181"/>
         <p:cNvGrpSpPr/>
         <p:nvPr/>
       </p:nvGrpSpPr>
@@ -1119,7 +1119,7 @@
       </p:grpSpPr>
       <p:sp>
         <p:nvSpPr>
-          <p:cNvPr id="180" name="Google Shape;180;g38bec3a3a05_0_10:notes"/>
+          <p:cNvPr id="182" name="Google Shape;182;g38bec3a3a05_0_10:notes"/>
           <p:cNvSpPr/>
           <p:nvPr>
             <p:ph idx="2" type="sldImg"/>
@@ -1154,7 +1154,7 @@
       </p:sp>
       <p:sp>
         <p:nvSpPr>
-          <p:cNvPr id="181" name="Google Shape;181;g38bec3a3a05_0_10:notes"/>
+          <p:cNvPr id="183" name="Google Shape;183;g38bec3a3a05_0_10:notes"/>
           <p:cNvSpPr txBox="1"/>
           <p:nvPr>
             <p:ph idx="1" type="body"/>
@@ -1204,7 +1204,7 @@
   <p:cSld>
     <p:spTree>
       <p:nvGrpSpPr>
-        <p:cNvPr id="186" name="Shape 186"/>
+        <p:cNvPr id="188" name="Shape 188"/>
         <p:cNvGrpSpPr/>
         <p:nvPr/>
       </p:nvGrpSpPr>
@@ -1218,7 +1218,7 @@
       </p:grpSpPr>
       <p:sp>
         <p:nvSpPr>
-          <p:cNvPr id="187" name="Google Shape;187;g38bec3a3a05_0_16:notes"/>
+          <p:cNvPr id="189" name="Google Shape;189;g38bec3a3a05_0_16:notes"/>
           <p:cNvSpPr/>
           <p:nvPr>
             <p:ph idx="2" type="sldImg"/>
@@ -1253,7 +1253,7 @@
       </p:sp>
       <p:sp>
         <p:nvSpPr>
-          <p:cNvPr id="188" name="Google Shape;188;g38bec3a3a05_0_16:notes"/>
+          <p:cNvPr id="190" name="Google Shape;190;g38bec3a3a05_0_16:notes"/>
           <p:cNvSpPr txBox="1"/>
           <p:nvPr>
             <p:ph idx="1" type="body"/>
@@ -1303,7 +1303,7 @@
   <p:cSld>
     <p:spTree>
       <p:nvGrpSpPr>
-        <p:cNvPr id="194" name="Shape 194"/>
+        <p:cNvPr id="196" name="Shape 196"/>
         <p:cNvGrpSpPr/>
         <p:nvPr/>
       </p:nvGrpSpPr>
@@ -1317,7 +1317,7 @@
       </p:grpSpPr>
       <p:sp>
         <p:nvSpPr>
-          <p:cNvPr id="195" name="Google Shape;195;g38bdd1193af_0_53:notes"/>
+          <p:cNvPr id="197" name="Google Shape;197;g368fb5ce5a1_0_1:notes"/>
           <p:cNvSpPr/>
           <p:nvPr>
             <p:ph idx="2" type="sldImg"/>
@@ -1352,7 +1352,7 @@
       </p:sp>
       <p:sp>
         <p:nvSpPr>
-          <p:cNvPr id="196" name="Google Shape;196;g38bdd1193af_0_53:notes"/>
+          <p:cNvPr id="198" name="Google Shape;198;g368fb5ce5a1_0_1:notes"/>
           <p:cNvSpPr txBox="1"/>
           <p:nvPr>
             <p:ph idx="1" type="body"/>
@@ -1402,7 +1402,7 @@
   <p:cSld>
     <p:spTree>
       <p:nvGrpSpPr>
-        <p:cNvPr id="202" name="Shape 202"/>
+        <p:cNvPr id="205" name="Shape 205"/>
         <p:cNvGrpSpPr/>
         <p:nvPr/>
       </p:nvGrpSpPr>
@@ -1416,7 +1416,7 @@
       </p:grpSpPr>
       <p:sp>
         <p:nvSpPr>
-          <p:cNvPr id="203" name="Google Shape;203;g368fb5ce5a1_0_1:notes"/>
+          <p:cNvPr id="206" name="Google Shape;206;g368fb5ce5a1_0_9:notes"/>
           <p:cNvSpPr/>
           <p:nvPr>
             <p:ph idx="2" type="sldImg"/>
@@ -1451,7 +1451,7 @@
       </p:sp>
       <p:sp>
         <p:nvSpPr>
-          <p:cNvPr id="204" name="Google Shape;204;g368fb5ce5a1_0_1:notes"/>
+          <p:cNvPr id="207" name="Google Shape;207;g368fb5ce5a1_0_9:notes"/>
           <p:cNvSpPr txBox="1"/>
           <p:nvPr>
             <p:ph idx="1" type="body"/>
@@ -1501,7 +1501,7 @@
   <p:cSld>
     <p:spTree>
       <p:nvGrpSpPr>
-        <p:cNvPr id="211" name="Shape 211"/>
+        <p:cNvPr id="222" name="Shape 222"/>
         <p:cNvGrpSpPr/>
         <p:nvPr/>
       </p:nvGrpSpPr>
@@ -1515,7 +1515,7 @@
       </p:grpSpPr>
       <p:sp>
         <p:nvSpPr>
-          <p:cNvPr id="212" name="Google Shape;212;g368fb5ce5a1_0_9:notes"/>
+          <p:cNvPr id="223" name="Google Shape;223;g38bdd1193af_0_0:notes"/>
           <p:cNvSpPr/>
           <p:nvPr>
             <p:ph idx="2" type="sldImg"/>
@@ -1550,7 +1550,7 @@
       </p:sp>
       <p:sp>
         <p:nvSpPr>
-          <p:cNvPr id="213" name="Google Shape;213;g368fb5ce5a1_0_9:notes"/>
+          <p:cNvPr id="224" name="Google Shape;224;g38bdd1193af_0_0:notes"/>
           <p:cNvSpPr txBox="1"/>
           <p:nvPr>
             <p:ph idx="1" type="body"/>
@@ -1600,7 +1600,7 @@
   <p:cSld>
     <p:spTree>
       <p:nvGrpSpPr>
-        <p:cNvPr id="228" name="Shape 228"/>
+        <p:cNvPr id="231" name="Shape 231"/>
         <p:cNvGrpSpPr/>
         <p:nvPr/>
       </p:nvGrpSpPr>
@@ -1614,7 +1614,7 @@
       </p:grpSpPr>
       <p:sp>
         <p:nvSpPr>
-          <p:cNvPr id="229" name="Google Shape;229;g38bdd1193af_0_0:notes"/>
+          <p:cNvPr id="232" name="Google Shape;232;g37426365403_0_11:notes"/>
           <p:cNvSpPr/>
           <p:nvPr>
             <p:ph idx="2" type="sldImg"/>
@@ -1649,7 +1649,7 @@
       </p:sp>
       <p:sp>
         <p:nvSpPr>
-          <p:cNvPr id="230" name="Google Shape;230;g38bdd1193af_0_0:notes"/>
+          <p:cNvPr id="233" name="Google Shape;233;g37426365403_0_11:notes"/>
           <p:cNvSpPr txBox="1"/>
           <p:nvPr>
             <p:ph idx="1" type="body"/>
@@ -1699,7 +1699,7 @@
   <p:cSld>
     <p:spTree>
       <p:nvGrpSpPr>
-        <p:cNvPr id="237" name="Shape 237"/>
+        <p:cNvPr id="265" name="Shape 265"/>
         <p:cNvGrpSpPr/>
         <p:nvPr/>
       </p:nvGrpSpPr>
@@ -1713,7 +1713,7 @@
       </p:grpSpPr>
       <p:sp>
         <p:nvSpPr>
-          <p:cNvPr id="238" name="Google Shape;238;g37426365403_0_11:notes"/>
+          <p:cNvPr id="266" name="Google Shape;266;g38bdd1193af_0_53:notes"/>
           <p:cNvSpPr/>
           <p:nvPr>
             <p:ph idx="2" type="sldImg"/>
@@ -1748,7 +1748,7 @@
       </p:sp>
       <p:sp>
         <p:nvSpPr>
-          <p:cNvPr id="239" name="Google Shape;239;g37426365403_0_11:notes"/>
+          <p:cNvPr id="267" name="Google Shape;267;g38bdd1193af_0_53:notes"/>
           <p:cNvSpPr txBox="1"/>
           <p:nvPr>
             <p:ph idx="1" type="body"/>
@@ -2293,7 +2293,7 @@
   <p:cSld>
     <p:spTree>
       <p:nvGrpSpPr>
-        <p:cNvPr id="114" name="Shape 114"/>
+        <p:cNvPr id="115" name="Shape 115"/>
         <p:cNvGrpSpPr/>
         <p:nvPr/>
       </p:nvGrpSpPr>
@@ -2307,7 +2307,7 @@
       </p:grpSpPr>
       <p:sp>
         <p:nvSpPr>
-          <p:cNvPr id="115" name="Google Shape;115;g385a6818abc_0_0:notes"/>
+          <p:cNvPr id="116" name="Google Shape;116;g385a6818abc_0_0:notes"/>
           <p:cNvSpPr/>
           <p:nvPr>
             <p:ph idx="2" type="sldImg"/>
@@ -2342,7 +2342,7 @@
       </p:sp>
       <p:sp>
         <p:nvSpPr>
-          <p:cNvPr id="116" name="Google Shape;116;g385a6818abc_0_0:notes"/>
+          <p:cNvPr id="117" name="Google Shape;117;g385a6818abc_0_0:notes"/>
           <p:cNvSpPr txBox="1"/>
           <p:nvPr>
             <p:ph idx="1" type="body"/>
@@ -2392,7 +2392,7 @@
   <p:cSld>
     <p:spTree>
       <p:nvGrpSpPr>
-        <p:cNvPr id="122" name="Shape 122"/>
+        <p:cNvPr id="123" name="Shape 123"/>
         <p:cNvGrpSpPr/>
         <p:nvPr/>
       </p:nvGrpSpPr>
@@ -2406,7 +2406,7 @@
       </p:grpSpPr>
       <p:sp>
         <p:nvSpPr>
-          <p:cNvPr id="123" name="Google Shape;123;g38ae1b43c8f_1_52:notes"/>
+          <p:cNvPr id="124" name="Google Shape;124;g38ae1b43c8f_1_52:notes"/>
           <p:cNvSpPr/>
           <p:nvPr>
             <p:ph idx="2" type="sldImg"/>
@@ -2441,7 +2441,7 @@
       </p:sp>
       <p:sp>
         <p:nvSpPr>
-          <p:cNvPr id="124" name="Google Shape;124;g38ae1b43c8f_1_52:notes"/>
+          <p:cNvPr id="125" name="Google Shape;125;g38ae1b43c8f_1_52:notes"/>
           <p:cNvSpPr txBox="1"/>
           <p:nvPr>
             <p:ph idx="1" type="body"/>
@@ -2491,7 +2491,7 @@
   <p:cSld>
     <p:spTree>
       <p:nvGrpSpPr>
-        <p:cNvPr id="148" name="Shape 148"/>
+        <p:cNvPr id="150" name="Shape 150"/>
         <p:cNvGrpSpPr/>
         <p:nvPr/>
       </p:nvGrpSpPr>
@@ -2505,7 +2505,7 @@
       </p:grpSpPr>
       <p:sp>
         <p:nvSpPr>
-          <p:cNvPr id="149" name="Google Shape;149;g385a6818abc_0_10:notes"/>
+          <p:cNvPr id="151" name="Google Shape;151;g385a6818abc_0_10:notes"/>
           <p:cNvSpPr/>
           <p:nvPr>
             <p:ph idx="2" type="sldImg"/>
@@ -2540,7 +2540,7 @@
       </p:sp>
       <p:sp>
         <p:nvSpPr>
-          <p:cNvPr id="150" name="Google Shape;150;g385a6818abc_0_10:notes"/>
+          <p:cNvPr id="152" name="Google Shape;152;g385a6818abc_0_10:notes"/>
           <p:cNvSpPr txBox="1"/>
           <p:nvPr>
             <p:ph idx="1" type="body"/>
@@ -7364,7 +7364,7 @@
   <p:cSld>
     <p:spTree>
       <p:nvGrpSpPr>
-        <p:cNvPr id="158" name="Shape 158"/>
+        <p:cNvPr id="160" name="Shape 160"/>
         <p:cNvGrpSpPr/>
         <p:nvPr/>
       </p:nvGrpSpPr>
@@ -7378,7 +7378,7 @@
       </p:grpSpPr>
       <p:sp>
         <p:nvSpPr>
-          <p:cNvPr id="159" name="Google Shape;159;p22"/>
+          <p:cNvPr id="161" name="Google Shape;161;p22"/>
           <p:cNvSpPr txBox="1"/>
           <p:nvPr>
             <p:ph idx="4294967295" type="title"/>
@@ -7438,7 +7438,7 @@
       </p:sp>
       <p:sp>
         <p:nvSpPr>
-          <p:cNvPr id="160" name="Google Shape;160;p22"/>
+          <p:cNvPr id="162" name="Google Shape;162;p22"/>
           <p:cNvSpPr txBox="1"/>
           <p:nvPr/>
         </p:nvSpPr>
@@ -7483,7 +7483,7 @@
       </p:sp>
       <p:sp>
         <p:nvSpPr>
-          <p:cNvPr id="161" name="Google Shape;161;p22"/>
+          <p:cNvPr id="163" name="Google Shape;163;p22"/>
           <p:cNvSpPr txBox="1"/>
           <p:nvPr/>
         </p:nvSpPr>
@@ -7533,7 +7533,7 @@
       </p:sp>
       <p:pic>
         <p:nvPicPr>
-          <p:cNvPr descr="{&quot;backgroundColor&quot;:&quot;#FFFFFF&quot;,&quot;code&quot;:&quot;\\begin{gather*}\n{\\text{We}\\;\\text{have}\\;n\\,\\text{noisy}\\;\\text{points}\\;\\text{(}x_{i},\\hat{y_{i}}\\text{)}}\\\\\n{\\text{We}\\;\\text{want}\\;\\text{t}\\text{o}\\;\\text{find}\\;\\text{the}\\;\\text{coefficients}\\;\\text{of}\\;\\text{a}\\;\\text{linear}\\;\\text{equation}\\;\\text{that}}\\\\\n{\\text{best}\\;\\text{fits}\\;\\text{these}\\;\\text{points.}\\;\\text{Let}\\;\\text{the}\\;\\text{coefficients}\\;\\text{be}\\;a,b}\\\\\n{\\text{Our}\\;\\text{estimated}\\;\\text{points}\\;y_{i}=ax_{i}+b=\\left(x_{i},1\\right)\\begin{pmatrix}\n{a}\\\\\n{b}\\\\\n\\end{pmatrix}}\\\\\n{\\text{We}\\;\\text{want}\\;\\text{to}\\;\\text{minimize}}\\\\\n{L=\\sum_{i=1}^{n}\\left(y_{i}-\\hat{y_{i}}\\right)^{2}}\\\\\n{\\text{Let's}\\;\\text{stack}\\;\\text{the}\\;\\text{points}\\;\\text{row-wise}}\\\\\n{Y_{n\\times1}=\\begin{pmatrix}\n{y_{1}-\\hat{y_{1}}}\\\\\n{y_{2}-\\hat{y_{2}}}\\\\\n{\\vdots}\\\\\n{y_{n}-\\hat{y_{n}}}\\\\\n\\end{pmatrix}=\\begin{pmatrix}\n{x_{1}}&amp;{1}\\\\\n{x_{2}}&amp;{1}\\\\\n{\\vdots}&amp;{\\vdots}\\\\\n{x_{n}}&amp;{1}\\\\\n\\end{pmatrix}\\begin{pmatrix}\n{a}\\\\\n{b}\\\\\n\\end{pmatrix}-\\begin{pmatrix}\n{\\hat{y_{1}}}\\\\\n{\\hat{y_{2}}}\\\\\n{\\vdots}\\\\\n{\\hat{y_{n}}}\\\\\n\\end{pmatrix}}\\\\\n{X_{n\\times2}=\\begin{pmatrix}\n{x_{1}}&amp;{1}\\\\\n{x_{2}}&amp;{1}\\\\\n{\\vdots}&amp;{\\vdots}\\\\\n{x_{n}}&amp;{1}\\\\\n\\end{pmatrix},\\,\\hat{Y}=\\begin{pmatrix}\n{\\hat{y_{1}}}\\\\\n{\\hat{y_{2}}}\\\\\n{\\vdots}\\\\\n{\\hat{y_{n}}}\\\\\n\\end{pmatrix},A_{2\\times1}=\\begin{pmatrix}\n{a}\\\\\n{b}\\\\\n\\end{pmatrix}}\\\\\n{L=Y^{T}Y=\\left(XA-\\hat{Y}\\right)^{T}\\left(XA-\\hat{Y}\\right)}\t\n\\end{gather*}&quot;,&quot;id&quot;:&quot;6&quot;,&quot;backgroundColorModified&quot;:false,&quot;type&quot;:&quot;gather*&quot;,&quot;aid&quot;:null,&quot;font&quot;:{&quot;family&quot;:&quot;Arial&quot;,&quot;size&quot;:9,&quot;color&quot;:&quot;#000000&quot;},&quot;ts&quot;:1760193963415,&quot;cs&quot;:&quot;boJFuggCUFCoTZZ4dWScaQ==&quot;,&quot;size&quot;:{&quot;width&quot;:344.3333333333333,&quot;height&quot;:377.3333333333333}}" id="162" name="Google Shape;162;p22"/>
+          <p:cNvPr descr="{&quot;backgroundColor&quot;:&quot;#FFFFFF&quot;,&quot;code&quot;:&quot;\\begin{gather*}\n{\\text{We}\\;\\text{have}\\;n\\,\\text{noisy}\\;\\text{points}\\;\\text{(}x_{i},\\hat{y_{i}}\\text{)}}\\\\\n{\\text{We}\\;\\text{want}\\;\\text{t}\\text{o}\\;\\text{find}\\;\\text{the}\\;\\text{coefficients}\\;\\text{of}\\;\\text{a}\\;\\text{linear}\\;\\text{equation}\\;\\text{that}}\\\\\n{\\text{best}\\;\\text{fits}\\;\\text{these}\\;\\text{points.}\\;\\text{Let}\\;\\text{the}\\;\\text{coefficients}\\;\\text{be}\\;a,b}\\\\\n{\\text{Our}\\;\\text{estimated}\\;\\text{points}\\;y_{i}=ax_{i}+b=\\left(x_{i},1\\right)\\begin{pmatrix}\n{a}\\\\\n{b}\\\\\n\\end{pmatrix}}\\\\\n{\\text{We}\\;\\text{want}\\;\\text{to}\\;\\text{minimize}}\\\\\n{L=\\sum_{i=1}^{n}\\left(y_{i}-\\hat{y_{i}}\\right)^{2}}\\\\\n{\\text{Let's}\\;\\text{stack}\\;\\text{the}\\;\\text{points}\\;\\text{row-wise}}\\\\\n{Y_{n\\times1}=\\begin{pmatrix}\n{y_{1}-\\hat{y_{1}}}\\\\\n{y_{2}-\\hat{y_{2}}}\\\\\n{\\vdots}\\\\\n{y_{n}-\\hat{y_{n}}}\\\\\n\\end{pmatrix}=\\begin{pmatrix}\n{x_{1}}&amp;{1}\\\\\n{x_{2}}&amp;{1}\\\\\n{\\vdots}&amp;{\\vdots}\\\\\n{x_{n}}&amp;{1}\\\\\n\\end{pmatrix}\\begin{pmatrix}\n{a}\\\\\n{b}\\\\\n\\end{pmatrix}-\\begin{pmatrix}\n{\\hat{y_{1}}}\\\\\n{\\hat{y_{2}}}\\\\\n{\\vdots}\\\\\n{\\hat{y_{n}}}\\\\\n\\end{pmatrix}}\\\\\n{X_{n\\times2}=\\begin{pmatrix}\n{x_{1}}&amp;{1}\\\\\n{x_{2}}&amp;{1}\\\\\n{\\vdots}&amp;{\\vdots}\\\\\n{x_{n}}&amp;{1}\\\\\n\\end{pmatrix},\\,\\hat{Y}=\\begin{pmatrix}\n{\\hat{y_{1}}}\\\\\n{\\hat{y_{2}}}\\\\\n{\\vdots}\\\\\n{\\hat{y_{n}}}\\\\\n\\end{pmatrix},A_{2\\times1}=\\begin{pmatrix}\n{a}\\\\\n{b}\\\\\n\\end{pmatrix}}\\\\\n{L=Y^{T}Y=\\left(XA-\\hat{Y}\\right)^{T}\\left(XA-\\hat{Y}\\right)}\t\n\\end{gather*}&quot;,&quot;id&quot;:&quot;6&quot;,&quot;backgroundColorModified&quot;:false,&quot;type&quot;:&quot;gather*&quot;,&quot;aid&quot;:null,&quot;font&quot;:{&quot;family&quot;:&quot;Arial&quot;,&quot;size&quot;:9,&quot;color&quot;:&quot;#000000&quot;},&quot;ts&quot;:1760193963415,&quot;cs&quot;:&quot;boJFuggCUFCoTZZ4dWScaQ==&quot;,&quot;size&quot;:{&quot;width&quot;:344.3333333333333,&quot;height&quot;:377.3333333333333}}" id="164" name="Google Shape;164;p22"/>
           <p:cNvPicPr preferRelativeResize="0"/>
           <p:nvPr/>
         </p:nvPicPr>
@@ -7561,7 +7561,7 @@
       </p:pic>
       <p:pic>
         <p:nvPicPr>
-          <p:cNvPr descr="{&quot;aid&quot;:null,&quot;backgroundColor&quot;:&quot;#FFFFFF&quot;,&quot;id&quot;:&quot;6&quot;,&quot;backgroundColorModified&quot;:false,&quot;font&quot;:{&quot;size&quot;:10,&quot;color&quot;:&quot;#000000&quot;,&quot;family&quot;:&quot;Arial&quot;},&quot;code&quot;:&quot;\\begin{gather*}\n{L=\\left(XA-\\hat{Y}\\right)^{T}\\left(XA-\\hat{Y}\\right)}\\\\\n{\\pdf{L}{A}=\\pdf{\\left(A^{T}X^{T}XA-A^{T}X^{T}\\hat{Y}-\\hat{Y}^{T}XA+\\hat{Y}^{T}\\hat{Y}\\right)}{A}}\\\\\n{=\\pdf{A^{T}X^{T}XA}{A}-2\\pdf{\\hat{Y}^{T}XA}{A}\\,}\\\\\n{\\because A^{T}X^{T}\\hat{Y}\\left(\\text{a}\\;\\text{scalar}\\right)=\\left(A^{T}X^{T}\\hat{Y}\\right)^{T}=\\hat{Y}^{T}XA}\\\\\n{\\pdf{L}{A}=X^{T}XA+\\left(X^{T}X\\right)^{T}A-2X^{T}\\hat{Y}}\\\\\n{\\text{Setting}\\;\\pdf{L}{A}=0,}\\\\\n{2X^{T}XA-2X^{T}\\hat{Y}=0}\\\\\n{A=\\left(X^{T}X\\right)^{-1}X^{T}\\hat{Y}}\t\n\\end{gather*}&quot;,&quot;type&quot;:&quot;gather*&quot;,&quot;ts&quot;:1760194197674,&quot;cs&quot;:&quot;p26CkvgIyxE+AeWFpCTUWg==&quot;,&quot;size&quot;:{&quot;width&quot;:345,&quot;height&quot;:288.75}}" id="163" name="Google Shape;163;p22"/>
+          <p:cNvPr descr="{&quot;font&quot;:{&quot;family&quot;:&quot;Arial&quot;,&quot;color&quot;:&quot;#000000&quot;,&quot;size&quot;:10},&quot;backgroundColor&quot;:&quot;#FFFFFF&quot;,&quot;backgroundColorModified&quot;:false,&quot;code&quot;:&quot;\\begin{gather*}\n{L=\\left(XA-\\hat{Y}\\right)^{T}\\left(XA-\\hat{Y}\\right)}\\\\\n{\\pdf{L}{A}=\\pdf{\\left(A^{T}X^{T}XA-A^{T}X^{T}\\hat{Y}-\\hat{Y}^{T}XA+\\hat{Y}^{T}\\hat{Y}\\right)}{A}}\\\\\n{=\\pdf{A^{T}X^{T}XA}{A}-2\\pdf{\\hat{Y}^{T}XA}{A}\\,}\\\\\n{\\because A^{T}X^{T}\\hat{Y}\\left(\\text{a}\\;\\text{scalar}\\right)=\\left(A^{T}X^{T}\\hat{Y}\\right)^{T}=\\hat{Y}^{T}XA}\\\\\n{\\pdf{L}{A}=\\left(X^{T}X+\\left(X^{T}X\\right)^{T}\\right)A-2X^{T}\\hat{Y}}\\\\\n{\\text{Setting}\\;\\pdf{L}{A}=0,}\\\\\n{2X^{T}XA-2X^{T}\\hat{Y}=0}\\\\\n{A=\\left(X^{T}X\\right)^{-1}X^{T}\\hat{Y}}\t\n\\end{gather*}&quot;,&quot;id&quot;:&quot;6&quot;,&quot;type&quot;:&quot;gather*&quot;,&quot;aid&quot;:null,&quot;ts&quot;:1761864107905,&quot;cs&quot;:&quot;V9l4pRTOeQxnPYIMWfN8tw==&quot;,&quot;size&quot;:{&quot;width&quot;:345,&quot;height&quot;:288.75}}" id="165" name="Google Shape;165;p22"/>
           <p:cNvPicPr preferRelativeResize="0"/>
           <p:nvPr/>
         </p:nvPicPr>
@@ -7600,7 +7600,7 @@
   <p:cSld>
     <p:spTree>
       <p:nvGrpSpPr>
-        <p:cNvPr id="167" name="Shape 167"/>
+        <p:cNvPr id="169" name="Shape 169"/>
         <p:cNvGrpSpPr/>
         <p:nvPr/>
       </p:nvGrpSpPr>
@@ -7614,7 +7614,7 @@
       </p:grpSpPr>
       <p:sp>
         <p:nvSpPr>
-          <p:cNvPr id="168" name="Google Shape;168;p23"/>
+          <p:cNvPr id="170" name="Google Shape;170;p23"/>
           <p:cNvSpPr txBox="1"/>
           <p:nvPr>
             <p:ph idx="4294967295" type="title"/>
@@ -7654,7 +7654,7 @@
       </p:sp>
       <p:sp>
         <p:nvSpPr>
-          <p:cNvPr id="169" name="Google Shape;169;p23"/>
+          <p:cNvPr id="171" name="Google Shape;171;p23"/>
           <p:cNvSpPr txBox="1"/>
           <p:nvPr/>
         </p:nvSpPr>
@@ -7699,7 +7699,7 @@
       </p:sp>
       <p:pic>
         <p:nvPicPr>
-          <p:cNvPr id="170" name="Google Shape;170;p23"/>
+          <p:cNvPr id="172" name="Google Shape;172;p23"/>
           <p:cNvPicPr preferRelativeResize="0"/>
           <p:nvPr/>
         </p:nvPicPr>
@@ -7727,7 +7727,7 @@
       </p:pic>
       <p:sp>
         <p:nvSpPr>
-          <p:cNvPr id="171" name="Google Shape;171;p23"/>
+          <p:cNvPr id="173" name="Google Shape;173;p23"/>
           <p:cNvSpPr txBox="1"/>
           <p:nvPr/>
         </p:nvSpPr>
@@ -7788,7 +7788,7 @@
   <p:cSld>
     <p:spTree>
       <p:nvGrpSpPr>
-        <p:cNvPr id="175" name="Shape 175"/>
+        <p:cNvPr id="177" name="Shape 177"/>
         <p:cNvGrpSpPr/>
         <p:nvPr/>
       </p:nvGrpSpPr>
@@ -7802,7 +7802,7 @@
       </p:grpSpPr>
       <p:sp>
         <p:nvSpPr>
-          <p:cNvPr id="176" name="Google Shape;176;p24"/>
+          <p:cNvPr id="178" name="Google Shape;178;p24"/>
           <p:cNvSpPr txBox="1"/>
           <p:nvPr>
             <p:ph idx="4294967295" type="title"/>
@@ -7842,7 +7842,7 @@
       </p:sp>
       <p:sp>
         <p:nvSpPr>
-          <p:cNvPr id="177" name="Google Shape;177;p24"/>
+          <p:cNvPr id="179" name="Google Shape;179;p24"/>
           <p:cNvSpPr txBox="1"/>
           <p:nvPr/>
         </p:nvSpPr>
@@ -7887,7 +7887,7 @@
       </p:sp>
       <p:pic>
         <p:nvPicPr>
-          <p:cNvPr descr="{&quot;type&quot;:&quot;gather*&quot;,&quot;aid&quot;:null,&quot;backgroundColor&quot;:&quot;#FFFFFF&quot;,&quot;id&quot;:&quot;7&quot;,&quot;font&quot;:{&quot;size&quot;:10,&quot;color&quot;:&quot;#595959&quot;,&quot;family&quot;:&quot;Arial&quot;},&quot;code&quot;:&quot;\\begin{gather*}\n{y=Ax,\\,x:m\\times1,\\,A:\\,n\\times m,\\,y:\\,n\\times1}\\\\\n{\\text{We}\\,\\text{know}\\;\\text{that}}\\\\\n{\\diff{y}{x}=A^{T}}\\\\\n{\\text{What}\\;\\text{about}\\;\\diff{y}{W}?}\\\\\n{\\text{This}\\;\\text{is}\\;\\text{a}\\;\\text{derivative}\\;\\text{of}\\;\\text{a}\\;\\text{vector}\\;\\text{against}\\;\\text{a}\\;\\text{matrix},\\,\\text{which}\\;\\text{is}\\;\\text{a}\\;\\text{hard}\\;\\text{concept}\\;\\text{to}\\;\\text{think}\\;\\text{about}.}\\\\\n{\\text{But..}\\;\\text{if}\\;\\text{we}\\;\\text{add}\\;\\text{a}\\;\\text{function}\\;\\text{that}\\;\\text{maps}\\;\\text{the}\\;\\text{vector}\\,\\text{to}\\;\\text{a}\\;\\text{scalar,}\\;\\text{then}\\;\\text{the}\\;\\text{derivative}\\;\\text{becomes}\\;\\text{tractable..}}\\\\\n{x\\to y=Ax\\to v=f\\left(y\\right)}\\\\\n{\\text{Here}\\;v\\,\\text{is}\\;\\text{a}\\;\\text{scalar..}}\\\\\n{\\text{Now}\\;\\text{we}\\;\\text{can}\\;\\text{calculate}\\;\\diff{v}{A},\\,\\text{a}\\;\\text{matrix}\\;\\text{with}\\;\\text{the}\\;\\text{same}\\;\\text{dimension}\\;\\text{as}\\;A}\t\n\\end{gather*}&quot;,&quot;backgroundColorModified&quot;:false,&quot;ts&quot;:1760223512959,&quot;cs&quot;:&quot;CUiisz3z3r6qsdC/5GOGwA==&quot;,&quot;size&quot;:{&quot;width&quot;:662,&quot;height&quot;:228}}" id="178" name="Google Shape;178;p24"/>
+          <p:cNvPr descr="{&quot;type&quot;:&quot;gather*&quot;,&quot;aid&quot;:null,&quot;backgroundColor&quot;:&quot;#FFFFFF&quot;,&quot;id&quot;:&quot;7&quot;,&quot;font&quot;:{&quot;size&quot;:10,&quot;color&quot;:&quot;#595959&quot;,&quot;family&quot;:&quot;Arial&quot;},&quot;code&quot;:&quot;\\begin{gather*}\n{y=Ax,\\,x:m\\times1,\\,A:\\,n\\times m,\\,y:\\,n\\times1}\\\\\n{\\text{We}\\,\\text{know}\\;\\text{that}}\\\\\n{\\diff{y}{x}=A^{T}}\\\\\n{\\text{What}\\;\\text{about}\\;\\diff{y}{W}?}\\\\\n{\\text{This}\\;\\text{is}\\;\\text{a}\\;\\text{derivative}\\;\\text{of}\\;\\text{a}\\;\\text{vector}\\;\\text{against}\\;\\text{a}\\;\\text{matrix},\\,\\text{which}\\;\\text{is}\\;\\text{a}\\;\\text{hard}\\;\\text{concept}\\;\\text{to}\\;\\text{think}\\;\\text{about}.}\\\\\n{\\text{But..}\\;\\text{if}\\;\\text{we}\\;\\text{add}\\;\\text{a}\\;\\text{function}\\;\\text{that}\\;\\text{maps}\\;\\text{the}\\;\\text{vector}\\,\\text{to}\\;\\text{a}\\;\\text{scalar,}\\;\\text{then}\\;\\text{the}\\;\\text{derivative}\\;\\text{becomes}\\;\\text{tractable..}}\\\\\n{x\\to y=Ax\\to v=f\\left(y\\right)}\\\\\n{\\text{Here}\\;v\\,\\text{is}\\;\\text{a}\\;\\text{scalar..}}\\\\\n{\\text{Now}\\;\\text{we}\\;\\text{can}\\;\\text{calculate}\\;\\diff{v}{A},\\,\\text{a}\\;\\text{matrix}\\;\\text{with}\\;\\text{the}\\;\\text{same}\\;\\text{dimension}\\;\\text{as}\\;A}\t\n\\end{gather*}&quot;,&quot;backgroundColorModified&quot;:false,&quot;ts&quot;:1760223512959,&quot;cs&quot;:&quot;CUiisz3z3r6qsdC/5GOGwA==&quot;,&quot;size&quot;:{&quot;width&quot;:662,&quot;height&quot;:228}}" id="180" name="Google Shape;180;p24"/>
           <p:cNvPicPr preferRelativeResize="0"/>
           <p:nvPr/>
         </p:nvPicPr>
@@ -7926,7 +7926,7 @@
   <p:cSld>
     <p:spTree>
       <p:nvGrpSpPr>
-        <p:cNvPr id="182" name="Shape 182"/>
+        <p:cNvPr id="184" name="Shape 184"/>
         <p:cNvGrpSpPr/>
         <p:nvPr/>
       </p:nvGrpSpPr>
@@ -7940,7 +7940,7 @@
       </p:grpSpPr>
       <p:sp>
         <p:nvSpPr>
-          <p:cNvPr id="183" name="Google Shape;183;p25"/>
+          <p:cNvPr id="185" name="Google Shape;185;p25"/>
           <p:cNvSpPr txBox="1"/>
           <p:nvPr>
             <p:ph idx="4294967295" type="title"/>
@@ -7980,7 +7980,7 @@
       </p:sp>
       <p:sp>
         <p:nvSpPr>
-          <p:cNvPr id="184" name="Google Shape;184;p25"/>
+          <p:cNvPr id="186" name="Google Shape;186;p25"/>
           <p:cNvSpPr txBox="1"/>
           <p:nvPr/>
         </p:nvSpPr>
@@ -8025,7 +8025,7 @@
       </p:sp>
       <p:pic>
         <p:nvPicPr>
-          <p:cNvPr descr="{&quot;aid&quot;:null,&quot;code&quot;:&quot;\\begin{gather*}\n{\\text{Let's}\\;\\text{consider}\\;\\text{the}\\;ij^{th}\\;\\text{element}\\;\\text{of}\\;\\diff{v}{A},\\,\\text{i.e.,}\\;\\diff{v}{A_{ij}}}\\\\\n{\\text{Now}\\;\\text{we}\\;\\text{have}\\;\\text{a}\\;\\text{chain..}}\\\\\n{A_{ij}\\to y\\to v,\\,\\text{here}\\;y\\,\\;\\text{is}\\;\\text{a}\\;\\text{vector}}\\\\\n{\\text{Now..}}\\\\\n{y_{i}=\\sum_{j=1}^{m}A_{ij}x_{j}}\\\\\n{\\text{Since}\\;\\text{each}\\;\\text{element}\\;\\text{of}\\;y\\,\\;\\text{is}\\;\\text{the}\\;\\text{corresponding}\\,\\text{row}\\;\\text{of}\\;\\text{A}\\;\\text{multiplied}\\;\\text{with}\\;x,\\,}\\\\\n{\\text{and}\\;\\text{other}\\;\\text{rows}\\;\\text{of}\\;\\text{A}\\,\\text{don't}\\;\\text{affect}\\;y_{i},\\,\\text{the}\\;\\text{chain}\\;\\text{above}\\;\\text{becomes}\\;\\text{a}\\;\\text{scalar}\\;\\text{chain..}\\text{}}\\\\\n{A_{ij}\\to y_{i}\\to v}\\\\\n{\\text{Now}\\;\\text{we}\\;\\text{can}\\;\\text{apply}\\;\\text{the}\\;\\text{chain}\\;\\text{rule..}}\\\\\n{\\diff{v}{A_{ij}}=\\diff{v}{y_{i}}\\diff{y_{i}}{A_{ij}}=\\diff{v}{y_{i}}\\diff{\\sum_{j=1}^{m}A_{ij}x_{j}}{A_{ij}}=\\diff{v}{y_{i}}x_{j}}\\\\\n{\\text{So..}\\;\\diff{v}{A}\\,\\text{becomes}\\;\\text{the}\\;\\text{outer}\\;\\text{product}\\;\\text{of}\\;\\text{the}\\;\\text{vectors}\\;\\diff{v}{y}\\,\\text{and}\\;x!}\\\\\n{\\diff{v}{A}=\\diff{v}{y}x^{T}\\,\\text{}}\\\\\n{\\text{Verify}\\;\\text{that}\\;\\text{the}\\;\\text{dimensions}\\;\\text{work}\\;\\text{out!}}\t\n\\end{gather*}&quot;,&quot;font&quot;:{&quot;size&quot;:10.5,&quot;family&quot;:&quot;Arial&quot;,&quot;color&quot;:&quot;#000000&quot;},&quot;backgroundColorModified&quot;:false,&quot;backgroundColor&quot;:&quot;#FFFFFF&quot;,&quot;type&quot;:&quot;gather*&quot;,&quot;id&quot;:&quot;8&quot;,&quot;ts&quot;:1760275413561,&quot;cs&quot;:&quot;Slu0SnbJfaPIp94v4raG1w==&quot;,&quot;size&quot;:{&quot;width&quot;:582.2808456692914,&quot;height&quot;:428.3019128608924}}" id="185" name="Google Shape;185;p25"/>
+          <p:cNvPr descr="{&quot;aid&quot;:null,&quot;id&quot;:&quot;8&quot;,&quot;backgroundColor&quot;:&quot;#FFFFFF&quot;,&quot;type&quot;:&quot;gather*&quot;,&quot;font&quot;:{&quot;size&quot;:10.5,&quot;color&quot;:&quot;#000000&quot;,&quot;family&quot;:&quot;Arial&quot;},&quot;backgroundColorModified&quot;:false,&quot;code&quot;:&quot;\\begin{gather*}\n{\\text{Let's}\\;\\text{consider}\\;\\text{the}\\;ij^{th}\\;\\text{element}\\;\\text{of}\\;\\diff{v}{A},\\,\\text{i.e.,}\\;\\diff{v}{A_{ij}}}\\\\\n{\\text{Now}\\;\\text{we}\\;\\text{have}\\;\\text{a}\\;\\text{chain..}}\\\\\n{A_{ij}\\to y\\to v,\\,\\text{here}\\;y\\,\\;\\text{is}\\;\\text{a}\\;\\text{vector}}\\\\\n{\\text{Now..}}\\\\\n{y_{i}=\\sum_{j=1}^{m}A_{ij}x_{j}}\\\\\n{\\text{Since}\\;\\text{each}\\;\\text{element}\\;\\text{of}\\;y\\,\\;\\text{is}\\;\\text{the}\\;\\text{corresponding}\\,\\text{row}\\;\\text{of}\\;\\text{A}\\;\\text{multiplied}\\;\\text{with}\\;x,\\,}\\\\\n{\\text{and}\\;\\text{other}\\;\\text{rows}\\;\\text{of}\\;\\text{A}\\,\\text{don't}\\;\\text{affect}\\;y_{i},\\,\\text{the}\\;\\text{chain}\\;\\text{above}\\;\\text{becomes}\\;\\text{a}\\;\\text{scalar}\\;\\text{chain..}\\text{}}\\\\\n{A_{ij}\\to y_{i}\\to v}\\\\\n{\\text{Now}\\;\\text{we}\\;\\text{can}\\;\\text{apply}\\;\\text{the}\\;\\text{chain}\\;\\text{rule..}}\\\\\n{\\diff{v}{A_{ij}}=\\diff{v}{y_{i}}\\diff{y_{i}}{A_{ij}}=\\diff{v}{y_{i}}\\diff{\\sum_{k=1}^{m}A_{ik}x_{k}}{A_{ij}}=\\diff{v}{y_{i}}x_{j}}\\\\\n{\\text{So..}\\;\\diff{v}{A}\\,\\text{becomes}\\;\\text{the}\\;\\text{outer}\\;\\text{product}\\;\\text{of}\\;\\text{the}\\;\\text{vectors}\\;\\diff{v}{y}\\,\\text{and}\\;x!}\\\\\n{\\diff{v}{A}=\\diff{v}{y}x^{T}\\,\\text{}}\\\\\n{\\text{Verify}\\;\\text{that}\\;\\text{the}\\;\\text{dimensions}\\;\\text{work}\\;\\text{out!}}\t\n\\end{gather*}&quot;,&quot;ts&quot;:1761864528197,&quot;cs&quot;:&quot;8H3P/qcorq4VeM9gFDYMtQ==&quot;,&quot;size&quot;:{&quot;width&quot;:537.5,&quot;height&quot;:394}}" id="187" name="Google Shape;187;p25"/>
           <p:cNvPicPr preferRelativeResize="0"/>
           <p:nvPr/>
         </p:nvPicPr>
@@ -8039,8 +8039,8 @@
         </p:blipFill>
         <p:spPr>
           <a:xfrm>
-            <a:off x="553150" y="806400"/>
-            <a:ext cx="5546225" cy="4079576"/>
+            <a:off x="553150" y="813432"/>
+            <a:ext cx="5119688" cy="3752850"/>
           </a:xfrm>
           <a:prstGeom prst="rect">
             <a:avLst/>
@@ -8064,7 +8064,7 @@
   <p:cSld>
     <p:spTree>
       <p:nvGrpSpPr>
-        <p:cNvPr id="189" name="Shape 189"/>
+        <p:cNvPr id="191" name="Shape 191"/>
         <p:cNvGrpSpPr/>
         <p:nvPr/>
       </p:nvGrpSpPr>
@@ -8078,7 +8078,7 @@
       </p:grpSpPr>
       <p:sp>
         <p:nvSpPr>
-          <p:cNvPr id="190" name="Google Shape;190;p26"/>
+          <p:cNvPr id="192" name="Google Shape;192;p26"/>
           <p:cNvSpPr txBox="1"/>
           <p:nvPr>
             <p:ph idx="4294967295" type="title"/>
@@ -8118,7 +8118,7 @@
       </p:sp>
       <p:sp>
         <p:nvSpPr>
-          <p:cNvPr id="191" name="Google Shape;191;p26"/>
+          <p:cNvPr id="193" name="Google Shape;193;p26"/>
           <p:cNvSpPr txBox="1"/>
           <p:nvPr/>
         </p:nvSpPr>
@@ -8163,7 +8163,7 @@
       </p:sp>
       <p:pic>
         <p:nvPicPr>
-          <p:cNvPr descr="{&quot;id&quot;:&quot;9&quot;,&quot;backgroundColor&quot;:&quot;#FFFFFF&quot;,&quot;code&quot;:&quot;\\begin{gather*}\n{\\text{Now}\\;\\text{let's}\\;\\text{add}\\;\\text{another}\\;\\text{layer}\\;\\text{in}\\;\\text{front..}}\\\\\n{x\\to A\\to y\\to B\\to u\\to f\\to v}\\\\\n{\\text{As}\\;\\text{before,}\\;x:\\,m\\times1,\\,A:\\,n\\times m.\\,B:\\,k\\times n}\\\\\n{\\text{From}\\;\\text{before,}}\\\\\n{\\diff{v}{B}=\\diff{v}{u}y^{T},\\diff{v}{y}=B^{T}\\diff{v}{u}}\\\\\n{\\text{And}}\\\\\n{\\diff{v}{A}=\\diff{v}{y}x^{T}}\\\\\n{\\text{We}\\;\\text{can}\\;\\text{think}\\;\\text{of}\\;\\text{this}\\;\\text{as}\\;\\text{a}\\;2\\,\\text{layer}\\;\\text{network,}\\;\\text{where}\\;\\text{the}\\;\\text{parameters}\\;\\text{of}\\;\\text{each}\\;\\text{layer}\\;\\text{are}\\;\\text{A}\\;\\text{and}\\;\\text{B}}\\\\\n{x\\,\\text{is}\\;\\text{the}\\;\\text{input}\\;\\text{to}\\;\\text{layer}\\;\\text{1,}\\;\\text{and}\\;y\\,\\text{is}\\;\\text{the}\\;\\text{output.}\\;\\text{}}\\\\\n{y\\,\\,\\text{is}\\;\\text{the}\\;\\text{input}\\;\\text{to}\\;\\text{layer}\\;\\text{2.}\\;\\text{Output}\\;\\text{of}\\;\\text{layer}\\;\\text{2},\\,u\\;\\text{goes}\\;\\text{into}\\;\\text{function}\\;f\\,\\text{that}\\;\\text{produces}\\;\\text{a}\\;\\text{scalar}\\;\\text{value}\\;v}\\\\\n{\\text{Layer}\\;\\text{2}\\;\\text{calculates}\\;\\text{the}\\;\\text{gradient}\\;\\text{of}\\;\\text{the}\\;\\text{final}\\;\\text{output}\\;v\\,\\text{wrt}\\;\\text{its}\\;\\text{parameters}\\;B}\\\\\n{\\text{It}\\;\\text{also}\\;\\text{calculates}\\;\\text{the}\\;\\text{gradient}\\;\\text{wrt}\\;\\text{its}\\;\\text{input,}\\;\\text{which}\\;\\text{is}\\;backpropagated\\,\\text{to}\\;\\text{the}\\;\\text{previous}\\;\\text{layer}}\\\\\n{\\text{which}\\;\\text{uses}\\;\\text{it}\\;\\text{to}\\;\\text{calculate}\\;\\text{the}\\;\\text{gradient}\\;\\text{wrt}\\;\\text{its}\\;\\text{parameters}\\;\\text{and}\\;\\text{input..}\\;\\text{}}\t\n\\end{gather*}&quot;,&quot;font&quot;:{&quot;family&quot;:&quot;Arial&quot;,&quot;color&quot;:&quot;#000000&quot;,&quot;size&quot;:10.5},&quot;type&quot;:&quot;gather*&quot;,&quot;aid&quot;:null,&quot;backgroundColorModified&quot;:false,&quot;ts&quot;:1760276974089,&quot;cs&quot;:&quot;w4DnoI+cLB2zQV5+266eWQ==&quot;,&quot;size&quot;:{&quot;width&quot;:677,&quot;height&quot;:313}}" id="192" name="Google Shape;192;p26"/>
+          <p:cNvPr descr="{&quot;id&quot;:&quot;9&quot;,&quot;backgroundColor&quot;:&quot;#FFFFFF&quot;,&quot;code&quot;:&quot;\\begin{gather*}\n{\\text{Now}\\;\\text{let's}\\;\\text{add}\\;\\text{another}\\;\\text{layer}\\;\\text{in}\\;\\text{front..}}\\\\\n{x\\to A\\to y\\to B\\to u\\to f\\to v}\\\\\n{\\text{As}\\;\\text{before,}\\;x:\\,m\\times1,\\,A:\\,n\\times m.\\,B:\\,k\\times n}\\\\\n{\\text{From}\\;\\text{before,}}\\\\\n{\\diff{v}{B}=\\diff{v}{u}y^{T},\\diff{v}{y}=B^{T}\\diff{v}{u}}\\\\\n{\\text{And}}\\\\\n{\\diff{v}{A}=\\diff{v}{y}x^{T}}\\\\\n{\\text{We}\\;\\text{can}\\;\\text{think}\\;\\text{of}\\;\\text{this}\\;\\text{as}\\;\\text{a}\\;2\\,\\text{layer}\\;\\text{network,}\\;\\text{where}\\;\\text{the}\\;\\text{parameters}\\;\\text{of}\\;\\text{each}\\;\\text{layer}\\;\\text{are}\\;\\text{A}\\;\\text{and}\\;\\text{B}}\\\\\n{x\\,\\text{is}\\;\\text{the}\\;\\text{input}\\;\\text{to}\\;\\text{layer}\\;\\text{1,}\\;\\text{and}\\;y\\,\\text{is}\\;\\text{the}\\;\\text{output.}\\;\\text{}}\\\\\n{y\\,\\,\\text{is}\\;\\text{the}\\;\\text{input}\\;\\text{to}\\;\\text{layer}\\;\\text{2.}\\;\\text{Output}\\;\\text{of}\\;\\text{layer}\\;\\text{2},\\,u\\;\\text{goes}\\;\\text{into}\\;\\text{function}\\;f\\,\\text{that}\\;\\text{produces}\\;\\text{a}\\;\\text{scalar}\\;\\text{value}\\;v}\\\\\n{\\text{Layer}\\;\\text{2}\\;\\text{calculates}\\;\\text{the}\\;\\text{gradient}\\;\\text{of}\\;\\text{the}\\;\\text{final}\\;\\text{output}\\;v\\,\\text{wrt}\\;\\text{its}\\;\\text{parameters}\\;B}\\\\\n{\\text{It}\\;\\text{also}\\;\\text{calculates}\\;\\text{the}\\;\\text{gradient}\\;\\text{wrt}\\;\\text{its}\\;\\text{input,}\\;\\text{which}\\;\\text{is}\\;backpropagated\\,\\text{to}\\;\\text{the}\\;\\text{previous}\\;\\text{layer}}\\\\\n{\\text{which}\\;\\text{uses}\\;\\text{it}\\;\\text{to}\\;\\text{calculate}\\;\\text{the}\\;\\text{gradient}\\;\\text{wrt}\\;\\text{its}\\;\\text{parameters}\\;\\text{and}\\;\\text{input..}\\;\\text{}}\t\n\\end{gather*}&quot;,&quot;font&quot;:{&quot;family&quot;:&quot;Arial&quot;,&quot;color&quot;:&quot;#000000&quot;,&quot;size&quot;:11},&quot;type&quot;:&quot;gather*&quot;,&quot;aid&quot;:null,&quot;backgroundColorModified&quot;:false,&quot;ts&quot;:1761865024995,&quot;cs&quot;:&quot;YgDsJi4vKp34NJxwIex2FQ==&quot;,&quot;size&quot;:{&quot;width&quot;:732.7087485564304,&quot;height&quot;:338.75587454068244}}" id="194" name="Google Shape;194;p26"/>
           <p:cNvPicPr preferRelativeResize="0"/>
           <p:nvPr/>
         </p:nvPicPr>
@@ -8191,7 +8191,7 @@
       </p:pic>
       <p:sp>
         <p:nvSpPr>
-          <p:cNvPr id="193" name="Google Shape;193;p26"/>
+          <p:cNvPr id="195" name="Google Shape;195;p26"/>
           <p:cNvSpPr txBox="1"/>
           <p:nvPr/>
         </p:nvSpPr>
@@ -8252,7 +8252,7 @@
   <p:cSld>
     <p:spTree>
       <p:nvGrpSpPr>
-        <p:cNvPr id="197" name="Shape 197"/>
+        <p:cNvPr id="199" name="Shape 199"/>
         <p:cNvGrpSpPr/>
         <p:nvPr/>
       </p:nvGrpSpPr>
@@ -8266,7 +8266,7 @@
       </p:grpSpPr>
       <p:sp>
         <p:nvSpPr>
-          <p:cNvPr id="198" name="Google Shape;198;p27"/>
+          <p:cNvPr id="200" name="Google Shape;200;p27"/>
           <p:cNvSpPr txBox="1"/>
           <p:nvPr>
             <p:ph idx="4294967295" type="title"/>
@@ -8298,7 +8298,7 @@
             </a:pPr>
             <a:r>
               <a:rPr lang="en"/>
-              <a:t>Derivative of a vector against a matrix</a:t>
+              <a:t>Examples of f</a:t>
             </a:r>
             <a:endParaRPr/>
           </a:p>
@@ -8306,7 +8306,7 @@
       </p:sp>
       <p:sp>
         <p:nvSpPr>
-          <p:cNvPr id="199" name="Google Shape;199;p27"/>
+          <p:cNvPr id="201" name="Google Shape;201;p27"/>
           <p:cNvSpPr txBox="1"/>
           <p:nvPr/>
         </p:nvSpPr>
@@ -8349,9 +8349,59 @@
           </a:p>
         </p:txBody>
       </p:sp>
+      <p:sp>
+        <p:nvSpPr>
+          <p:cNvPr id="202" name="Google Shape;202;p27"/>
+          <p:cNvSpPr txBox="1"/>
+          <p:nvPr/>
+        </p:nvSpPr>
+        <p:spPr>
+          <a:xfrm>
+            <a:off x="579775" y="4740375"/>
+            <a:ext cx="5421600" cy="400200"/>
+          </a:xfrm>
+          <a:prstGeom prst="rect">
+            <a:avLst/>
+          </a:prstGeom>
+          <a:noFill/>
+          <a:ln>
+            <a:noFill/>
+          </a:ln>
+        </p:spPr>
+        <p:txBody>
+          <a:bodyPr anchorCtr="0" anchor="t" bIns="91425" lIns="91425" spcFirstLastPara="1" rIns="91425" wrap="square" tIns="91425">
+            <a:spAutoFit/>
+          </a:bodyPr>
+          <a:lstStyle/>
+          <a:p>
+            <a:pPr indent="0" lvl="0" marL="0" rtl="0" algn="l">
+              <a:spcBef>
+                <a:spcPts val="0"/>
+              </a:spcBef>
+              <a:spcAft>
+                <a:spcPts val="0"/>
+              </a:spcAft>
+              <a:buNone/>
+            </a:pPr>
+            <a:r>
+              <a:rPr lang="en">
+                <a:solidFill>
+                  <a:schemeClr val="dk2"/>
+                </a:solidFill>
+              </a:rPr>
+              <a:t>Code: 2_layer_network_optimization.py</a:t>
+            </a:r>
+            <a:endParaRPr>
+              <a:solidFill>
+                <a:schemeClr val="dk2"/>
+              </a:solidFill>
+            </a:endParaRPr>
+          </a:p>
+        </p:txBody>
+      </p:sp>
       <p:pic>
         <p:nvPicPr>
-          <p:cNvPr descr="{&quot;aid&quot;:null,&quot;code&quot;:&quot;\\begin{gather*}\n{\\text{Let's}\\;\\text{consider}\\;\\text{the}\\;ij^{th}\\;\\text{element}\\;\\text{of}\\;\\diff{v}{A},\\,\\text{i.e.,}\\;\\diff{v}{A_{ij}}}\\\\\n{\\text{Now}\\;\\text{we}\\;\\text{have}\\;\\text{a}\\;\\text{chain..}}\\\\\n{A_{ij}\\to y\\to v,\\,\\text{here}\\;y\\,\\;\\text{is}\\;\\text{a}\\;\\text{vector}}\\\\\n{\\text{Now..}}\\\\\n{y_{i}=\\sum_{j=1}^{m}A_{ij}x_{j}}\\\\\n{\\text{Since}\\;\\text{each}\\;\\text{element}\\;\\text{of}\\;y\\,\\;\\text{is}\\;\\text{the}\\;\\text{corresponding}\\,\\text{row}\\;\\text{of}\\;\\text{A}\\;\\text{multiplied}\\;\\text{with}\\;x,\\,}\\\\\n{\\text{and}\\;\\text{other}\\;\\text{rows}\\;\\text{of}\\;\\text{A}\\,\\text{don't}\\;\\text{affect}\\;y_{i},\\,\\text{the}\\;\\text{chain}\\;\\text{above}\\;\\text{becomes}\\;\\text{a}\\;\\text{scalar}\\;\\text{chain..}\\text{}}\\\\\n{A_{ij}\\to y_{i}\\to v}\\\\\n{\\text{Now}\\;\\text{we}\\;\\text{can}\\;\\text{apply}\\;\\text{the}\\;\\text{chain}\\;\\text{rule..}}\\\\\n{\\diff{v}{A_{ij}}=\\diff{v}{y_{i}}\\diff{y_{i}}{A_{ij}}=\\diff{v}{y_{i}}\\diff{\\sum_{j=1}^{m}A_{ij}x_{j}}{A_{ij}}=\\diff{v}{y_{i}}x_{j}}\\\\\n{\\text{So..}\\;\\diff{v}{A}\\,\\text{becomes}\\;\\text{the}\\;\\text{outer}\\;\\text{product}\\;\\text{of}\\;\\text{the}\\;\\text{vectors}\\;\\diff{v}{y}\\,\\text{and}\\;x!}\\\\\n{\\diff{v}{A}=\\diff{v}{y}x^{T}\\,\\text{}}\\\\\n{\\text{Verify}\\;\\text{that}\\;\\text{the}\\;\\text{dimensions}\\;\\text{work}\\;\\text{out!}}\t\n\\end{gather*}&quot;,&quot;font&quot;:{&quot;size&quot;:10.5,&quot;family&quot;:&quot;Arial&quot;,&quot;color&quot;:&quot;#000000&quot;},&quot;backgroundColorModified&quot;:false,&quot;backgroundColor&quot;:&quot;#FFFFFF&quot;,&quot;type&quot;:&quot;gather*&quot;,&quot;id&quot;:&quot;8&quot;,&quot;ts&quot;:1760275169609,&quot;cs&quot;:&quot;l2j0dH2bjN2hjF9nIGzL3Q==&quot;,&quot;size&quot;:{&quot;width&quot;:557.3779509186352,&quot;height&quot;:409.9841679790026}}" id="200" name="Google Shape;200;p27"/>
+          <p:cNvPr descr="{&quot;backgroundColorModified&quot;:false,&quot;backgroundColor&quot;:&quot;#FFFFFF&quot;,&quot;id&quot;:&quot;10&quot;,&quot;aid&quot;:null,&quot;font&quot;:{&quot;color&quot;:&quot;#000000&quot;,&quot;size&quot;:11,&quot;family&quot;:&quot;Arial&quot;},&quot;code&quot;:&quot;\\begin{gather*}\n{\\text{Let's}\\;\\text{look}\\;\\text{at}\\;\\text{some}\\;\\text{examples}\\;\\text{of}\\;f}\\\\\n{x\\to A\\to y\\to B\\to u\\to f\\to v}\\\\\n{\\text{Example}\\;\\text{1:}}\\\\\n{f:\\,\\text{Sum}\\;\\text{function}}\\\\\n{v=\\sum_{i=1}^{k}u_{k}}\\\\\n{\\diff{v}{u}:\\,k\\times1\\,\\text{vector}}\\\\\n{\\text{Let's}\\;\\text{consider}\\;i^{th\\,}\\text{element}\\;\\text{of}\\;\\diff{v}{u}}\\\\\n{\\diff{v}{u_{i}}=1}\\\\\n{\\text{so}\\;\\diff{v}{u}=ones\\,\\left(n\\times1\\right)}\t\n\\end{gather*}&quot;,&quot;type&quot;:&quot;gather*&quot;,&quot;ts&quot;:1760305614423,&quot;cs&quot;:&quot;LoN2fiPvYipRZGBesM+EXg==&quot;,&quot;size&quot;:{&quot;width&quot;:240.5,&quot;height&quot;:305.75}}" id="203" name="Google Shape;203;p27"/>
           <p:cNvPicPr preferRelativeResize="0"/>
           <p:nvPr/>
         </p:nvPicPr>
@@ -8365,8 +8415,8 @@
         </p:blipFill>
         <p:spPr>
           <a:xfrm>
-            <a:off x="553150" y="806400"/>
-            <a:ext cx="5546225" cy="4079576"/>
+            <a:off x="579775" y="1005275"/>
+            <a:ext cx="2290763" cy="2912269"/>
           </a:xfrm>
           <a:prstGeom prst="rect">
             <a:avLst/>
@@ -8379,7 +8429,7 @@
       </p:pic>
       <p:pic>
         <p:nvPicPr>
-          <p:cNvPr descr="{&quot;id&quot;:&quot;9&quot;,&quot;backgroundColor&quot;:&quot;#FFFFFF&quot;,&quot;code&quot;:&quot;\\begin{gather*}\n{\\text{Now}\\;\\text{let's}\\;\\text{add}\\;\\text{another}\\;\\text{layer}\\;\\text{in}\\;\\text{front..}}\\\\\n{x\\to A\\to y\\to B\\to u\\to f\\to v}\\\\\n{\\text{As}\\;\\text{before,}\\;x:\\,m\\times1,\\,A:\\,n\\times m.\\,B:\\,k\\times n}\\\\\n{\\text{From}\\;\\text{before,}}\\\\\n{\\diff{v}{B}=\\diff{v}{u}y^{T},\\diff{v}{y}=B^{T}\\diff{v}{u}}\\\\\n{\\text{And}}\\\\\n{\\diff{v}{A}=\\diff{v}{y}x^{T}}\\\\\n{\\text{We}\\;\\text{can}\\;\\text{think}\\;\\text{of}\\;\\text{this}\\;\\text{as}\\;\\text{a}\\;2\\,\\text{layer}\\;\\text{network,}\\;\\text{where}\\;\\text{the}\\;\\text{parameters}\\;\\text{of}\\;\\text{each}\\;\\text{layer}\\;\\text{are}\\;\\text{A}\\;\\text{and}\\;\\text{B}}\\\\\n{x\\,\\text{is}\\;\\text{the}\\;\\text{input}\\;\\text{to}\\;\\text{layer}\\;\\text{1,}\\;\\text{and}\\;y\\,\\text{is}\\;\\text{the}\\;\\text{output.}\\;\\text{}}\\\\\n{y\\,\\,\\text{is}\\;\\text{the}\\;\\text{input}\\;\\text{to}\\;\\text{layer}\\;\\text{2.}\\;\\text{Output}\\;\\text{of}\\;\\text{layer}\\;\\text{2},\\,u\\;\\text{goes}\\;\\text{into}\\;\\text{function}\\;f\\,\\text{that}\\;\\text{produces}\\;\\text{a}\\;\\text{scalar}\\;\\text{value}\\;v}\\\\\n{\\text{Layer}\\;\\text{2}\\;\\text{calculates}\\;\\text{the}\\;\\text{gradient}\\;\\text{of}\\;\\text{the}\\;\\text{final}\\;\\text{output}\\;v\\,\\text{wrt}\\;\\text{its}\\;\\text{parameters}\\;B}\\\\\n{\\text{It}\\;\\text{also}\\;\\text{calculates}\\;\\text{the}\\;\\text{gradient}\\;\\text{wrt}\\;\\text{its}\\;\\text{input,}\\;\\text{which}\\;\\text{is}\\;backpropagated\\,\\text{to}\\;\\text{the}\\;\\text{previous}\\;\\text{layer}}\\\\\n{\\text{which}\\;\\text{uses}\\;\\text{it}\\;\\text{to}\\;\\text{calculate}\\;\\text{the}\\;\\text{gradient}\\;\\text{wrt}\\;\\text{its}\\;\\text{parameters}\\;\\text{and}\\;\\text{input..}\\;\\text{}}\t\n\\end{gather*}&quot;,&quot;font&quot;:{&quot;family&quot;:&quot;Arial&quot;,&quot;color&quot;:&quot;#000000&quot;,&quot;size&quot;:10.5},&quot;type&quot;:&quot;gather*&quot;,&quot;aid&quot;:null,&quot;backgroundColorModified&quot;:false,&quot;ts&quot;:1760276974089,&quot;cs&quot;:&quot;w4DnoI+cLB2zQV5+266eWQ==&quot;,&quot;size&quot;:{&quot;width&quot;:677,&quot;height&quot;:313}}" id="201" name="Google Shape;201;p27"/>
+          <p:cNvPr descr="{&quot;aid&quot;:null,&quot;code&quot;:&quot;\\begin{gather*}\n{\\text{Example}\\;\\text{2:}}\\\\\n{f:\\,\\text{Norm}}\\\\\n{v=\\frac{1}{2}\\sum_{i=1}^{k}u_{k}^{2}}\\\\\n{\\diff{v}{u_{i}}=u_{i}}\\\\\n{\\text{so}\\;\\diff{v}{u}=u}\t\n\\end{gather*}&quot;,&quot;backgroundColorModified&quot;:false,&quot;font&quot;:{&quot;size&quot;:11,&quot;family&quot;:&quot;Arial&quot;,&quot;color&quot;:&quot;#000000&quot;},&quot;type&quot;:&quot;gather*&quot;,&quot;id&quot;:&quot;10&quot;,&quot;backgroundColor&quot;:&quot;#FFFFFF&quot;,&quot;ts&quot;:1760305994868,&quot;cs&quot;:&quot;0CnibtYFpyvKYn0aLUIA2w==&quot;,&quot;size&quot;:{&quot;width&quot;:94.33333333333333,&quot;height&quot;:179.33333333333334}}" id="204" name="Google Shape;204;p27"/>
           <p:cNvPicPr preferRelativeResize="0"/>
           <p:nvPr/>
         </p:nvPicPr>
@@ -8393,8 +8443,8 @@
         </p:blipFill>
         <p:spPr>
           <a:xfrm>
-            <a:off x="4572000" y="2571750"/>
-            <a:ext cx="6448425" cy="2981325"/>
+            <a:off x="4212225" y="1005275"/>
+            <a:ext cx="1077174" cy="2047776"/>
           </a:xfrm>
           <a:prstGeom prst="rect">
             <a:avLst/>
@@ -8418,7 +8468,7 @@
   <p:cSld>
     <p:spTree>
       <p:nvGrpSpPr>
-        <p:cNvPr id="205" name="Shape 205"/>
+        <p:cNvPr id="208" name="Shape 208"/>
         <p:cNvGrpSpPr/>
         <p:nvPr/>
       </p:nvGrpSpPr>
@@ -8432,7 +8482,7 @@
       </p:grpSpPr>
       <p:sp>
         <p:nvSpPr>
-          <p:cNvPr id="206" name="Google Shape;206;p28"/>
+          <p:cNvPr id="209" name="Google Shape;209;p28"/>
           <p:cNvSpPr txBox="1"/>
           <p:nvPr>
             <p:ph idx="4294967295" type="title"/>
@@ -8464,7 +8514,7 @@
             </a:pPr>
             <a:r>
               <a:rPr lang="en"/>
-              <a:t>Examples of f</a:t>
+              <a:t>Adding a bias</a:t>
             </a:r>
             <a:endParaRPr/>
           </a:p>
@@ -8472,13 +8522,13 @@
       </p:sp>
       <p:sp>
         <p:nvSpPr>
-          <p:cNvPr id="207" name="Google Shape;207;p28"/>
+          <p:cNvPr id="210" name="Google Shape;210;p28"/>
           <p:cNvSpPr txBox="1"/>
           <p:nvPr/>
         </p:nvSpPr>
         <p:spPr>
           <a:xfrm>
-            <a:off x="381450" y="806388"/>
+            <a:off x="1195300" y="596463"/>
             <a:ext cx="3013800" cy="461700"/>
           </a:xfrm>
           <a:prstGeom prst="rect">
@@ -8517,14 +8567,66 @@
       </p:sp>
       <p:sp>
         <p:nvSpPr>
-          <p:cNvPr id="208" name="Google Shape;208;p28"/>
+          <p:cNvPr id="211" name="Google Shape;211;p28"/>
+          <p:cNvSpPr/>
+          <p:nvPr/>
+        </p:nvSpPr>
+        <p:spPr>
+          <a:xfrm>
+            <a:off x="2832550" y="1074800"/>
+            <a:ext cx="775200" cy="775200"/>
+          </a:xfrm>
+          <a:prstGeom prst="roundRect">
+            <a:avLst>
+              <a:gd fmla="val 16667" name="adj"/>
+            </a:avLst>
+          </a:prstGeom>
+          <a:solidFill>
+            <a:schemeClr val="lt2"/>
+          </a:solidFill>
+          <a:ln cap="flat" cmpd="sng" w="9525">
+            <a:solidFill>
+              <a:schemeClr val="dk2"/>
+            </a:solidFill>
+            <a:prstDash val="solid"/>
+            <a:round/>
+            <a:headEnd len="sm" w="sm" type="none"/>
+            <a:tailEnd len="sm" w="sm" type="none"/>
+          </a:ln>
+        </p:spPr>
+        <p:txBody>
+          <a:bodyPr anchorCtr="0" anchor="ctr" bIns="91425" lIns="91425" spcFirstLastPara="1" rIns="91425" wrap="square" tIns="91425">
+            <a:noAutofit/>
+          </a:bodyPr>
+          <a:lstStyle/>
+          <a:p>
+            <a:pPr indent="0" lvl="0" marL="0" rtl="0" algn="ctr">
+              <a:spcBef>
+                <a:spcPts val="0"/>
+              </a:spcBef>
+              <a:spcAft>
+                <a:spcPts val="0"/>
+              </a:spcAft>
+              <a:buNone/>
+            </a:pPr>
+            <a:r>
+              <a:rPr lang="en"/>
+              <a:t>A</a:t>
+            </a:r>
+            <a:endParaRPr/>
+          </a:p>
+        </p:txBody>
+      </p:sp>
+      <p:sp>
+        <p:nvSpPr>
+          <p:cNvPr id="212" name="Google Shape;212;p28"/>
           <p:cNvSpPr txBox="1"/>
           <p:nvPr/>
         </p:nvSpPr>
         <p:spPr>
           <a:xfrm>
-            <a:off x="579775" y="4740375"/>
-            <a:ext cx="5421600" cy="400200"/>
+            <a:off x="1726300" y="1231550"/>
+            <a:ext cx="323100" cy="461700"/>
           </a:xfrm>
           <a:prstGeom prst="rect">
             <a:avLst/>
@@ -8550,14 +8652,14 @@
               <a:buNone/>
             </a:pPr>
             <a:r>
-              <a:rPr lang="en">
+              <a:rPr lang="en" sz="1800">
                 <a:solidFill>
                   <a:schemeClr val="dk2"/>
                 </a:solidFill>
               </a:rPr>
-              <a:t>Code: 2_layer_network_optimization.py</a:t>
-            </a:r>
-            <a:endParaRPr>
+              <a:t>x</a:t>
+            </a:r>
+            <a:endParaRPr sz="1800">
               <a:solidFill>
                 <a:schemeClr val="dk2"/>
               </a:solidFill>
@@ -8565,9 +8667,325 @@
           </a:p>
         </p:txBody>
       </p:sp>
+      <p:cxnSp>
+        <p:nvCxnSpPr>
+          <p:cNvPr id="213" name="Google Shape;213;p28"/>
+          <p:cNvCxnSpPr>
+            <a:stCxn id="212" idx="3"/>
+            <a:endCxn id="211" idx="1"/>
+          </p:cNvCxnSpPr>
+          <p:nvPr/>
+        </p:nvCxnSpPr>
+        <p:spPr>
+          <a:xfrm>
+            <a:off x="2049400" y="1462400"/>
+            <a:ext cx="783300" cy="0"/>
+          </a:xfrm>
+          <a:prstGeom prst="straightConnector1">
+            <a:avLst/>
+          </a:prstGeom>
+          <a:noFill/>
+          <a:ln cap="flat" cmpd="sng" w="9525">
+            <a:solidFill>
+              <a:schemeClr val="dk2"/>
+            </a:solidFill>
+            <a:prstDash val="solid"/>
+            <a:round/>
+            <a:headEnd len="med" w="med" type="none"/>
+            <a:tailEnd len="med" w="med" type="triangle"/>
+          </a:ln>
+        </p:spPr>
+      </p:cxnSp>
+      <p:sp>
+        <p:nvSpPr>
+          <p:cNvPr id="214" name="Google Shape;214;p28"/>
+          <p:cNvSpPr txBox="1"/>
+          <p:nvPr/>
+        </p:nvSpPr>
+        <p:spPr>
+          <a:xfrm>
+            <a:off x="3058600" y="2207550"/>
+            <a:ext cx="323100" cy="461700"/>
+          </a:xfrm>
+          <a:prstGeom prst="rect">
+            <a:avLst/>
+          </a:prstGeom>
+          <a:noFill/>
+          <a:ln>
+            <a:noFill/>
+          </a:ln>
+        </p:spPr>
+        <p:txBody>
+          <a:bodyPr anchorCtr="0" anchor="t" bIns="91425" lIns="91425" spcFirstLastPara="1" rIns="91425" wrap="square" tIns="91425">
+            <a:spAutoFit/>
+          </a:bodyPr>
+          <a:lstStyle/>
+          <a:p>
+            <a:pPr indent="0" lvl="0" marL="0" rtl="0" algn="l">
+              <a:spcBef>
+                <a:spcPts val="0"/>
+              </a:spcBef>
+              <a:spcAft>
+                <a:spcPts val="0"/>
+              </a:spcAft>
+              <a:buNone/>
+            </a:pPr>
+            <a:r>
+              <a:rPr lang="en" sz="1800">
+                <a:solidFill>
+                  <a:schemeClr val="dk2"/>
+                </a:solidFill>
+              </a:rPr>
+              <a:t>b</a:t>
+            </a:r>
+            <a:endParaRPr sz="1800">
+              <a:solidFill>
+                <a:schemeClr val="dk2"/>
+              </a:solidFill>
+            </a:endParaRPr>
+          </a:p>
+        </p:txBody>
+      </p:sp>
+      <p:cxnSp>
+        <p:nvCxnSpPr>
+          <p:cNvPr id="215" name="Google Shape;215;p28"/>
+          <p:cNvCxnSpPr>
+            <a:stCxn id="214" idx="0"/>
+            <a:endCxn id="211" idx="2"/>
+          </p:cNvCxnSpPr>
+          <p:nvPr/>
+        </p:nvCxnSpPr>
+        <p:spPr>
+          <a:xfrm rot="10800000">
+            <a:off x="3220150" y="1849950"/>
+            <a:ext cx="0" cy="357600"/>
+          </a:xfrm>
+          <a:prstGeom prst="straightConnector1">
+            <a:avLst/>
+          </a:prstGeom>
+          <a:noFill/>
+          <a:ln cap="flat" cmpd="sng" w="9525">
+            <a:solidFill>
+              <a:schemeClr val="dk2"/>
+            </a:solidFill>
+            <a:prstDash val="solid"/>
+            <a:round/>
+            <a:headEnd len="med" w="med" type="none"/>
+            <a:tailEnd len="med" w="med" type="triangle"/>
+          </a:ln>
+        </p:spPr>
+      </p:cxnSp>
+      <p:cxnSp>
+        <p:nvCxnSpPr>
+          <p:cNvPr id="216" name="Google Shape;216;p28"/>
+          <p:cNvCxnSpPr>
+            <a:stCxn id="211" idx="3"/>
+          </p:cNvCxnSpPr>
+          <p:nvPr/>
+        </p:nvCxnSpPr>
+        <p:spPr>
+          <a:xfrm>
+            <a:off x="3607750" y="1462400"/>
+            <a:ext cx="468300" cy="0"/>
+          </a:xfrm>
+          <a:prstGeom prst="straightConnector1">
+            <a:avLst/>
+          </a:prstGeom>
+          <a:noFill/>
+          <a:ln cap="flat" cmpd="sng" w="9525">
+            <a:solidFill>
+              <a:schemeClr val="dk2"/>
+            </a:solidFill>
+            <a:prstDash val="solid"/>
+            <a:round/>
+            <a:headEnd len="med" w="med" type="none"/>
+            <a:tailEnd len="med" w="med" type="triangle"/>
+          </a:ln>
+        </p:spPr>
+      </p:cxnSp>
+      <p:sp>
+        <p:nvSpPr>
+          <p:cNvPr id="217" name="Google Shape;217;p28"/>
+          <p:cNvSpPr/>
+          <p:nvPr/>
+        </p:nvSpPr>
+        <p:spPr>
+          <a:xfrm>
+            <a:off x="4076050" y="1074800"/>
+            <a:ext cx="468300" cy="775200"/>
+          </a:xfrm>
+          <a:prstGeom prst="roundRect">
+            <a:avLst>
+              <a:gd fmla="val 16667" name="adj"/>
+            </a:avLst>
+          </a:prstGeom>
+          <a:solidFill>
+            <a:schemeClr val="lt2"/>
+          </a:solidFill>
+          <a:ln cap="flat" cmpd="sng" w="9525">
+            <a:solidFill>
+              <a:schemeClr val="dk2"/>
+            </a:solidFill>
+            <a:prstDash val="solid"/>
+            <a:round/>
+            <a:headEnd len="sm" w="sm" type="none"/>
+            <a:tailEnd len="sm" w="sm" type="none"/>
+          </a:ln>
+        </p:spPr>
+        <p:txBody>
+          <a:bodyPr anchorCtr="0" anchor="ctr" bIns="91425" lIns="91425" spcFirstLastPara="1" rIns="91425" wrap="square" tIns="91425">
+            <a:noAutofit/>
+          </a:bodyPr>
+          <a:lstStyle/>
+          <a:p>
+            <a:pPr indent="0" lvl="0" marL="0" rtl="0" algn="ctr">
+              <a:spcBef>
+                <a:spcPts val="0"/>
+              </a:spcBef>
+              <a:spcAft>
+                <a:spcPts val="0"/>
+              </a:spcAft>
+              <a:buNone/>
+            </a:pPr>
+            <a:r>
+              <a:rPr lang="en"/>
+              <a:t>f</a:t>
+            </a:r>
+            <a:endParaRPr/>
+          </a:p>
+        </p:txBody>
+      </p:sp>
+      <p:cxnSp>
+        <p:nvCxnSpPr>
+          <p:cNvPr id="218" name="Google Shape;218;p28"/>
+          <p:cNvCxnSpPr>
+            <a:stCxn id="217" idx="3"/>
+          </p:cNvCxnSpPr>
+          <p:nvPr/>
+        </p:nvCxnSpPr>
+        <p:spPr>
+          <a:xfrm>
+            <a:off x="4544350" y="1462400"/>
+            <a:ext cx="387600" cy="0"/>
+          </a:xfrm>
+          <a:prstGeom prst="straightConnector1">
+            <a:avLst/>
+          </a:prstGeom>
+          <a:noFill/>
+          <a:ln cap="flat" cmpd="sng" w="9525">
+            <a:solidFill>
+              <a:schemeClr val="dk2"/>
+            </a:solidFill>
+            <a:prstDash val="solid"/>
+            <a:round/>
+            <a:headEnd len="med" w="med" type="none"/>
+            <a:tailEnd len="med" w="med" type="triangle"/>
+          </a:ln>
+        </p:spPr>
+      </p:cxnSp>
+      <p:sp>
+        <p:nvSpPr>
+          <p:cNvPr id="219" name="Google Shape;219;p28"/>
+          <p:cNvSpPr txBox="1"/>
+          <p:nvPr/>
+        </p:nvSpPr>
+        <p:spPr>
+          <a:xfrm>
+            <a:off x="4998250" y="1231550"/>
+            <a:ext cx="387600" cy="461700"/>
+          </a:xfrm>
+          <a:prstGeom prst="rect">
+            <a:avLst/>
+          </a:prstGeom>
+          <a:noFill/>
+          <a:ln>
+            <a:noFill/>
+          </a:ln>
+        </p:spPr>
+        <p:txBody>
+          <a:bodyPr anchorCtr="0" anchor="t" bIns="91425" lIns="91425" spcFirstLastPara="1" rIns="91425" wrap="square" tIns="91425">
+            <a:spAutoFit/>
+          </a:bodyPr>
+          <a:lstStyle/>
+          <a:p>
+            <a:pPr indent="0" lvl="0" marL="0" rtl="0" algn="l">
+              <a:spcBef>
+                <a:spcPts val="0"/>
+              </a:spcBef>
+              <a:spcAft>
+                <a:spcPts val="0"/>
+              </a:spcAft>
+              <a:buNone/>
+            </a:pPr>
+            <a:r>
+              <a:rPr lang="en" sz="1800">
+                <a:solidFill>
+                  <a:schemeClr val="dk2"/>
+                </a:solidFill>
+              </a:rPr>
+              <a:t>L</a:t>
+            </a:r>
+            <a:endParaRPr sz="1800">
+              <a:solidFill>
+                <a:schemeClr val="dk2"/>
+              </a:solidFill>
+            </a:endParaRPr>
+          </a:p>
+        </p:txBody>
+      </p:sp>
+      <p:sp>
+        <p:nvSpPr>
+          <p:cNvPr id="220" name="Google Shape;220;p28"/>
+          <p:cNvSpPr txBox="1"/>
+          <p:nvPr/>
+        </p:nvSpPr>
+        <p:spPr>
+          <a:xfrm>
+            <a:off x="3680350" y="1000700"/>
+            <a:ext cx="323100" cy="461700"/>
+          </a:xfrm>
+          <a:prstGeom prst="rect">
+            <a:avLst/>
+          </a:prstGeom>
+          <a:noFill/>
+          <a:ln>
+            <a:noFill/>
+          </a:ln>
+        </p:spPr>
+        <p:txBody>
+          <a:bodyPr anchorCtr="0" anchor="t" bIns="91425" lIns="91425" spcFirstLastPara="1" rIns="91425" wrap="square" tIns="91425">
+            <a:spAutoFit/>
+          </a:bodyPr>
+          <a:lstStyle/>
+          <a:p>
+            <a:pPr indent="0" lvl="0" marL="0" rtl="0" algn="l">
+              <a:spcBef>
+                <a:spcPts val="0"/>
+              </a:spcBef>
+              <a:spcAft>
+                <a:spcPts val="0"/>
+              </a:spcAft>
+              <a:buNone/>
+            </a:pPr>
+            <a:r>
+              <a:rPr lang="en" sz="1800">
+                <a:solidFill>
+                  <a:schemeClr val="dk2"/>
+                </a:solidFill>
+              </a:rPr>
+              <a:t>y</a:t>
+            </a:r>
+            <a:endParaRPr sz="1800">
+              <a:solidFill>
+                <a:schemeClr val="dk2"/>
+              </a:solidFill>
+            </a:endParaRPr>
+          </a:p>
+        </p:txBody>
+      </p:sp>
       <p:pic>
         <p:nvPicPr>
-          <p:cNvPr descr="{&quot;backgroundColorModified&quot;:false,&quot;backgroundColor&quot;:&quot;#FFFFFF&quot;,&quot;id&quot;:&quot;10&quot;,&quot;aid&quot;:null,&quot;font&quot;:{&quot;color&quot;:&quot;#000000&quot;,&quot;size&quot;:11,&quot;family&quot;:&quot;Arial&quot;},&quot;code&quot;:&quot;\\begin{gather*}\n{\\text{Let's}\\;\\text{look}\\;\\text{at}\\;\\text{some}\\;\\text{examples}\\;\\text{of}\\;f}\\\\\n{x\\to A\\to y\\to B\\to u\\to f\\to v}\\\\\n{\\text{Example}\\;\\text{1:}}\\\\\n{f:\\,\\text{Sum}\\;\\text{function}}\\\\\n{v=\\sum_{i=1}^{k}u_{k}}\\\\\n{\\diff{v}{u}:\\,k\\times1\\,\\text{vector}}\\\\\n{\\text{Let's}\\;\\text{consider}\\;i^{th\\,}\\text{element}\\;\\text{of}\\;\\diff{v}{u}}\\\\\n{\\diff{v}{u_{i}}=1}\\\\\n{\\text{so}\\;\\diff{v}{u}=ones\\,\\left(n\\times1\\right)}\t\n\\end{gather*}&quot;,&quot;type&quot;:&quot;gather*&quot;,&quot;ts&quot;:1760305614423,&quot;cs&quot;:&quot;LoN2fiPvYipRZGBesM+EXg==&quot;,&quot;size&quot;:{&quot;width&quot;:240.5,&quot;height&quot;:305.75}}" id="209" name="Google Shape;209;p28"/>
+          <p:cNvPr descr="{&quot;code&quot;:&quot;\\begin{gather*}\n{\\text{Now}\\;\\text{lets}\\;\\text{add}\\;\\text{a}\\;\\text{bias}\\;\\text{term}}\\\\\n{\\text{So,}\\;y=Ax+b;\\,x:m\\times1,\\,A:\\,n\\times m,\\,b:\\,n\\times1}\\\\\n{L=f\\left(y\\right)\\,}\\\\\n{\\text{We}\\;\\text{want}\\;\\diff{L}{b}}\\\\\n{\\text{Let's}\\;\\text{consider}\\;i^{th\\,}\\text{element}\\;\\text{of}\\,\\diff{L}{b}}\\\\\n{\\text{It}\\;\\text{is}\\;\\text{easy}\\;\\text{to}\\;\\text{see}\\;\\text{that}\\;b_{i}\\,\\text{only}\\;\\text{affects}\\;y_{i},\\,\\text{so}\\;\\text{we}\\;\\text{get}\\;\\text{a}\\;\\text{scalar}\\;\\text{chain}\\;\\text{rule}}\\\\\n{b_{i}\\to y_{i}\\to L}\\\\\n{\\diff{L}{b_{i}}=\\diff{L}{y_{i}}\\diff{y_{i}}{b_{i}}=\\diff{L}{y_{i}}}\t\n\\end{gather*}&quot;,&quot;type&quot;:&quot;gather*&quot;,&quot;backgroundColorModified&quot;:false,&quot;backgroundColor&quot;:&quot;#FFFFFF&quot;,&quot;aid&quot;:null,&quot;font&quot;:{&quot;size&quot;:12,&quot;color&quot;:&quot;#000000&quot;,&quot;family&quot;:&quot;Arial&quot;},&quot;id&quot;:&quot;11&quot;,&quot;ts&quot;:1760307980441,&quot;cs&quot;:&quot;+MCI3wTTaXcxbjPD5qWmgQ==&quot;,&quot;size&quot;:{&quot;width&quot;:536,&quot;height&quot;:252.5}}" id="221" name="Google Shape;221;p28"/>
           <p:cNvPicPr preferRelativeResize="0"/>
           <p:nvPr/>
         </p:nvPicPr>
@@ -8581,36 +8999,8 @@
         </p:blipFill>
         <p:spPr>
           <a:xfrm>
-            <a:off x="579775" y="1005275"/>
-            <a:ext cx="2290763" cy="2912269"/>
-          </a:xfrm>
-          <a:prstGeom prst="rect">
-            <a:avLst/>
-          </a:prstGeom>
-          <a:noFill/>
-          <a:ln>
-            <a:noFill/>
-          </a:ln>
-        </p:spPr>
-      </p:pic>
-      <p:pic>
-        <p:nvPicPr>
-          <p:cNvPr descr="{&quot;aid&quot;:null,&quot;code&quot;:&quot;\\begin{gather*}\n{\\text{Example}\\;\\text{2:}}\\\\\n{f:\\,\\text{Norm}}\\\\\n{v=\\frac{1}{2}\\sum_{i=1}^{k}u_{k}^{2}}\\\\\n{\\diff{v}{u_{i}}=u_{i}}\\\\\n{\\text{so}\\;\\diff{v}{u}=u}\t\n\\end{gather*}&quot;,&quot;backgroundColorModified&quot;:false,&quot;font&quot;:{&quot;size&quot;:11,&quot;family&quot;:&quot;Arial&quot;,&quot;color&quot;:&quot;#000000&quot;},&quot;type&quot;:&quot;gather*&quot;,&quot;id&quot;:&quot;10&quot;,&quot;backgroundColor&quot;:&quot;#FFFFFF&quot;,&quot;ts&quot;:1760305994868,&quot;cs&quot;:&quot;0CnibtYFpyvKYn0aLUIA2w==&quot;,&quot;size&quot;:{&quot;width&quot;:94.33333333333333,&quot;height&quot;:179.33333333333334}}" id="210" name="Google Shape;210;p28"/>
-          <p:cNvPicPr preferRelativeResize="0"/>
-          <p:nvPr/>
-        </p:nvPicPr>
-        <p:blipFill>
-          <a:blip r:embed="rId4">
-            <a:alphaModFix/>
-          </a:blip>
-          <a:stretch>
-            <a:fillRect/>
-          </a:stretch>
-        </p:blipFill>
-        <p:spPr>
-          <a:xfrm>
-            <a:off x="4212225" y="1005275"/>
-            <a:ext cx="1077174" cy="2047776"/>
+            <a:off x="936325" y="2669250"/>
+            <a:ext cx="5105400" cy="2405063"/>
           </a:xfrm>
           <a:prstGeom prst="rect">
             <a:avLst/>
@@ -8634,7 +9024,7 @@
   <p:cSld>
     <p:spTree>
       <p:nvGrpSpPr>
-        <p:cNvPr id="214" name="Shape 214"/>
+        <p:cNvPr id="225" name="Shape 225"/>
         <p:cNvGrpSpPr/>
         <p:nvPr/>
       </p:nvGrpSpPr>
@@ -8648,15 +9038,15 @@
       </p:grpSpPr>
       <p:sp>
         <p:nvSpPr>
-          <p:cNvPr id="215" name="Google Shape;215;p29"/>
+          <p:cNvPr id="226" name="Google Shape;226;p29"/>
           <p:cNvSpPr txBox="1"/>
           <p:nvPr>
-            <p:ph idx="4294967295" type="title"/>
+            <p:ph type="ctrTitle"/>
           </p:nvPr>
         </p:nvSpPr>
         <p:spPr>
           <a:xfrm>
-            <a:off x="259350" y="157250"/>
+            <a:off x="311700" y="244849"/>
             <a:ext cx="8520600" cy="572700"/>
           </a:xfrm>
           <a:prstGeom prst="rect">
@@ -8664,12 +9054,12 @@
           </a:prstGeom>
         </p:spPr>
         <p:txBody>
-          <a:bodyPr anchorCtr="0" anchor="t" bIns="91425" lIns="91425" spcFirstLastPara="1" rIns="91425" wrap="square" tIns="91425">
+          <a:bodyPr anchorCtr="0" anchor="b" bIns="91425" lIns="91425" spcFirstLastPara="1" rIns="91425" wrap="square" tIns="91425">
             <a:normAutofit fontScale="90000"/>
           </a:bodyPr>
           <a:lstStyle/>
           <a:p>
-            <a:pPr indent="0" lvl="0" marL="0" rtl="0" algn="l">
+            <a:pPr indent="0" lvl="0" marL="0" rtl="0" algn="ctr">
               <a:spcBef>
                 <a:spcPts val="0"/>
               </a:spcBef>
@@ -8680,7 +9070,7 @@
             </a:pPr>
             <a:r>
               <a:rPr lang="en"/>
-              <a:t>Adding a bias</a:t>
+              <a:t>Homework problems</a:t>
             </a:r>
             <a:endParaRPr/>
           </a:p>
@@ -8688,13 +9078,13 @@
       </p:sp>
       <p:sp>
         <p:nvSpPr>
-          <p:cNvPr id="216" name="Google Shape;216;p29"/>
+          <p:cNvPr id="227" name="Google Shape;227;p29"/>
           <p:cNvSpPr txBox="1"/>
           <p:nvPr/>
         </p:nvSpPr>
         <p:spPr>
           <a:xfrm>
-            <a:off x="1195300" y="596463"/>
+            <a:off x="381450" y="587161"/>
             <a:ext cx="3013800" cy="461700"/>
           </a:xfrm>
           <a:prstGeom prst="rect">
@@ -8733,66 +9123,68 @@
       </p:sp>
       <p:sp>
         <p:nvSpPr>
-          <p:cNvPr id="217" name="Google Shape;217;p29"/>
-          <p:cNvSpPr/>
+          <p:cNvPr id="228" name="Google Shape;228;p29"/>
+          <p:cNvSpPr txBox="1"/>
           <p:nvPr/>
         </p:nvSpPr>
         <p:spPr>
           <a:xfrm>
-            <a:off x="2832550" y="1074800"/>
-            <a:ext cx="775200" cy="775200"/>
-          </a:xfrm>
-          <a:prstGeom prst="roundRect">
-            <a:avLst>
-              <a:gd fmla="val 16667" name="adj"/>
-            </a:avLst>
-          </a:prstGeom>
-          <a:solidFill>
-            <a:schemeClr val="lt2"/>
-          </a:solidFill>
-          <a:ln cap="flat" cmpd="sng" w="9525">
-            <a:solidFill>
-              <a:schemeClr val="dk2"/>
-            </a:solidFill>
-            <a:prstDash val="solid"/>
-            <a:round/>
-            <a:headEnd len="sm" w="sm" type="none"/>
-            <a:tailEnd len="sm" w="sm" type="none"/>
+            <a:off x="367400" y="682100"/>
+            <a:ext cx="7553700" cy="415500"/>
+          </a:xfrm>
+          <a:prstGeom prst="rect">
+            <a:avLst/>
+          </a:prstGeom>
+          <a:noFill/>
+          <a:ln>
+            <a:noFill/>
           </a:ln>
         </p:spPr>
         <p:txBody>
-          <a:bodyPr anchorCtr="0" anchor="ctr" bIns="91425" lIns="91425" spcFirstLastPara="1" rIns="91425" wrap="square" tIns="91425">
-            <a:noAutofit/>
+          <a:bodyPr anchorCtr="0" anchor="t" bIns="91425" lIns="91425" spcFirstLastPara="1" rIns="91425" wrap="square" tIns="91425">
+            <a:spAutoFit/>
           </a:bodyPr>
           <a:lstStyle/>
           <a:p>
-            <a:pPr indent="0" lvl="0" marL="0" rtl="0" algn="ctr">
-              <a:spcBef>
-                <a:spcPts val="0"/>
-              </a:spcBef>
-              <a:spcAft>
-                <a:spcPts val="0"/>
-              </a:spcAft>
-              <a:buNone/>
+            <a:pPr indent="-323850" lvl="0" marL="457200" rtl="0" algn="l">
+              <a:spcBef>
+                <a:spcPts val="0"/>
+              </a:spcBef>
+              <a:spcAft>
+                <a:spcPts val="0"/>
+              </a:spcAft>
+              <a:buClr>
+                <a:schemeClr val="dk2"/>
+              </a:buClr>
+              <a:buSzPts val="1500"/>
+              <a:buAutoNum type="arabicPeriod"/>
             </a:pPr>
             <a:r>
-              <a:rPr lang="en"/>
-              <a:t>A</a:t>
-            </a:r>
-            <a:endParaRPr/>
+              <a:rPr lang="en" sz="1500">
+                <a:solidFill>
+                  <a:schemeClr val="dk2"/>
+                </a:solidFill>
+              </a:rPr>
+              <a:t>Hadamard product of two vectors is defined as the element-wise product. Eg., </a:t>
+            </a:r>
+            <a:endParaRPr sz="1500">
+              <a:solidFill>
+                <a:schemeClr val="dk2"/>
+              </a:solidFill>
+            </a:endParaRPr>
           </a:p>
         </p:txBody>
       </p:sp>
       <p:sp>
         <p:nvSpPr>
-          <p:cNvPr id="218" name="Google Shape;218;p29"/>
+          <p:cNvPr id="229" name="Google Shape;229;p29"/>
           <p:cNvSpPr txBox="1"/>
           <p:nvPr/>
         </p:nvSpPr>
         <p:spPr>
           <a:xfrm>
-            <a:off x="1726300" y="1231550"/>
-            <a:ext cx="323100" cy="461700"/>
+            <a:off x="421825" y="3145050"/>
+            <a:ext cx="7276200" cy="1739400"/>
           </a:xfrm>
           <a:prstGeom prst="rect">
             <a:avLst/>
@@ -8818,14 +9210,115 @@
               <a:buNone/>
             </a:pPr>
             <a:r>
-              <a:rPr lang="en" sz="1800">
+              <a:t/>
+            </a:r>
+            <a:endParaRPr sz="1500">
+              <a:solidFill>
+                <a:schemeClr val="dk2"/>
+              </a:solidFill>
+            </a:endParaRPr>
+          </a:p>
+          <a:p>
+            <a:pPr indent="0" lvl="0" marL="0" rtl="0" algn="l">
+              <a:spcBef>
+                <a:spcPts val="0"/>
+              </a:spcBef>
+              <a:spcAft>
+                <a:spcPts val="0"/>
+              </a:spcAft>
+              <a:buNone/>
+            </a:pPr>
+            <a:r>
+              <a:t/>
+            </a:r>
+            <a:endParaRPr>
+              <a:solidFill>
+                <a:schemeClr val="dk2"/>
+              </a:solidFill>
+            </a:endParaRPr>
+          </a:p>
+          <a:p>
+            <a:pPr indent="-317500" lvl="0" marL="457200" rtl="0" algn="l">
+              <a:spcBef>
+                <a:spcPts val="0"/>
+              </a:spcBef>
+              <a:spcAft>
+                <a:spcPts val="0"/>
+              </a:spcAft>
+              <a:buClr>
+                <a:schemeClr val="dk2"/>
+              </a:buClr>
+              <a:buSzPts val="1400"/>
+              <a:buAutoNum type="arabicPeriod"/>
+            </a:pPr>
+            <a:r>
+              <a:rPr lang="en">
                 <a:solidFill>
                   <a:schemeClr val="dk2"/>
                 </a:solidFill>
               </a:rPr>
-              <a:t>x</a:t>
-            </a:r>
-            <a:endParaRPr sz="1800">
+              <a:t>For some reason, we want the intercept </a:t>
+            </a:r>
+            <a:r>
+              <a:rPr i="1" lang="en">
+                <a:solidFill>
+                  <a:schemeClr val="dk2"/>
+                </a:solidFill>
+              </a:rPr>
+              <a:t>b</a:t>
+            </a:r>
+            <a:r>
+              <a:rPr lang="en">
+                <a:solidFill>
+                  <a:schemeClr val="dk2"/>
+                </a:solidFill>
+              </a:rPr>
+              <a:t> to remain small. How would add this constraint to the regression problem? Solve for optimal values of a and b with this constraint</a:t>
+            </a:r>
+            <a:endParaRPr>
+              <a:solidFill>
+                <a:schemeClr val="dk2"/>
+              </a:solidFill>
+            </a:endParaRPr>
+          </a:p>
+          <a:p>
+            <a:pPr indent="0" lvl="0" marL="0" rtl="0" algn="l">
+              <a:spcBef>
+                <a:spcPts val="0"/>
+              </a:spcBef>
+              <a:spcAft>
+                <a:spcPts val="0"/>
+              </a:spcAft>
+              <a:buNone/>
+            </a:pPr>
+            <a:r>
+              <a:t/>
+            </a:r>
+            <a:endParaRPr sz="1500">
+              <a:solidFill>
+                <a:schemeClr val="dk2"/>
+              </a:solidFill>
+            </a:endParaRPr>
+          </a:p>
+          <a:p>
+            <a:pPr indent="0" lvl="0" marL="0" rtl="0" algn="l">
+              <a:spcBef>
+                <a:spcPts val="0"/>
+              </a:spcBef>
+              <a:spcAft>
+                <a:spcPts val="0"/>
+              </a:spcAft>
+              <a:buNone/>
+            </a:pPr>
+            <a:r>
+              <a:rPr lang="en" sz="1500">
+                <a:solidFill>
+                  <a:schemeClr val="dk2"/>
+                </a:solidFill>
+              </a:rPr>
+              <a:t>. </a:t>
+            </a:r>
+            <a:endParaRPr sz="1500">
               <a:solidFill>
                 <a:schemeClr val="dk2"/>
               </a:solidFill>
@@ -8833,325 +9326,9 @@
           </a:p>
         </p:txBody>
       </p:sp>
-      <p:cxnSp>
-        <p:nvCxnSpPr>
-          <p:cNvPr id="219" name="Google Shape;219;p29"/>
-          <p:cNvCxnSpPr>
-            <a:stCxn id="218" idx="3"/>
-            <a:endCxn id="217" idx="1"/>
-          </p:cNvCxnSpPr>
-          <p:nvPr/>
-        </p:nvCxnSpPr>
-        <p:spPr>
-          <a:xfrm>
-            <a:off x="2049400" y="1462400"/>
-            <a:ext cx="783300" cy="0"/>
-          </a:xfrm>
-          <a:prstGeom prst="straightConnector1">
-            <a:avLst/>
-          </a:prstGeom>
-          <a:noFill/>
-          <a:ln cap="flat" cmpd="sng" w="9525">
-            <a:solidFill>
-              <a:schemeClr val="dk2"/>
-            </a:solidFill>
-            <a:prstDash val="solid"/>
-            <a:round/>
-            <a:headEnd len="med" w="med" type="none"/>
-            <a:tailEnd len="med" w="med" type="triangle"/>
-          </a:ln>
-        </p:spPr>
-      </p:cxnSp>
-      <p:sp>
-        <p:nvSpPr>
-          <p:cNvPr id="220" name="Google Shape;220;p29"/>
-          <p:cNvSpPr txBox="1"/>
-          <p:nvPr/>
-        </p:nvSpPr>
-        <p:spPr>
-          <a:xfrm>
-            <a:off x="3058600" y="2207550"/>
-            <a:ext cx="323100" cy="461700"/>
-          </a:xfrm>
-          <a:prstGeom prst="rect">
-            <a:avLst/>
-          </a:prstGeom>
-          <a:noFill/>
-          <a:ln>
-            <a:noFill/>
-          </a:ln>
-        </p:spPr>
-        <p:txBody>
-          <a:bodyPr anchorCtr="0" anchor="t" bIns="91425" lIns="91425" spcFirstLastPara="1" rIns="91425" wrap="square" tIns="91425">
-            <a:spAutoFit/>
-          </a:bodyPr>
-          <a:lstStyle/>
-          <a:p>
-            <a:pPr indent="0" lvl="0" marL="0" rtl="0" algn="l">
-              <a:spcBef>
-                <a:spcPts val="0"/>
-              </a:spcBef>
-              <a:spcAft>
-                <a:spcPts val="0"/>
-              </a:spcAft>
-              <a:buNone/>
-            </a:pPr>
-            <a:r>
-              <a:rPr lang="en" sz="1800">
-                <a:solidFill>
-                  <a:schemeClr val="dk2"/>
-                </a:solidFill>
-              </a:rPr>
-              <a:t>b</a:t>
-            </a:r>
-            <a:endParaRPr sz="1800">
-              <a:solidFill>
-                <a:schemeClr val="dk2"/>
-              </a:solidFill>
-            </a:endParaRPr>
-          </a:p>
-        </p:txBody>
-      </p:sp>
-      <p:cxnSp>
-        <p:nvCxnSpPr>
-          <p:cNvPr id="221" name="Google Shape;221;p29"/>
-          <p:cNvCxnSpPr>
-            <a:stCxn id="220" idx="0"/>
-            <a:endCxn id="217" idx="2"/>
-          </p:cNvCxnSpPr>
-          <p:nvPr/>
-        </p:nvCxnSpPr>
-        <p:spPr>
-          <a:xfrm rot="10800000">
-            <a:off x="3220150" y="1849950"/>
-            <a:ext cx="0" cy="357600"/>
-          </a:xfrm>
-          <a:prstGeom prst="straightConnector1">
-            <a:avLst/>
-          </a:prstGeom>
-          <a:noFill/>
-          <a:ln cap="flat" cmpd="sng" w="9525">
-            <a:solidFill>
-              <a:schemeClr val="dk2"/>
-            </a:solidFill>
-            <a:prstDash val="solid"/>
-            <a:round/>
-            <a:headEnd len="med" w="med" type="none"/>
-            <a:tailEnd len="med" w="med" type="triangle"/>
-          </a:ln>
-        </p:spPr>
-      </p:cxnSp>
-      <p:cxnSp>
-        <p:nvCxnSpPr>
-          <p:cNvPr id="222" name="Google Shape;222;p29"/>
-          <p:cNvCxnSpPr>
-            <a:stCxn id="217" idx="3"/>
-          </p:cNvCxnSpPr>
-          <p:nvPr/>
-        </p:nvCxnSpPr>
-        <p:spPr>
-          <a:xfrm>
-            <a:off x="3607750" y="1462400"/>
-            <a:ext cx="468300" cy="0"/>
-          </a:xfrm>
-          <a:prstGeom prst="straightConnector1">
-            <a:avLst/>
-          </a:prstGeom>
-          <a:noFill/>
-          <a:ln cap="flat" cmpd="sng" w="9525">
-            <a:solidFill>
-              <a:schemeClr val="dk2"/>
-            </a:solidFill>
-            <a:prstDash val="solid"/>
-            <a:round/>
-            <a:headEnd len="med" w="med" type="none"/>
-            <a:tailEnd len="med" w="med" type="triangle"/>
-          </a:ln>
-        </p:spPr>
-      </p:cxnSp>
-      <p:sp>
-        <p:nvSpPr>
-          <p:cNvPr id="223" name="Google Shape;223;p29"/>
-          <p:cNvSpPr/>
-          <p:nvPr/>
-        </p:nvSpPr>
-        <p:spPr>
-          <a:xfrm>
-            <a:off x="4076050" y="1074800"/>
-            <a:ext cx="468300" cy="775200"/>
-          </a:xfrm>
-          <a:prstGeom prst="roundRect">
-            <a:avLst>
-              <a:gd fmla="val 16667" name="adj"/>
-            </a:avLst>
-          </a:prstGeom>
-          <a:solidFill>
-            <a:schemeClr val="lt2"/>
-          </a:solidFill>
-          <a:ln cap="flat" cmpd="sng" w="9525">
-            <a:solidFill>
-              <a:schemeClr val="dk2"/>
-            </a:solidFill>
-            <a:prstDash val="solid"/>
-            <a:round/>
-            <a:headEnd len="sm" w="sm" type="none"/>
-            <a:tailEnd len="sm" w="sm" type="none"/>
-          </a:ln>
-        </p:spPr>
-        <p:txBody>
-          <a:bodyPr anchorCtr="0" anchor="ctr" bIns="91425" lIns="91425" spcFirstLastPara="1" rIns="91425" wrap="square" tIns="91425">
-            <a:noAutofit/>
-          </a:bodyPr>
-          <a:lstStyle/>
-          <a:p>
-            <a:pPr indent="0" lvl="0" marL="0" rtl="0" algn="ctr">
-              <a:spcBef>
-                <a:spcPts val="0"/>
-              </a:spcBef>
-              <a:spcAft>
-                <a:spcPts val="0"/>
-              </a:spcAft>
-              <a:buNone/>
-            </a:pPr>
-            <a:r>
-              <a:rPr lang="en"/>
-              <a:t>f</a:t>
-            </a:r>
-            <a:endParaRPr/>
-          </a:p>
-        </p:txBody>
-      </p:sp>
-      <p:cxnSp>
-        <p:nvCxnSpPr>
-          <p:cNvPr id="224" name="Google Shape;224;p29"/>
-          <p:cNvCxnSpPr>
-            <a:stCxn id="223" idx="3"/>
-          </p:cNvCxnSpPr>
-          <p:nvPr/>
-        </p:nvCxnSpPr>
-        <p:spPr>
-          <a:xfrm>
-            <a:off x="4544350" y="1462400"/>
-            <a:ext cx="387600" cy="0"/>
-          </a:xfrm>
-          <a:prstGeom prst="straightConnector1">
-            <a:avLst/>
-          </a:prstGeom>
-          <a:noFill/>
-          <a:ln cap="flat" cmpd="sng" w="9525">
-            <a:solidFill>
-              <a:schemeClr val="dk2"/>
-            </a:solidFill>
-            <a:prstDash val="solid"/>
-            <a:round/>
-            <a:headEnd len="med" w="med" type="none"/>
-            <a:tailEnd len="med" w="med" type="triangle"/>
-          </a:ln>
-        </p:spPr>
-      </p:cxnSp>
-      <p:sp>
-        <p:nvSpPr>
-          <p:cNvPr id="225" name="Google Shape;225;p29"/>
-          <p:cNvSpPr txBox="1"/>
-          <p:nvPr/>
-        </p:nvSpPr>
-        <p:spPr>
-          <a:xfrm>
-            <a:off x="4998250" y="1231550"/>
-            <a:ext cx="387600" cy="461700"/>
-          </a:xfrm>
-          <a:prstGeom prst="rect">
-            <a:avLst/>
-          </a:prstGeom>
-          <a:noFill/>
-          <a:ln>
-            <a:noFill/>
-          </a:ln>
-        </p:spPr>
-        <p:txBody>
-          <a:bodyPr anchorCtr="0" anchor="t" bIns="91425" lIns="91425" spcFirstLastPara="1" rIns="91425" wrap="square" tIns="91425">
-            <a:spAutoFit/>
-          </a:bodyPr>
-          <a:lstStyle/>
-          <a:p>
-            <a:pPr indent="0" lvl="0" marL="0" rtl="0" algn="l">
-              <a:spcBef>
-                <a:spcPts val="0"/>
-              </a:spcBef>
-              <a:spcAft>
-                <a:spcPts val="0"/>
-              </a:spcAft>
-              <a:buNone/>
-            </a:pPr>
-            <a:r>
-              <a:rPr lang="en" sz="1800">
-                <a:solidFill>
-                  <a:schemeClr val="dk2"/>
-                </a:solidFill>
-              </a:rPr>
-              <a:t>L</a:t>
-            </a:r>
-            <a:endParaRPr sz="1800">
-              <a:solidFill>
-                <a:schemeClr val="dk2"/>
-              </a:solidFill>
-            </a:endParaRPr>
-          </a:p>
-        </p:txBody>
-      </p:sp>
-      <p:sp>
-        <p:nvSpPr>
-          <p:cNvPr id="226" name="Google Shape;226;p29"/>
-          <p:cNvSpPr txBox="1"/>
-          <p:nvPr/>
-        </p:nvSpPr>
-        <p:spPr>
-          <a:xfrm>
-            <a:off x="3680350" y="1000700"/>
-            <a:ext cx="323100" cy="461700"/>
-          </a:xfrm>
-          <a:prstGeom prst="rect">
-            <a:avLst/>
-          </a:prstGeom>
-          <a:noFill/>
-          <a:ln>
-            <a:noFill/>
-          </a:ln>
-        </p:spPr>
-        <p:txBody>
-          <a:bodyPr anchorCtr="0" anchor="t" bIns="91425" lIns="91425" spcFirstLastPara="1" rIns="91425" wrap="square" tIns="91425">
-            <a:spAutoFit/>
-          </a:bodyPr>
-          <a:lstStyle/>
-          <a:p>
-            <a:pPr indent="0" lvl="0" marL="0" rtl="0" algn="l">
-              <a:spcBef>
-                <a:spcPts val="0"/>
-              </a:spcBef>
-              <a:spcAft>
-                <a:spcPts val="0"/>
-              </a:spcAft>
-              <a:buNone/>
-            </a:pPr>
-            <a:r>
-              <a:rPr lang="en" sz="1800">
-                <a:solidFill>
-                  <a:schemeClr val="dk2"/>
-                </a:solidFill>
-              </a:rPr>
-              <a:t>y</a:t>
-            </a:r>
-            <a:endParaRPr sz="1800">
-              <a:solidFill>
-                <a:schemeClr val="dk2"/>
-              </a:solidFill>
-            </a:endParaRPr>
-          </a:p>
-        </p:txBody>
-      </p:sp>
       <p:pic>
         <p:nvPicPr>
-          <p:cNvPr descr="{&quot;code&quot;:&quot;\\begin{gather*}\n{\\text{Now}\\;\\text{lets}\\;\\text{add}\\;\\text{a}\\;\\text{bias}\\;\\text{term}}\\\\\n{\\text{So,}\\;y=Ax+b;\\,x:m\\times1,\\,A:\\,n\\times m,\\,b:\\,n\\times1}\\\\\n{L=f\\left(y\\right)\\,}\\\\\n{\\text{We}\\;\\text{want}\\;\\diff{L}{b}}\\\\\n{\\text{Let's}\\;\\text{consider}\\;i^{th\\,}\\text{element}\\;\\text{of}\\,\\diff{L}{b}}\\\\\n{\\text{It}\\;\\text{is}\\;\\text{easy}\\;\\text{to}\\;\\text{see}\\;\\text{that}\\;b_{i}\\,\\text{only}\\;\\text{affects}\\;y_{i},\\,\\text{so}\\;\\text{we}\\;\\text{get}\\;\\text{a}\\;\\text{scalar}\\;\\text{chain}\\;\\text{rule}}\\\\\n{b_{i}\\to y_{i}\\to L}\\\\\n{\\diff{L}{b_{i}}=\\diff{L}{y_{i}}\\diff{y_{i}}{b_{i}}=\\diff{L}{y_{i}}}\t\n\\end{gather*}&quot;,&quot;type&quot;:&quot;gather*&quot;,&quot;backgroundColorModified&quot;:false,&quot;backgroundColor&quot;:&quot;#FFFFFF&quot;,&quot;aid&quot;:null,&quot;font&quot;:{&quot;size&quot;:12,&quot;color&quot;:&quot;#000000&quot;,&quot;family&quot;:&quot;Arial&quot;},&quot;id&quot;:&quot;11&quot;,&quot;ts&quot;:1760307980441,&quot;cs&quot;:&quot;+MCI3wTTaXcxbjPD5qWmgQ==&quot;,&quot;size&quot;:{&quot;width&quot;:536,&quot;height&quot;:252.5}}" id="227" name="Google Shape;227;p29"/>
+          <p:cNvPr descr="{&quot;font&quot;:{&quot;color&quot;:&quot;#595959&quot;,&quot;family&quot;:&quot;Arial&quot;,&quot;size&quot;:15},&quot;backgroundColor&quot;:&quot;#FFFFFF&quot;,&quot;code&quot;:&quot;\\begin{gather*}\n{x=\\begin{pmatrix}\n{x_{1}}\\\\\n{x_{2}}\\\\\n{x_{3}}\\\\\n\\end{pmatrix}y=\\begin{pmatrix}\n{y_{1}}\\\\\n{y_{2}}\\\\\n{y_{3}}\\\\\n\\end{pmatrix}}\\\\\n{\\text{Then,}\\;\\text{z=hadamard(x,y)=}x\\odot y=\\begin{pmatrix}\n{x_{1}y_{1}}\\\\\n{x_{2}y_{2}}\\\\\n{x_{3}y_{3}}\\\\\n\\end{pmatrix}}\\\\\n{\\text{Calculate}\\;\\pdf{z}{x}\\,\\text{and}\\;\\pdf{z}{y}}\t\n\\end{gather*}&quot;,&quot;aid&quot;:null,&quot;type&quot;:&quot;gather*&quot;,&quot;backgroundColorModified&quot;:false,&quot;id&quot;:&quot;12&quot;,&quot;ts&quot;:1760308325873,&quot;cs&quot;:&quot;kPehWn9jOle3+jYsWB+A0g==&quot;,&quot;size&quot;:{&quot;width&quot;:430,&quot;height&quot;:246}}" id="230" name="Google Shape;230;p29"/>
           <p:cNvPicPr preferRelativeResize="0"/>
           <p:nvPr/>
         </p:nvPicPr>
@@ -9165,8 +9342,8 @@
         </p:blipFill>
         <p:spPr>
           <a:xfrm>
-            <a:off x="936325" y="2669250"/>
-            <a:ext cx="5105400" cy="2405063"/>
+            <a:off x="1621101" y="1097600"/>
+            <a:ext cx="3643576" cy="2084450"/>
           </a:xfrm>
           <a:prstGeom prst="rect">
             <a:avLst/>
@@ -9190,7 +9367,7 @@
   <p:cSld>
     <p:spTree>
       <p:nvGrpSpPr>
-        <p:cNvPr id="231" name="Shape 231"/>
+        <p:cNvPr id="234" name="Shape 234"/>
         <p:cNvGrpSpPr/>
         <p:nvPr/>
       </p:nvGrpSpPr>
@@ -9204,15 +9381,15 @@
       </p:grpSpPr>
       <p:sp>
         <p:nvSpPr>
-          <p:cNvPr id="232" name="Google Shape;232;p30"/>
+          <p:cNvPr id="235" name="Google Shape;235;p30"/>
           <p:cNvSpPr txBox="1"/>
           <p:nvPr>
-            <p:ph type="ctrTitle"/>
+            <p:ph idx="4294967295" type="title"/>
           </p:nvPr>
         </p:nvSpPr>
         <p:spPr>
           <a:xfrm>
-            <a:off x="311700" y="244849"/>
+            <a:off x="259350" y="157250"/>
             <a:ext cx="8520600" cy="572700"/>
           </a:xfrm>
           <a:prstGeom prst="rect">
@@ -9220,12 +9397,12 @@
           </a:prstGeom>
         </p:spPr>
         <p:txBody>
-          <a:bodyPr anchorCtr="0" anchor="b" bIns="91425" lIns="91425" spcFirstLastPara="1" rIns="91425" wrap="square" tIns="91425">
+          <a:bodyPr anchorCtr="0" anchor="t" bIns="91425" lIns="91425" spcFirstLastPara="1" rIns="91425" wrap="square" tIns="91425">
             <a:normAutofit fontScale="90000"/>
           </a:bodyPr>
           <a:lstStyle/>
           <a:p>
-            <a:pPr indent="0" lvl="0" marL="0" rtl="0" algn="ctr">
+            <a:pPr indent="0" lvl="0" marL="0" rtl="0" algn="l">
               <a:spcBef>
                 <a:spcPts val="0"/>
               </a:spcBef>
@@ -9236,7 +9413,7 @@
             </a:pPr>
             <a:r>
               <a:rPr lang="en"/>
-              <a:t>Homework problems</a:t>
+              <a:t>Recall: Structure of a Network</a:t>
             </a:r>
             <a:endParaRPr/>
           </a:p>
@@ -9244,13 +9421,13 @@
       </p:sp>
       <p:sp>
         <p:nvSpPr>
-          <p:cNvPr id="233" name="Google Shape;233;p30"/>
+          <p:cNvPr id="236" name="Google Shape;236;p30"/>
           <p:cNvSpPr txBox="1"/>
           <p:nvPr/>
         </p:nvSpPr>
         <p:spPr>
           <a:xfrm>
-            <a:off x="381450" y="587161"/>
+            <a:off x="464725" y="1242363"/>
             <a:ext cx="3013800" cy="461700"/>
           </a:xfrm>
           <a:prstGeom prst="rect">
@@ -9289,14 +9466,88 @@
       </p:sp>
       <p:sp>
         <p:nvSpPr>
-          <p:cNvPr id="234" name="Google Shape;234;p30"/>
-          <p:cNvSpPr txBox="1"/>
+          <p:cNvPr id="237" name="Google Shape;237;p30"/>
+          <p:cNvSpPr/>
           <p:nvPr/>
         </p:nvSpPr>
         <p:spPr>
           <a:xfrm>
-            <a:off x="367400" y="682100"/>
-            <a:ext cx="7553700" cy="415500"/>
+            <a:off x="1555994" y="1489800"/>
+            <a:ext cx="928200" cy="1100100"/>
+          </a:xfrm>
+          <a:prstGeom prst="roundRect">
+            <a:avLst>
+              <a:gd fmla="val 9734" name="adj"/>
+            </a:avLst>
+          </a:prstGeom>
+          <a:solidFill>
+            <a:srgbClr val="EEEEEE"/>
+          </a:solidFill>
+          <a:ln cap="flat" cmpd="sng" w="9525">
+            <a:solidFill>
+              <a:srgbClr val="595959"/>
+            </a:solidFill>
+            <a:prstDash val="solid"/>
+            <a:round/>
+            <a:headEnd len="sm" w="sm" type="none"/>
+            <a:tailEnd len="sm" w="sm" type="none"/>
+          </a:ln>
+        </p:spPr>
+        <p:txBody>
+          <a:bodyPr anchorCtr="0" anchor="ctr" bIns="68575" lIns="68575" spcFirstLastPara="1" rIns="68575" wrap="square" tIns="68575">
+            <a:noAutofit/>
+          </a:bodyPr>
+          <a:lstStyle/>
+          <a:p>
+            <a:pPr indent="0" lvl="0" marL="0" marR="0" rtl="0" algn="l">
+              <a:lnSpc>
+                <a:spcPct val="100000"/>
+              </a:lnSpc>
+              <a:spcBef>
+                <a:spcPts val="0"/>
+              </a:spcBef>
+              <a:spcAft>
+                <a:spcPts val="0"/>
+              </a:spcAft>
+              <a:buClr>
+                <a:srgbClr val="000000"/>
+              </a:buClr>
+              <a:buSzPts val="1100"/>
+              <a:buFont typeface="Arial"/>
+              <a:buNone/>
+            </a:pPr>
+            <a:r>
+              <a:t/>
+            </a:r>
+            <a:endParaRPr b="0" i="0" sz="1100" u="none" cap="none" strike="noStrike">
+              <a:solidFill>
+                <a:srgbClr val="000000"/>
+              </a:solidFill>
+              <a:latin typeface="Arial"/>
+              <a:ea typeface="Arial"/>
+              <a:cs typeface="Arial"/>
+              <a:sym typeface="Arial"/>
+            </a:endParaRPr>
+          </a:p>
+        </p:txBody>
+      </p:sp>
+      <p:pic>
+        <p:nvPicPr>
+          <p:cNvPr id="238" name="Google Shape;238;p30"/>
+          <p:cNvPicPr preferRelativeResize="0"/>
+          <p:nvPr/>
+        </p:nvPicPr>
+        <p:blipFill rotWithShape="1">
+          <a:blip r:embed="rId3">
+            <a:alphaModFix/>
+          </a:blip>
+          <a:srcRect b="0" l="0" r="0" t="0"/>
+          <a:stretch/>
+        </p:blipFill>
+        <p:spPr>
+          <a:xfrm>
+            <a:off x="1855750" y="1921931"/>
+            <a:ext cx="328613" cy="235744"/>
           </a:xfrm>
           <a:prstGeom prst="rect">
             <a:avLst/>
@@ -9306,13 +9557,129 @@
             <a:noFill/>
           </a:ln>
         </p:spPr>
+      </p:pic>
+      <p:sp>
+        <p:nvSpPr>
+          <p:cNvPr id="239" name="Google Shape;239;p30"/>
+          <p:cNvSpPr/>
+          <p:nvPr/>
+        </p:nvSpPr>
+        <p:spPr>
+          <a:xfrm>
+            <a:off x="3133731" y="1489791"/>
+            <a:ext cx="928200" cy="1100100"/>
+          </a:xfrm>
+          <a:prstGeom prst="roundRect">
+            <a:avLst>
+              <a:gd fmla="val 9734" name="adj"/>
+            </a:avLst>
+          </a:prstGeom>
+          <a:solidFill>
+            <a:srgbClr val="EEEEEE"/>
+          </a:solidFill>
+          <a:ln cap="flat" cmpd="sng" w="9525">
+            <a:solidFill>
+              <a:srgbClr val="595959"/>
+            </a:solidFill>
+            <a:prstDash val="solid"/>
+            <a:round/>
+            <a:headEnd len="sm" w="sm" type="none"/>
+            <a:tailEnd len="sm" w="sm" type="none"/>
+          </a:ln>
+        </p:spPr>
         <p:txBody>
-          <a:bodyPr anchorCtr="0" anchor="t" bIns="91425" lIns="91425" spcFirstLastPara="1" rIns="91425" wrap="square" tIns="91425">
+          <a:bodyPr anchorCtr="0" anchor="ctr" bIns="68575" lIns="68575" spcFirstLastPara="1" rIns="68575" wrap="square" tIns="68575">
+            <a:noAutofit/>
+          </a:bodyPr>
+          <a:lstStyle/>
+          <a:p>
+            <a:pPr indent="0" lvl="0" marL="0" marR="0" rtl="0" algn="ctr">
+              <a:lnSpc>
+                <a:spcPct val="100000"/>
+              </a:lnSpc>
+              <a:spcBef>
+                <a:spcPts val="0"/>
+              </a:spcBef>
+              <a:spcAft>
+                <a:spcPts val="0"/>
+              </a:spcAft>
+              <a:buClr>
+                <a:srgbClr val="000000"/>
+              </a:buClr>
+              <a:buSzPts val="1100"/>
+              <a:buFont typeface="Arial"/>
+              <a:buNone/>
+            </a:pPr>
+            <a:r>
+              <a:rPr b="1" lang="en" sz="1300"/>
+              <a:t>ReLU</a:t>
+            </a:r>
+            <a:endParaRPr b="1" i="0" sz="1300" u="none" cap="none" strike="noStrike">
+              <a:solidFill>
+                <a:srgbClr val="000000"/>
+              </a:solidFill>
+            </a:endParaRPr>
+          </a:p>
+        </p:txBody>
+      </p:sp>
+      <p:cxnSp>
+        <p:nvCxnSpPr>
+          <p:cNvPr id="240" name="Google Shape;240;p30"/>
+          <p:cNvCxnSpPr>
+            <a:stCxn id="237" idx="3"/>
+            <a:endCxn id="239" idx="1"/>
+          </p:cNvCxnSpPr>
+          <p:nvPr/>
+        </p:nvCxnSpPr>
+        <p:spPr>
+          <a:xfrm>
+            <a:off x="2484194" y="2039850"/>
+            <a:ext cx="649500" cy="0"/>
+          </a:xfrm>
+          <a:prstGeom prst="straightConnector1">
+            <a:avLst/>
+          </a:prstGeom>
+          <a:noFill/>
+          <a:ln cap="flat" cmpd="sng" w="9525">
+            <a:solidFill>
+              <a:srgbClr val="595959"/>
+            </a:solidFill>
+            <a:prstDash val="solid"/>
+            <a:round/>
+            <a:headEnd len="sm" w="sm" type="none"/>
+            <a:tailEnd len="med" w="med" type="triangle"/>
+          </a:ln>
+        </p:spPr>
+      </p:cxnSp>
+      <p:sp>
+        <p:nvSpPr>
+          <p:cNvPr id="241" name="Google Shape;241;p30"/>
+          <p:cNvSpPr txBox="1"/>
+          <p:nvPr/>
+        </p:nvSpPr>
+        <p:spPr>
+          <a:xfrm>
+            <a:off x="711344" y="1818825"/>
+            <a:ext cx="412500" cy="307800"/>
+          </a:xfrm>
+          <a:prstGeom prst="rect">
+            <a:avLst/>
+          </a:prstGeom>
+          <a:noFill/>
+          <a:ln>
+            <a:noFill/>
+          </a:ln>
+        </p:spPr>
+        <p:txBody>
+          <a:bodyPr anchorCtr="0" anchor="t" bIns="68575" lIns="68575" spcFirstLastPara="1" rIns="68575" wrap="square" tIns="68575">
             <a:spAutoFit/>
           </a:bodyPr>
           <a:lstStyle/>
           <a:p>
-            <a:pPr indent="-323850" lvl="0" marL="457200" rtl="0" algn="l">
+            <a:pPr indent="0" lvl="0" marL="0" marR="0" rtl="0" algn="l">
+              <a:lnSpc>
+                <a:spcPct val="100000"/>
+              </a:lnSpc>
               <a:spcBef>
                 <a:spcPts val="0"/>
               </a:spcBef>
@@ -9320,37 +9687,457 @@
                 <a:spcPts val="0"/>
               </a:spcAft>
               <a:buClr>
-                <a:schemeClr val="dk2"/>
+                <a:srgbClr val="000000"/>
               </a:buClr>
-              <a:buSzPts val="1500"/>
-              <a:buAutoNum type="arabicPeriod"/>
+              <a:buSzPts val="1100"/>
+              <a:buFont typeface="Arial"/>
+              <a:buNone/>
             </a:pPr>
             <a:r>
-              <a:rPr lang="en" sz="1500">
-                <a:solidFill>
-                  <a:schemeClr val="dk2"/>
-                </a:solidFill>
-              </a:rPr>
-              <a:t>Hadamard product of two vectors is defined as the element-wise product. Eg., </a:t>
-            </a:r>
-            <a:endParaRPr sz="1500">
+              <a:t/>
+            </a:r>
+            <a:endParaRPr b="0" i="0" sz="1100" u="none" cap="none" strike="noStrike">
               <a:solidFill>
-                <a:schemeClr val="dk2"/>
+                <a:srgbClr val="000000"/>
               </a:solidFill>
+              <a:latin typeface="Arial"/>
+              <a:ea typeface="Arial"/>
+              <a:cs typeface="Arial"/>
+              <a:sym typeface="Arial"/>
             </a:endParaRPr>
           </a:p>
         </p:txBody>
       </p:sp>
-      <p:sp>
-        <p:nvSpPr>
-          <p:cNvPr id="235" name="Google Shape;235;p30"/>
+      <p:pic>
+        <p:nvPicPr>
+          <p:cNvPr id="242" name="Google Shape;242;p30"/>
+          <p:cNvPicPr preferRelativeResize="0"/>
+          <p:nvPr/>
+        </p:nvPicPr>
+        <p:blipFill rotWithShape="1">
+          <a:blip r:embed="rId4">
+            <a:alphaModFix/>
+          </a:blip>
+          <a:srcRect b="0" l="0" r="0" t="0"/>
+          <a:stretch/>
+        </p:blipFill>
+        <p:spPr>
+          <a:xfrm>
+            <a:off x="639625" y="1952292"/>
+            <a:ext cx="207827" cy="175013"/>
+          </a:xfrm>
+          <a:prstGeom prst="rect">
+            <a:avLst/>
+          </a:prstGeom>
+          <a:noFill/>
+          <a:ln>
+            <a:noFill/>
+          </a:ln>
+        </p:spPr>
+      </p:pic>
+      <p:cxnSp>
+        <p:nvCxnSpPr>
+          <p:cNvPr id="243" name="Google Shape;243;p30"/>
+          <p:cNvCxnSpPr/>
+          <p:nvPr/>
+        </p:nvCxnSpPr>
+        <p:spPr>
+          <a:xfrm>
+            <a:off x="906381" y="2039813"/>
+            <a:ext cx="649500" cy="0"/>
+          </a:xfrm>
+          <a:prstGeom prst="straightConnector1">
+            <a:avLst/>
+          </a:prstGeom>
+          <a:noFill/>
+          <a:ln cap="flat" cmpd="sng" w="9525">
+            <a:solidFill>
+              <a:srgbClr val="595959"/>
+            </a:solidFill>
+            <a:prstDash val="solid"/>
+            <a:round/>
+            <a:headEnd len="sm" w="sm" type="none"/>
+            <a:tailEnd len="med" w="med" type="triangle"/>
+          </a:ln>
+        </p:spPr>
+      </p:cxnSp>
+      <p:cxnSp>
+        <p:nvCxnSpPr>
+          <p:cNvPr id="244" name="Google Shape;244;p30"/>
+          <p:cNvCxnSpPr/>
+          <p:nvPr/>
+        </p:nvCxnSpPr>
+        <p:spPr>
+          <a:xfrm>
+            <a:off x="4061856" y="2039813"/>
+            <a:ext cx="649500" cy="0"/>
+          </a:xfrm>
+          <a:prstGeom prst="straightConnector1">
+            <a:avLst/>
+          </a:prstGeom>
+          <a:noFill/>
+          <a:ln cap="flat" cmpd="sng" w="9525">
+            <a:solidFill>
+              <a:srgbClr val="595959"/>
+            </a:solidFill>
+            <a:prstDash val="solid"/>
+            <a:round/>
+            <a:headEnd len="sm" w="sm" type="none"/>
+            <a:tailEnd len="med" w="med" type="triangle"/>
+          </a:ln>
+        </p:spPr>
+      </p:cxnSp>
+      <p:pic>
+        <p:nvPicPr>
+          <p:cNvPr id="245" name="Google Shape;245;p30"/>
+          <p:cNvPicPr preferRelativeResize="0"/>
+          <p:nvPr/>
+        </p:nvPicPr>
+        <p:blipFill rotWithShape="1">
+          <a:blip r:embed="rId5">
+            <a:alphaModFix/>
+          </a:blip>
+          <a:srcRect b="0" l="0" r="0" t="0"/>
+          <a:stretch/>
+        </p:blipFill>
+        <p:spPr>
+          <a:xfrm>
+            <a:off x="2715719" y="1818825"/>
+            <a:ext cx="214313" cy="171450"/>
+          </a:xfrm>
+          <a:prstGeom prst="rect">
+            <a:avLst/>
+          </a:prstGeom>
+          <a:noFill/>
+          <a:ln>
+            <a:noFill/>
+          </a:ln>
+        </p:spPr>
+      </p:pic>
+      <p:pic>
+        <p:nvPicPr>
+          <p:cNvPr id="246" name="Google Shape;246;p30"/>
+          <p:cNvPicPr preferRelativeResize="0"/>
+          <p:nvPr/>
+        </p:nvPicPr>
+        <p:blipFill rotWithShape="1">
+          <a:blip r:embed="rId6">
+            <a:alphaModFix/>
+          </a:blip>
+          <a:srcRect b="0" l="0" r="0" t="0"/>
+          <a:stretch/>
+        </p:blipFill>
+        <p:spPr>
+          <a:xfrm>
+            <a:off x="4265625" y="1807838"/>
+            <a:ext cx="221456" cy="171450"/>
+          </a:xfrm>
+          <a:prstGeom prst="rect">
+            <a:avLst/>
+          </a:prstGeom>
+          <a:noFill/>
+          <a:ln>
+            <a:noFill/>
+          </a:ln>
+        </p:spPr>
+      </p:pic>
+      <p:sp>
+        <p:nvSpPr>
+          <p:cNvPr id="247" name="Google Shape;247;p30"/>
+          <p:cNvSpPr/>
+          <p:nvPr/>
+        </p:nvSpPr>
+        <p:spPr>
+          <a:xfrm>
+            <a:off x="4740919" y="1489741"/>
+            <a:ext cx="928200" cy="1100100"/>
+          </a:xfrm>
+          <a:prstGeom prst="roundRect">
+            <a:avLst>
+              <a:gd fmla="val 9734" name="adj"/>
+            </a:avLst>
+          </a:prstGeom>
+          <a:solidFill>
+            <a:srgbClr val="EEEEEE"/>
+          </a:solidFill>
+          <a:ln cap="flat" cmpd="sng" w="9525">
+            <a:solidFill>
+              <a:srgbClr val="595959"/>
+            </a:solidFill>
+            <a:prstDash val="solid"/>
+            <a:round/>
+            <a:headEnd len="sm" w="sm" type="none"/>
+            <a:tailEnd len="sm" w="sm" type="none"/>
+          </a:ln>
+        </p:spPr>
+        <p:txBody>
+          <a:bodyPr anchorCtr="0" anchor="ctr" bIns="68575" lIns="68575" spcFirstLastPara="1" rIns="68575" wrap="square" tIns="68575">
+            <a:noAutofit/>
+          </a:bodyPr>
+          <a:lstStyle/>
+          <a:p>
+            <a:pPr indent="0" lvl="0" marL="0" marR="0" rtl="0" algn="l">
+              <a:lnSpc>
+                <a:spcPct val="100000"/>
+              </a:lnSpc>
+              <a:spcBef>
+                <a:spcPts val="0"/>
+              </a:spcBef>
+              <a:spcAft>
+                <a:spcPts val="0"/>
+              </a:spcAft>
+              <a:buClr>
+                <a:srgbClr val="000000"/>
+              </a:buClr>
+              <a:buSzPts val="1100"/>
+              <a:buFont typeface="Arial"/>
+              <a:buNone/>
+            </a:pPr>
+            <a:r>
+              <a:t/>
+            </a:r>
+            <a:endParaRPr sz="1100"/>
+          </a:p>
+        </p:txBody>
+      </p:sp>
+      <p:pic>
+        <p:nvPicPr>
+          <p:cNvPr id="248" name="Google Shape;248;p30" title="[0,0,0,&quot;https://www.codecogs.com/eqnedit.php?latex=W_n#0&quot;]"/>
+          <p:cNvPicPr preferRelativeResize="0"/>
+          <p:nvPr/>
+        </p:nvPicPr>
+        <p:blipFill>
+          <a:blip r:embed="rId7">
+            <a:alphaModFix/>
+          </a:blip>
+          <a:stretch>
+            <a:fillRect/>
+          </a:stretch>
+        </p:blipFill>
+        <p:spPr>
+          <a:xfrm>
+            <a:off x="4998751" y="1905551"/>
+            <a:ext cx="328625" cy="213905"/>
+          </a:xfrm>
+          <a:prstGeom prst="rect">
+            <a:avLst/>
+          </a:prstGeom>
+          <a:noFill/>
+          <a:ln>
+            <a:noFill/>
+          </a:ln>
+        </p:spPr>
+      </p:pic>
+      <p:cxnSp>
+        <p:nvCxnSpPr>
+          <p:cNvPr id="249" name="Google Shape;249;p30"/>
+          <p:cNvCxnSpPr/>
+          <p:nvPr/>
+        </p:nvCxnSpPr>
+        <p:spPr>
+          <a:xfrm>
+            <a:off x="5669131" y="2012488"/>
+            <a:ext cx="649500" cy="0"/>
+          </a:xfrm>
+          <a:prstGeom prst="straightConnector1">
+            <a:avLst/>
+          </a:prstGeom>
+          <a:noFill/>
+          <a:ln cap="flat" cmpd="sng" w="9525">
+            <a:solidFill>
+              <a:srgbClr val="595959"/>
+            </a:solidFill>
+            <a:prstDash val="solid"/>
+            <a:round/>
+            <a:headEnd len="sm" w="sm" type="none"/>
+            <a:tailEnd len="med" w="med" type="triangle"/>
+          </a:ln>
+        </p:spPr>
+      </p:cxnSp>
+      <p:pic>
+        <p:nvPicPr>
+          <p:cNvPr id="250" name="Google Shape;250;p30" title="[0,0,0,&quot;https://www.codecogs.com/eqnedit.php?latex=y_n#0&quot;]"/>
+          <p:cNvPicPr preferRelativeResize="0"/>
+          <p:nvPr/>
+        </p:nvPicPr>
+        <p:blipFill>
+          <a:blip r:embed="rId8">
+            <a:alphaModFix/>
+          </a:blip>
+          <a:stretch>
+            <a:fillRect/>
+          </a:stretch>
+        </p:blipFill>
+        <p:spPr>
+          <a:xfrm>
+            <a:off x="5822684" y="1708025"/>
+            <a:ext cx="285139" cy="213900"/>
+          </a:xfrm>
+          <a:prstGeom prst="rect">
+            <a:avLst/>
+          </a:prstGeom>
+          <a:noFill/>
+          <a:ln>
+            <a:noFill/>
+          </a:ln>
+        </p:spPr>
+      </p:pic>
+      <p:sp>
+        <p:nvSpPr>
+          <p:cNvPr id="251" name="Google Shape;251;p30"/>
+          <p:cNvSpPr/>
+          <p:nvPr/>
+        </p:nvSpPr>
+        <p:spPr>
+          <a:xfrm>
+            <a:off x="6348124" y="1489800"/>
+            <a:ext cx="717300" cy="1100100"/>
+          </a:xfrm>
+          <a:prstGeom prst="roundRect">
+            <a:avLst>
+              <a:gd fmla="val 9734" name="adj"/>
+            </a:avLst>
+          </a:prstGeom>
+          <a:solidFill>
+            <a:srgbClr val="EEEEEE"/>
+          </a:solidFill>
+          <a:ln cap="flat" cmpd="sng" w="9525">
+            <a:solidFill>
+              <a:srgbClr val="595959"/>
+            </a:solidFill>
+            <a:prstDash val="solid"/>
+            <a:round/>
+            <a:headEnd len="sm" w="sm" type="none"/>
+            <a:tailEnd len="sm" w="sm" type="none"/>
+          </a:ln>
+        </p:spPr>
+        <p:txBody>
+          <a:bodyPr anchorCtr="0" anchor="ctr" bIns="68575" lIns="68575" spcFirstLastPara="1" rIns="68575" wrap="square" tIns="68575">
+            <a:noAutofit/>
+          </a:bodyPr>
+          <a:lstStyle/>
+          <a:p>
+            <a:pPr indent="0" lvl="0" marL="0" marR="0" rtl="0" algn="ctr">
+              <a:lnSpc>
+                <a:spcPct val="100000"/>
+              </a:lnSpc>
+              <a:spcBef>
+                <a:spcPts val="0"/>
+              </a:spcBef>
+              <a:spcAft>
+                <a:spcPts val="0"/>
+              </a:spcAft>
+              <a:buClr>
+                <a:srgbClr val="000000"/>
+              </a:buClr>
+              <a:buSzPts val="1100"/>
+              <a:buFont typeface="Arial"/>
+              <a:buNone/>
+            </a:pPr>
+            <a:r>
+              <a:rPr lang="en" sz="1100"/>
+              <a:t>Loss function</a:t>
+            </a:r>
+            <a:endParaRPr sz="1100"/>
+          </a:p>
+        </p:txBody>
+      </p:sp>
+      <p:cxnSp>
+        <p:nvCxnSpPr>
+          <p:cNvPr id="252" name="Google Shape;252;p30"/>
+          <p:cNvCxnSpPr>
+            <a:endCxn id="251" idx="0"/>
+          </p:cNvCxnSpPr>
+          <p:nvPr/>
+        </p:nvCxnSpPr>
+        <p:spPr>
+          <a:xfrm>
+            <a:off x="6706774" y="1174800"/>
+            <a:ext cx="0" cy="315000"/>
+          </a:xfrm>
+          <a:prstGeom prst="straightConnector1">
+            <a:avLst/>
+          </a:prstGeom>
+          <a:noFill/>
+          <a:ln cap="flat" cmpd="sng" w="9525">
+            <a:solidFill>
+              <a:srgbClr val="595959"/>
+            </a:solidFill>
+            <a:prstDash val="solid"/>
+            <a:round/>
+            <a:headEnd len="sm" w="sm" type="none"/>
+            <a:tailEnd len="med" w="med" type="triangle"/>
+          </a:ln>
+        </p:spPr>
+      </p:cxnSp>
+      <p:sp>
+        <p:nvSpPr>
+          <p:cNvPr id="253" name="Google Shape;253;p30"/>
           <p:cNvSpPr txBox="1"/>
           <p:nvPr/>
         </p:nvSpPr>
         <p:spPr>
           <a:xfrm>
-            <a:off x="421825" y="3145050"/>
-            <a:ext cx="7276200" cy="1739400"/>
+            <a:off x="6410225" y="866975"/>
+            <a:ext cx="593100" cy="307800"/>
+          </a:xfrm>
+          <a:prstGeom prst="rect">
+            <a:avLst/>
+          </a:prstGeom>
+          <a:noFill/>
+          <a:ln>
+            <a:noFill/>
+          </a:ln>
+        </p:spPr>
+        <p:txBody>
+          <a:bodyPr anchorCtr="0" anchor="t" bIns="68575" lIns="68575" spcFirstLastPara="1" rIns="68575" wrap="square" tIns="68575">
+            <a:spAutoFit/>
+          </a:bodyPr>
+          <a:lstStyle/>
+          <a:p>
+            <a:pPr indent="0" lvl="0" marL="0" marR="0" rtl="0" algn="l">
+              <a:lnSpc>
+                <a:spcPct val="100000"/>
+              </a:lnSpc>
+              <a:spcBef>
+                <a:spcPts val="0"/>
+              </a:spcBef>
+              <a:spcAft>
+                <a:spcPts val="0"/>
+              </a:spcAft>
+              <a:buClr>
+                <a:srgbClr val="000000"/>
+              </a:buClr>
+              <a:buSzPts val="1100"/>
+              <a:buFont typeface="Arial"/>
+              <a:buNone/>
+            </a:pPr>
+            <a:r>
+              <a:rPr b="1" lang="en" sz="1100"/>
+              <a:t>labels</a:t>
+            </a:r>
+            <a:endParaRPr b="1" i="0" sz="1100" u="none" cap="none" strike="noStrike">
+              <a:solidFill>
+                <a:srgbClr val="000000"/>
+              </a:solidFill>
+              <a:latin typeface="Arial"/>
+              <a:ea typeface="Arial"/>
+              <a:cs typeface="Arial"/>
+              <a:sym typeface="Arial"/>
+            </a:endParaRPr>
+          </a:p>
+        </p:txBody>
+      </p:sp>
+      <p:sp>
+        <p:nvSpPr>
+          <p:cNvPr id="254" name="Google Shape;254;p30"/>
+          <p:cNvSpPr txBox="1"/>
+          <p:nvPr/>
+        </p:nvSpPr>
+        <p:spPr>
+          <a:xfrm>
+            <a:off x="4170100" y="1979300"/>
+            <a:ext cx="412500" cy="461700"/>
           </a:xfrm>
           <a:prstGeom prst="rect">
             <a:avLst/>
@@ -9376,9 +10163,590 @@
               <a:buNone/>
             </a:pPr>
             <a:r>
+              <a:rPr lang="en" sz="1800">
+                <a:solidFill>
+                  <a:schemeClr val="dk2"/>
+                </a:solidFill>
+              </a:rPr>
+              <a:t>…</a:t>
+            </a:r>
+            <a:endParaRPr sz="1800">
+              <a:solidFill>
+                <a:schemeClr val="dk2"/>
+              </a:solidFill>
+            </a:endParaRPr>
+          </a:p>
+        </p:txBody>
+      </p:sp>
+      <p:cxnSp>
+        <p:nvCxnSpPr>
+          <p:cNvPr id="255" name="Google Shape;255;p30"/>
+          <p:cNvCxnSpPr/>
+          <p:nvPr/>
+        </p:nvCxnSpPr>
+        <p:spPr>
+          <a:xfrm flipH="1" rot="10800000">
+            <a:off x="7065431" y="2007988"/>
+            <a:ext cx="309300" cy="9000"/>
+          </a:xfrm>
+          <a:prstGeom prst="straightConnector1">
+            <a:avLst/>
+          </a:prstGeom>
+          <a:noFill/>
+          <a:ln cap="flat" cmpd="sng" w="9525">
+            <a:solidFill>
+              <a:srgbClr val="595959"/>
+            </a:solidFill>
+            <a:prstDash val="solid"/>
+            <a:round/>
+            <a:headEnd len="sm" w="sm" type="none"/>
+            <a:tailEnd len="med" w="med" type="triangle"/>
+          </a:ln>
+        </p:spPr>
+      </p:cxnSp>
+      <p:sp>
+        <p:nvSpPr>
+          <p:cNvPr id="256" name="Google Shape;256;p30"/>
+          <p:cNvSpPr txBox="1"/>
+          <p:nvPr/>
+        </p:nvSpPr>
+        <p:spPr>
+          <a:xfrm>
+            <a:off x="7374725" y="1858600"/>
+            <a:ext cx="593100" cy="307800"/>
+          </a:xfrm>
+          <a:prstGeom prst="rect">
+            <a:avLst/>
+          </a:prstGeom>
+          <a:noFill/>
+          <a:ln>
+            <a:noFill/>
+          </a:ln>
+        </p:spPr>
+        <p:txBody>
+          <a:bodyPr anchorCtr="0" anchor="t" bIns="68575" lIns="68575" spcFirstLastPara="1" rIns="68575" wrap="square" tIns="68575">
+            <a:spAutoFit/>
+          </a:bodyPr>
+          <a:lstStyle/>
+          <a:p>
+            <a:pPr indent="0" lvl="0" marL="0" marR="0" rtl="0" algn="l">
+              <a:lnSpc>
+                <a:spcPct val="100000"/>
+              </a:lnSpc>
+              <a:spcBef>
+                <a:spcPts val="0"/>
+              </a:spcBef>
+              <a:spcAft>
+                <a:spcPts val="0"/>
+              </a:spcAft>
+              <a:buClr>
+                <a:srgbClr val="000000"/>
+              </a:buClr>
+              <a:buSzPts val="1100"/>
+              <a:buFont typeface="Arial"/>
+              <a:buNone/>
+            </a:pPr>
+            <a:r>
+              <a:rPr b="1" lang="en" sz="1100"/>
+              <a:t>Error</a:t>
+            </a:r>
+            <a:endParaRPr b="1" i="0" sz="1100" u="none" cap="none" strike="noStrike">
+              <a:solidFill>
+                <a:srgbClr val="000000"/>
+              </a:solidFill>
+              <a:latin typeface="Arial"/>
+              <a:ea typeface="Arial"/>
+              <a:cs typeface="Arial"/>
+              <a:sym typeface="Arial"/>
+            </a:endParaRPr>
+          </a:p>
+        </p:txBody>
+      </p:sp>
+      <p:sp>
+        <p:nvSpPr>
+          <p:cNvPr id="257" name="Google Shape;257;p30"/>
+          <p:cNvSpPr/>
+          <p:nvPr/>
+        </p:nvSpPr>
+        <p:spPr>
+          <a:xfrm>
+            <a:off x="3046900" y="1151000"/>
+            <a:ext cx="1244400" cy="235800"/>
+          </a:xfrm>
+          <a:prstGeom prst="rightArrow">
+            <a:avLst>
+              <a:gd fmla="val 50000" name="adj1"/>
+              <a:gd fmla="val 50000" name="adj2"/>
+            </a:avLst>
+          </a:prstGeom>
+          <a:solidFill>
+            <a:schemeClr val="lt2"/>
+          </a:solidFill>
+          <a:ln cap="flat" cmpd="sng" w="9525">
+            <a:solidFill>
+              <a:schemeClr val="dk2"/>
+            </a:solidFill>
+            <a:prstDash val="solid"/>
+            <a:round/>
+            <a:headEnd len="sm" w="sm" type="none"/>
+            <a:tailEnd len="sm" w="sm" type="none"/>
+          </a:ln>
+        </p:spPr>
+        <p:txBody>
+          <a:bodyPr anchorCtr="0" anchor="ctr" bIns="91425" lIns="91425" spcFirstLastPara="1" rIns="91425" wrap="square" tIns="91425">
+            <a:noAutofit/>
+          </a:bodyPr>
+          <a:lstStyle/>
+          <a:p>
+            <a:pPr indent="0" lvl="0" marL="0" rtl="0" algn="ctr">
+              <a:spcBef>
+                <a:spcPts val="0"/>
+              </a:spcBef>
+              <a:spcAft>
+                <a:spcPts val="0"/>
+              </a:spcAft>
+              <a:buNone/>
+            </a:pPr>
+            <a:r>
               <a:t/>
             </a:r>
-            <a:endParaRPr sz="1500">
+            <a:endParaRPr/>
+          </a:p>
+        </p:txBody>
+      </p:sp>
+      <p:sp>
+        <p:nvSpPr>
+          <p:cNvPr id="258" name="Google Shape;258;p30"/>
+          <p:cNvSpPr txBox="1"/>
+          <p:nvPr/>
+        </p:nvSpPr>
+        <p:spPr>
+          <a:xfrm>
+            <a:off x="2611096" y="774575"/>
+            <a:ext cx="2346300" cy="400200"/>
+          </a:xfrm>
+          <a:prstGeom prst="rect">
+            <a:avLst/>
+          </a:prstGeom>
+          <a:noFill/>
+          <a:ln>
+            <a:noFill/>
+          </a:ln>
+        </p:spPr>
+        <p:txBody>
+          <a:bodyPr anchorCtr="0" anchor="t" bIns="91425" lIns="91425" spcFirstLastPara="1" rIns="91425" wrap="square" tIns="91425">
+            <a:spAutoFit/>
+          </a:bodyPr>
+          <a:lstStyle/>
+          <a:p>
+            <a:pPr indent="0" lvl="0" marL="0" rtl="0" algn="l">
+              <a:spcBef>
+                <a:spcPts val="0"/>
+              </a:spcBef>
+              <a:spcAft>
+                <a:spcPts val="0"/>
+              </a:spcAft>
+              <a:buNone/>
+            </a:pPr>
+            <a:r>
+              <a:rPr lang="en">
+                <a:solidFill>
+                  <a:schemeClr val="dk2"/>
+                </a:solidFill>
+              </a:rPr>
+              <a:t>Forward Pass or Inference</a:t>
+            </a:r>
+            <a:endParaRPr>
+              <a:solidFill>
+                <a:schemeClr val="dk2"/>
+              </a:solidFill>
+            </a:endParaRPr>
+          </a:p>
+        </p:txBody>
+      </p:sp>
+      <p:cxnSp>
+        <p:nvCxnSpPr>
+          <p:cNvPr id="259" name="Google Shape;259;p30"/>
+          <p:cNvCxnSpPr>
+            <a:stCxn id="256" idx="2"/>
+            <a:endCxn id="247" idx="2"/>
+          </p:cNvCxnSpPr>
+          <p:nvPr/>
+        </p:nvCxnSpPr>
+        <p:spPr>
+          <a:xfrm rot="5400000">
+            <a:off x="6226475" y="1144900"/>
+            <a:ext cx="423300" cy="2466300"/>
+          </a:xfrm>
+          <a:prstGeom prst="bentConnector3">
+            <a:avLst>
+              <a:gd fmla="val 156288" name="adj1"/>
+            </a:avLst>
+          </a:prstGeom>
+          <a:noFill/>
+          <a:ln cap="flat" cmpd="sng" w="9525">
+            <a:solidFill>
+              <a:schemeClr val="dk2"/>
+            </a:solidFill>
+            <a:prstDash val="solid"/>
+            <a:round/>
+            <a:headEnd len="med" w="med" type="none"/>
+            <a:tailEnd len="med" w="med" type="triangle"/>
+          </a:ln>
+        </p:spPr>
+      </p:cxnSp>
+      <p:cxnSp>
+        <p:nvCxnSpPr>
+          <p:cNvPr id="260" name="Google Shape;260;p30"/>
+          <p:cNvCxnSpPr>
+            <a:stCxn id="256" idx="2"/>
+            <a:endCxn id="237" idx="2"/>
+          </p:cNvCxnSpPr>
+          <p:nvPr/>
+        </p:nvCxnSpPr>
+        <p:spPr>
+          <a:xfrm rot="5400000">
+            <a:off x="4633925" y="-447350"/>
+            <a:ext cx="423600" cy="5651100"/>
+          </a:xfrm>
+          <a:prstGeom prst="bentConnector3">
+            <a:avLst>
+              <a:gd fmla="val 156191" name="adj1"/>
+            </a:avLst>
+          </a:prstGeom>
+          <a:noFill/>
+          <a:ln cap="flat" cmpd="sng" w="9525">
+            <a:solidFill>
+              <a:schemeClr val="dk2"/>
+            </a:solidFill>
+            <a:prstDash val="solid"/>
+            <a:round/>
+            <a:headEnd len="med" w="med" type="none"/>
+            <a:tailEnd len="med" w="med" type="triangle"/>
+          </a:ln>
+        </p:spPr>
+      </p:cxnSp>
+      <p:sp>
+        <p:nvSpPr>
+          <p:cNvPr id="261" name="Google Shape;261;p30"/>
+          <p:cNvSpPr txBox="1"/>
+          <p:nvPr/>
+        </p:nvSpPr>
+        <p:spPr>
+          <a:xfrm>
+            <a:off x="3398846" y="2904925"/>
+            <a:ext cx="2346300" cy="400200"/>
+          </a:xfrm>
+          <a:prstGeom prst="rect">
+            <a:avLst/>
+          </a:prstGeom>
+          <a:noFill/>
+          <a:ln>
+            <a:noFill/>
+          </a:ln>
+        </p:spPr>
+        <p:txBody>
+          <a:bodyPr anchorCtr="0" anchor="t" bIns="91425" lIns="91425" spcFirstLastPara="1" rIns="91425" wrap="square" tIns="91425">
+            <a:spAutoFit/>
+          </a:bodyPr>
+          <a:lstStyle/>
+          <a:p>
+            <a:pPr indent="0" lvl="0" marL="0" rtl="0" algn="l">
+              <a:spcBef>
+                <a:spcPts val="0"/>
+              </a:spcBef>
+              <a:spcAft>
+                <a:spcPts val="0"/>
+              </a:spcAft>
+              <a:buNone/>
+            </a:pPr>
+            <a:r>
+              <a:rPr lang="en">
+                <a:solidFill>
+                  <a:schemeClr val="dk2"/>
+                </a:solidFill>
+              </a:rPr>
+              <a:t>Backward pass or training</a:t>
+            </a:r>
+            <a:endParaRPr>
+              <a:solidFill>
+                <a:schemeClr val="dk2"/>
+              </a:solidFill>
+            </a:endParaRPr>
+          </a:p>
+        </p:txBody>
+      </p:sp>
+      <p:sp>
+        <p:nvSpPr>
+          <p:cNvPr id="262" name="Google Shape;262;p30"/>
+          <p:cNvSpPr txBox="1"/>
+          <p:nvPr/>
+        </p:nvSpPr>
+        <p:spPr>
+          <a:xfrm>
+            <a:off x="150574" y="3444325"/>
+            <a:ext cx="4881600" cy="1200600"/>
+          </a:xfrm>
+          <a:prstGeom prst="rect">
+            <a:avLst/>
+          </a:prstGeom>
+          <a:noFill/>
+          <a:ln>
+            <a:noFill/>
+          </a:ln>
+        </p:spPr>
+        <p:txBody>
+          <a:bodyPr anchorCtr="0" anchor="t" bIns="91425" lIns="91425" spcFirstLastPara="1" rIns="91425" wrap="square" tIns="91425">
+            <a:spAutoFit/>
+          </a:bodyPr>
+          <a:lstStyle/>
+          <a:p>
+            <a:pPr indent="-298450" lvl="0" marL="457200" rtl="0" algn="l">
+              <a:spcBef>
+                <a:spcPts val="0"/>
+              </a:spcBef>
+              <a:spcAft>
+                <a:spcPts val="0"/>
+              </a:spcAft>
+              <a:buClr>
+                <a:schemeClr val="dk2"/>
+              </a:buClr>
+              <a:buSzPts val="1100"/>
+              <a:buChar char="●"/>
+            </a:pPr>
+            <a:r>
+              <a:rPr lang="en" sz="1100">
+                <a:solidFill>
+                  <a:schemeClr val="dk2"/>
+                </a:solidFill>
+              </a:rPr>
+              <a:t>Points on a 2D space</a:t>
+            </a:r>
+            <a:endParaRPr sz="1100">
+              <a:solidFill>
+                <a:schemeClr val="dk2"/>
+              </a:solidFill>
+            </a:endParaRPr>
+          </a:p>
+          <a:p>
+            <a:pPr indent="-298450" lvl="0" marL="457200" rtl="0" algn="l">
+              <a:spcBef>
+                <a:spcPts val="0"/>
+              </a:spcBef>
+              <a:spcAft>
+                <a:spcPts val="0"/>
+              </a:spcAft>
+              <a:buClr>
+                <a:schemeClr val="dk2"/>
+              </a:buClr>
+              <a:buSzPts val="1100"/>
+              <a:buChar char="●"/>
+            </a:pPr>
+            <a:r>
+              <a:rPr lang="en" sz="1100">
+                <a:solidFill>
+                  <a:schemeClr val="dk2"/>
+                </a:solidFill>
+              </a:rPr>
+              <a:t>Sequence of embeddings</a:t>
+            </a:r>
+            <a:endParaRPr sz="1100">
+              <a:solidFill>
+                <a:schemeClr val="dk2"/>
+              </a:solidFill>
+            </a:endParaRPr>
+          </a:p>
+          <a:p>
+            <a:pPr indent="-298450" lvl="0" marL="457200" rtl="0" algn="l">
+              <a:spcBef>
+                <a:spcPts val="0"/>
+              </a:spcBef>
+              <a:spcAft>
+                <a:spcPts val="0"/>
+              </a:spcAft>
+              <a:buClr>
+                <a:schemeClr val="dk2"/>
+              </a:buClr>
+              <a:buSzPts val="1100"/>
+              <a:buChar char="●"/>
+            </a:pPr>
+            <a:r>
+              <a:rPr lang="en" sz="1100">
+                <a:solidFill>
+                  <a:schemeClr val="dk2"/>
+                </a:solidFill>
+              </a:rPr>
+              <a:t>Fourier transform coefficients of an audio sample</a:t>
+            </a:r>
+            <a:endParaRPr sz="1100">
+              <a:solidFill>
+                <a:schemeClr val="dk2"/>
+              </a:solidFill>
+            </a:endParaRPr>
+          </a:p>
+          <a:p>
+            <a:pPr indent="-298450" lvl="0" marL="457200" rtl="0" algn="l">
+              <a:spcBef>
+                <a:spcPts val="0"/>
+              </a:spcBef>
+              <a:spcAft>
+                <a:spcPts val="0"/>
+              </a:spcAft>
+              <a:buClr>
+                <a:schemeClr val="dk2"/>
+              </a:buClr>
+              <a:buSzPts val="1100"/>
+              <a:buChar char="●"/>
+            </a:pPr>
+            <a:r>
+              <a:rPr lang="en" sz="1100">
+                <a:solidFill>
+                  <a:schemeClr val="dk2"/>
+                </a:solidFill>
+              </a:rPr>
+              <a:t>Images</a:t>
+            </a:r>
+            <a:endParaRPr sz="1100">
+              <a:solidFill>
+                <a:schemeClr val="dk2"/>
+              </a:solidFill>
+            </a:endParaRPr>
+          </a:p>
+          <a:p>
+            <a:pPr indent="-298450" lvl="0" marL="457200" rtl="0" algn="l">
+              <a:spcBef>
+                <a:spcPts val="0"/>
+              </a:spcBef>
+              <a:spcAft>
+                <a:spcPts val="0"/>
+              </a:spcAft>
+              <a:buClr>
+                <a:schemeClr val="dk2"/>
+              </a:buClr>
+              <a:buSzPts val="1100"/>
+              <a:buChar char="●"/>
+            </a:pPr>
+            <a:r>
+              <a:rPr lang="en" sz="1100">
+                <a:solidFill>
+                  <a:schemeClr val="dk2"/>
+                </a:solidFill>
+              </a:rPr>
+              <a:t>Image patches</a:t>
+            </a:r>
+            <a:endParaRPr sz="1100">
+              <a:solidFill>
+                <a:schemeClr val="dk2"/>
+              </a:solidFill>
+            </a:endParaRPr>
+          </a:p>
+          <a:p>
+            <a:pPr indent="-298450" lvl="0" marL="457200" rtl="0" algn="l">
+              <a:spcBef>
+                <a:spcPts val="0"/>
+              </a:spcBef>
+              <a:spcAft>
+                <a:spcPts val="0"/>
+              </a:spcAft>
+              <a:buClr>
+                <a:schemeClr val="dk2"/>
+              </a:buClr>
+              <a:buSzPts val="1100"/>
+              <a:buChar char="●"/>
+            </a:pPr>
+            <a:r>
+              <a:rPr lang="en" sz="1100">
+                <a:solidFill>
+                  <a:schemeClr val="dk2"/>
+                </a:solidFill>
+              </a:rPr>
+              <a:t>Video frames..</a:t>
+            </a:r>
+            <a:endParaRPr sz="1100">
+              <a:solidFill>
+                <a:schemeClr val="dk2"/>
+              </a:solidFill>
+            </a:endParaRPr>
+          </a:p>
+        </p:txBody>
+      </p:sp>
+      <p:cxnSp>
+        <p:nvCxnSpPr>
+          <p:cNvPr id="263" name="Google Shape;263;p30"/>
+          <p:cNvCxnSpPr/>
+          <p:nvPr/>
+        </p:nvCxnSpPr>
+        <p:spPr>
+          <a:xfrm rot="10800000">
+            <a:off x="773839" y="2297405"/>
+            <a:ext cx="352800" cy="1126800"/>
+          </a:xfrm>
+          <a:prstGeom prst="straightConnector1">
+            <a:avLst/>
+          </a:prstGeom>
+          <a:noFill/>
+          <a:ln cap="flat" cmpd="sng" w="9525">
+            <a:solidFill>
+              <a:srgbClr val="595959"/>
+            </a:solidFill>
+            <a:prstDash val="solid"/>
+            <a:round/>
+            <a:headEnd len="sm" w="sm" type="none"/>
+            <a:tailEnd len="med" w="med" type="triangle"/>
+          </a:ln>
+        </p:spPr>
+      </p:cxnSp>
+      <p:sp>
+        <p:nvSpPr>
+          <p:cNvPr id="264" name="Google Shape;264;p30"/>
+          <p:cNvSpPr txBox="1"/>
+          <p:nvPr/>
+        </p:nvSpPr>
+        <p:spPr>
+          <a:xfrm>
+            <a:off x="3963849" y="3504625"/>
+            <a:ext cx="4881600" cy="523200"/>
+          </a:xfrm>
+          <a:prstGeom prst="rect">
+            <a:avLst/>
+          </a:prstGeom>
+          <a:noFill/>
+          <a:ln>
+            <a:noFill/>
+          </a:ln>
+        </p:spPr>
+        <p:txBody>
+          <a:bodyPr anchorCtr="0" anchor="t" bIns="91425" lIns="91425" spcFirstLastPara="1" rIns="91425" wrap="square" tIns="91425">
+            <a:spAutoFit/>
+          </a:bodyPr>
+          <a:lstStyle/>
+          <a:p>
+            <a:pPr indent="0" lvl="0" marL="0" rtl="0" algn="l">
+              <a:spcBef>
+                <a:spcPts val="0"/>
+              </a:spcBef>
+              <a:spcAft>
+                <a:spcPts val="0"/>
+              </a:spcAft>
+              <a:buNone/>
+            </a:pPr>
+            <a:r>
+              <a:rPr b="1" lang="en" sz="1100">
+                <a:solidFill>
+                  <a:schemeClr val="dk2"/>
+                </a:solidFill>
+              </a:rPr>
+              <a:t>Key question: </a:t>
+            </a:r>
+            <a:r>
+              <a:rPr lang="en" sz="1100">
+                <a:solidFill>
+                  <a:schemeClr val="dk2"/>
+                </a:solidFill>
+              </a:rPr>
+              <a:t>How do I adjust the weights to reduce error? </a:t>
+            </a:r>
+            <a:endParaRPr sz="1100">
               <a:solidFill>
                 <a:schemeClr val="dk2"/>
               </a:solidFill>
@@ -9395,96 +10763,22 @@
               <a:buNone/>
             </a:pPr>
             <a:r>
-              <a:t/>
-            </a:r>
-            <a:endParaRPr>
-              <a:solidFill>
-                <a:schemeClr val="dk2"/>
-              </a:solidFill>
-            </a:endParaRPr>
-          </a:p>
-          <a:p>
-            <a:pPr indent="-317500" lvl="0" marL="457200" rtl="0" algn="l">
-              <a:spcBef>
-                <a:spcPts val="0"/>
-              </a:spcBef>
-              <a:spcAft>
-                <a:spcPts val="0"/>
-              </a:spcAft>
-              <a:buClr>
-                <a:schemeClr val="dk2"/>
-              </a:buClr>
-              <a:buSzPts val="1400"/>
-              <a:buAutoNum type="arabicPeriod"/>
-            </a:pPr>
-            <a:r>
-              <a:rPr lang="en">
+              <a:rPr b="1" lang="en" sz="1100">
                 <a:solidFill>
                   <a:schemeClr val="dk2"/>
                 </a:solidFill>
               </a:rPr>
-              <a:t>For some reason, we want the intercept </a:t>
-            </a:r>
-            <a:r>
-              <a:rPr i="1" lang="en">
+              <a:t>Answer:</a:t>
+            </a:r>
+            <a:r>
+              <a:rPr lang="en" sz="1100">
                 <a:solidFill>
                   <a:schemeClr val="dk2"/>
                 </a:solidFill>
               </a:rPr>
-              <a:t>b</a:t>
-            </a:r>
-            <a:r>
-              <a:rPr lang="en">
-                <a:solidFill>
-                  <a:schemeClr val="dk2"/>
-                </a:solidFill>
-              </a:rPr>
-              <a:t> to remain small. How would add this constraint to the regression problem? Solve for optimal values of a and b with this constraint</a:t>
-            </a:r>
-            <a:endParaRPr>
-              <a:solidFill>
-                <a:schemeClr val="dk2"/>
-              </a:solidFill>
-            </a:endParaRPr>
-          </a:p>
-          <a:p>
-            <a:pPr indent="0" lvl="0" marL="0" rtl="0" algn="l">
-              <a:spcBef>
-                <a:spcPts val="0"/>
-              </a:spcBef>
-              <a:spcAft>
-                <a:spcPts val="0"/>
-              </a:spcAft>
-              <a:buNone/>
-            </a:pPr>
-            <a:r>
-              <a:t/>
-            </a:r>
-            <a:endParaRPr sz="1500">
-              <a:solidFill>
-                <a:schemeClr val="dk2"/>
-              </a:solidFill>
-            </a:endParaRPr>
-          </a:p>
-          <a:p>
-            <a:pPr indent="0" lvl="0" marL="0" rtl="0" algn="l">
-              <a:spcBef>
-                <a:spcPts val="0"/>
-              </a:spcBef>
-              <a:spcAft>
-                <a:spcPts val="0"/>
-              </a:spcAft>
-              <a:buNone/>
-            </a:pPr>
-            <a:r>
-              <a:rPr lang="en" sz="1500">
-                <a:solidFill>
-                  <a:schemeClr val="dk2"/>
-                </a:solidFill>
-              </a:rPr>
-              <a:t>. </a:t>
-            </a:r>
-            <a:endParaRPr sz="1500">
+              <a:t> Backpropagation!</a:t>
+            </a:r>
+            <a:endParaRPr sz="1100">
               <a:solidFill>
                 <a:schemeClr val="dk2"/>
               </a:solidFill>
@@ -9492,34 +10786,6 @@
           </a:p>
         </p:txBody>
       </p:sp>
-      <p:pic>
-        <p:nvPicPr>
-          <p:cNvPr descr="{&quot;font&quot;:{&quot;color&quot;:&quot;#595959&quot;,&quot;family&quot;:&quot;Arial&quot;,&quot;size&quot;:15},&quot;backgroundColor&quot;:&quot;#FFFFFF&quot;,&quot;code&quot;:&quot;\\begin{gather*}\n{x=\\begin{pmatrix}\n{x_{1}}\\\\\n{x_{2}}\\\\\n{x_{3}}\\\\\n\\end{pmatrix}y=\\begin{pmatrix}\n{y_{1}}\\\\\n{y_{2}}\\\\\n{y_{3}}\\\\\n\\end{pmatrix}}\\\\\n{\\text{Then,}\\;\\text{z=hadamard(x,y)=}x\\odot y=\\begin{pmatrix}\n{x_{1}y_{1}}\\\\\n{x_{2}y_{2}}\\\\\n{x_{3}y_{3}}\\\\\n\\end{pmatrix}}\\\\\n{\\text{Calculate}\\;\\pdf{z}{x}\\,\\text{and}\\;\\pdf{z}{y}}\t\n\\end{gather*}&quot;,&quot;aid&quot;:null,&quot;type&quot;:&quot;gather*&quot;,&quot;backgroundColorModified&quot;:false,&quot;id&quot;:&quot;12&quot;,&quot;ts&quot;:1760308325873,&quot;cs&quot;:&quot;kPehWn9jOle3+jYsWB+A0g==&quot;,&quot;size&quot;:{&quot;width&quot;:430,&quot;height&quot;:246}}" id="236" name="Google Shape;236;p30"/>
-          <p:cNvPicPr preferRelativeResize="0"/>
-          <p:nvPr/>
-        </p:nvPicPr>
-        <p:blipFill>
-          <a:blip r:embed="rId3">
-            <a:alphaModFix/>
-          </a:blip>
-          <a:stretch>
-            <a:fillRect/>
-          </a:stretch>
-        </p:blipFill>
-        <p:spPr>
-          <a:xfrm>
-            <a:off x="1621101" y="1097600"/>
-            <a:ext cx="3643576" cy="2084450"/>
-          </a:xfrm>
-          <a:prstGeom prst="rect">
-            <a:avLst/>
-          </a:prstGeom>
-          <a:noFill/>
-          <a:ln>
-            <a:noFill/>
-          </a:ln>
-        </p:spPr>
-      </p:pic>
     </p:spTree>
   </p:cSld>
   <p:clrMapOvr>
@@ -9533,7 +10799,7 @@
   <p:cSld>
     <p:spTree>
       <p:nvGrpSpPr>
-        <p:cNvPr id="240" name="Shape 240"/>
+        <p:cNvPr id="268" name="Shape 268"/>
         <p:cNvGrpSpPr/>
         <p:nvPr/>
       </p:nvGrpSpPr>
@@ -9547,7 +10813,7 @@
       </p:grpSpPr>
       <p:sp>
         <p:nvSpPr>
-          <p:cNvPr id="241" name="Google Shape;241;p31"/>
+          <p:cNvPr id="269" name="Google Shape;269;p31"/>
           <p:cNvSpPr txBox="1"/>
           <p:nvPr>
             <p:ph idx="4294967295" type="title"/>
@@ -9579,7 +10845,7 @@
             </a:pPr>
             <a:r>
               <a:rPr lang="en"/>
-              <a:t>Recall: Structure of a Network</a:t>
+              <a:t>Derivative of a vector against a matrix</a:t>
             </a:r>
             <a:endParaRPr/>
           </a:p>
@@ -9587,13 +10853,13 @@
       </p:sp>
       <p:sp>
         <p:nvSpPr>
-          <p:cNvPr id="242" name="Google Shape;242;p31"/>
+          <p:cNvPr id="270" name="Google Shape;270;p31"/>
           <p:cNvSpPr txBox="1"/>
           <p:nvPr/>
         </p:nvSpPr>
         <p:spPr>
           <a:xfrm>
-            <a:off x="464725" y="1242363"/>
+            <a:off x="381450" y="806388"/>
             <a:ext cx="3013800" cy="461700"/>
           </a:xfrm>
           <a:prstGeom prst="rect">
@@ -9630,450 +10896,14 @@
           </a:p>
         </p:txBody>
       </p:sp>
-      <p:sp>
-        <p:nvSpPr>
-          <p:cNvPr id="243" name="Google Shape;243;p31"/>
-          <p:cNvSpPr/>
-          <p:nvPr/>
-        </p:nvSpPr>
-        <p:spPr>
-          <a:xfrm>
-            <a:off x="1555994" y="1489800"/>
-            <a:ext cx="928200" cy="1100100"/>
-          </a:xfrm>
-          <a:prstGeom prst="roundRect">
-            <a:avLst>
-              <a:gd fmla="val 9734" name="adj"/>
-            </a:avLst>
-          </a:prstGeom>
-          <a:solidFill>
-            <a:srgbClr val="EEEEEE"/>
-          </a:solidFill>
-          <a:ln cap="flat" cmpd="sng" w="9525">
-            <a:solidFill>
-              <a:srgbClr val="595959"/>
-            </a:solidFill>
-            <a:prstDash val="solid"/>
-            <a:round/>
-            <a:headEnd len="sm" w="sm" type="none"/>
-            <a:tailEnd len="sm" w="sm" type="none"/>
-          </a:ln>
-        </p:spPr>
-        <p:txBody>
-          <a:bodyPr anchorCtr="0" anchor="ctr" bIns="68575" lIns="68575" spcFirstLastPara="1" rIns="68575" wrap="square" tIns="68575">
-            <a:noAutofit/>
-          </a:bodyPr>
-          <a:lstStyle/>
-          <a:p>
-            <a:pPr indent="0" lvl="0" marL="0" marR="0" rtl="0" algn="l">
-              <a:lnSpc>
-                <a:spcPct val="100000"/>
-              </a:lnSpc>
-              <a:spcBef>
-                <a:spcPts val="0"/>
-              </a:spcBef>
-              <a:spcAft>
-                <a:spcPts val="0"/>
-              </a:spcAft>
-              <a:buClr>
-                <a:srgbClr val="000000"/>
-              </a:buClr>
-              <a:buSzPts val="1100"/>
-              <a:buFont typeface="Arial"/>
-              <a:buNone/>
-            </a:pPr>
-            <a:r>
-              <a:t/>
-            </a:r>
-            <a:endParaRPr b="0" i="0" sz="1100" u="none" cap="none" strike="noStrike">
-              <a:solidFill>
-                <a:srgbClr val="000000"/>
-              </a:solidFill>
-              <a:latin typeface="Arial"/>
-              <a:ea typeface="Arial"/>
-              <a:cs typeface="Arial"/>
-              <a:sym typeface="Arial"/>
-            </a:endParaRPr>
-          </a:p>
-        </p:txBody>
-      </p:sp>
       <p:pic>
         <p:nvPicPr>
-          <p:cNvPr id="244" name="Google Shape;244;p31"/>
-          <p:cNvPicPr preferRelativeResize="0"/>
-          <p:nvPr/>
-        </p:nvPicPr>
-        <p:blipFill rotWithShape="1">
-          <a:blip r:embed="rId3">
-            <a:alphaModFix/>
-          </a:blip>
-          <a:srcRect b="0" l="0" r="0" t="0"/>
-          <a:stretch/>
-        </p:blipFill>
-        <p:spPr>
-          <a:xfrm>
-            <a:off x="1855750" y="1921931"/>
-            <a:ext cx="328613" cy="235744"/>
-          </a:xfrm>
-          <a:prstGeom prst="rect">
-            <a:avLst/>
-          </a:prstGeom>
-          <a:noFill/>
-          <a:ln>
-            <a:noFill/>
-          </a:ln>
-        </p:spPr>
-      </p:pic>
-      <p:sp>
-        <p:nvSpPr>
-          <p:cNvPr id="245" name="Google Shape;245;p31"/>
-          <p:cNvSpPr/>
-          <p:nvPr/>
-        </p:nvSpPr>
-        <p:spPr>
-          <a:xfrm>
-            <a:off x="3133731" y="1489791"/>
-            <a:ext cx="928200" cy="1100100"/>
-          </a:xfrm>
-          <a:prstGeom prst="roundRect">
-            <a:avLst>
-              <a:gd fmla="val 9734" name="adj"/>
-            </a:avLst>
-          </a:prstGeom>
-          <a:solidFill>
-            <a:srgbClr val="EEEEEE"/>
-          </a:solidFill>
-          <a:ln cap="flat" cmpd="sng" w="9525">
-            <a:solidFill>
-              <a:srgbClr val="595959"/>
-            </a:solidFill>
-            <a:prstDash val="solid"/>
-            <a:round/>
-            <a:headEnd len="sm" w="sm" type="none"/>
-            <a:tailEnd len="sm" w="sm" type="none"/>
-          </a:ln>
-        </p:spPr>
-        <p:txBody>
-          <a:bodyPr anchorCtr="0" anchor="ctr" bIns="68575" lIns="68575" spcFirstLastPara="1" rIns="68575" wrap="square" tIns="68575">
-            <a:noAutofit/>
-          </a:bodyPr>
-          <a:lstStyle/>
-          <a:p>
-            <a:pPr indent="0" lvl="0" marL="0" marR="0" rtl="0" algn="ctr">
-              <a:lnSpc>
-                <a:spcPct val="100000"/>
-              </a:lnSpc>
-              <a:spcBef>
-                <a:spcPts val="0"/>
-              </a:spcBef>
-              <a:spcAft>
-                <a:spcPts val="0"/>
-              </a:spcAft>
-              <a:buClr>
-                <a:srgbClr val="000000"/>
-              </a:buClr>
-              <a:buSzPts val="1100"/>
-              <a:buFont typeface="Arial"/>
-              <a:buNone/>
-            </a:pPr>
-            <a:r>
-              <a:rPr b="1" lang="en" sz="1300"/>
-              <a:t>ReLU</a:t>
-            </a:r>
-            <a:endParaRPr b="1" i="0" sz="1300" u="none" cap="none" strike="noStrike">
-              <a:solidFill>
-                <a:srgbClr val="000000"/>
-              </a:solidFill>
-            </a:endParaRPr>
-          </a:p>
-        </p:txBody>
-      </p:sp>
-      <p:cxnSp>
-        <p:nvCxnSpPr>
-          <p:cNvPr id="246" name="Google Shape;246;p31"/>
-          <p:cNvCxnSpPr>
-            <a:stCxn id="243" idx="3"/>
-            <a:endCxn id="245" idx="1"/>
-          </p:cNvCxnSpPr>
-          <p:nvPr/>
-        </p:nvCxnSpPr>
-        <p:spPr>
-          <a:xfrm>
-            <a:off x="2484194" y="2039850"/>
-            <a:ext cx="649500" cy="0"/>
-          </a:xfrm>
-          <a:prstGeom prst="straightConnector1">
-            <a:avLst/>
-          </a:prstGeom>
-          <a:noFill/>
-          <a:ln cap="flat" cmpd="sng" w="9525">
-            <a:solidFill>
-              <a:srgbClr val="595959"/>
-            </a:solidFill>
-            <a:prstDash val="solid"/>
-            <a:round/>
-            <a:headEnd len="sm" w="sm" type="none"/>
-            <a:tailEnd len="med" w="med" type="triangle"/>
-          </a:ln>
-        </p:spPr>
-      </p:cxnSp>
-      <p:sp>
-        <p:nvSpPr>
-          <p:cNvPr id="247" name="Google Shape;247;p31"/>
-          <p:cNvSpPr txBox="1"/>
-          <p:nvPr/>
-        </p:nvSpPr>
-        <p:spPr>
-          <a:xfrm>
-            <a:off x="711344" y="1818825"/>
-            <a:ext cx="412500" cy="307800"/>
-          </a:xfrm>
-          <a:prstGeom prst="rect">
-            <a:avLst/>
-          </a:prstGeom>
-          <a:noFill/>
-          <a:ln>
-            <a:noFill/>
-          </a:ln>
-        </p:spPr>
-        <p:txBody>
-          <a:bodyPr anchorCtr="0" anchor="t" bIns="68575" lIns="68575" spcFirstLastPara="1" rIns="68575" wrap="square" tIns="68575">
-            <a:spAutoFit/>
-          </a:bodyPr>
-          <a:lstStyle/>
-          <a:p>
-            <a:pPr indent="0" lvl="0" marL="0" marR="0" rtl="0" algn="l">
-              <a:lnSpc>
-                <a:spcPct val="100000"/>
-              </a:lnSpc>
-              <a:spcBef>
-                <a:spcPts val="0"/>
-              </a:spcBef>
-              <a:spcAft>
-                <a:spcPts val="0"/>
-              </a:spcAft>
-              <a:buClr>
-                <a:srgbClr val="000000"/>
-              </a:buClr>
-              <a:buSzPts val="1100"/>
-              <a:buFont typeface="Arial"/>
-              <a:buNone/>
-            </a:pPr>
-            <a:r>
-              <a:t/>
-            </a:r>
-            <a:endParaRPr b="0" i="0" sz="1100" u="none" cap="none" strike="noStrike">
-              <a:solidFill>
-                <a:srgbClr val="000000"/>
-              </a:solidFill>
-              <a:latin typeface="Arial"/>
-              <a:ea typeface="Arial"/>
-              <a:cs typeface="Arial"/>
-              <a:sym typeface="Arial"/>
-            </a:endParaRPr>
-          </a:p>
-        </p:txBody>
-      </p:sp>
-      <p:pic>
-        <p:nvPicPr>
-          <p:cNvPr id="248" name="Google Shape;248;p31"/>
-          <p:cNvPicPr preferRelativeResize="0"/>
-          <p:nvPr/>
-        </p:nvPicPr>
-        <p:blipFill rotWithShape="1">
-          <a:blip r:embed="rId4">
-            <a:alphaModFix/>
-          </a:blip>
-          <a:srcRect b="0" l="0" r="0" t="0"/>
-          <a:stretch/>
-        </p:blipFill>
-        <p:spPr>
-          <a:xfrm>
-            <a:off x="639625" y="1952292"/>
-            <a:ext cx="207827" cy="175013"/>
-          </a:xfrm>
-          <a:prstGeom prst="rect">
-            <a:avLst/>
-          </a:prstGeom>
-          <a:noFill/>
-          <a:ln>
-            <a:noFill/>
-          </a:ln>
-        </p:spPr>
-      </p:pic>
-      <p:cxnSp>
-        <p:nvCxnSpPr>
-          <p:cNvPr id="249" name="Google Shape;249;p31"/>
-          <p:cNvCxnSpPr/>
-          <p:nvPr/>
-        </p:nvCxnSpPr>
-        <p:spPr>
-          <a:xfrm>
-            <a:off x="906381" y="2039813"/>
-            <a:ext cx="649500" cy="0"/>
-          </a:xfrm>
-          <a:prstGeom prst="straightConnector1">
-            <a:avLst/>
-          </a:prstGeom>
-          <a:noFill/>
-          <a:ln cap="flat" cmpd="sng" w="9525">
-            <a:solidFill>
-              <a:srgbClr val="595959"/>
-            </a:solidFill>
-            <a:prstDash val="solid"/>
-            <a:round/>
-            <a:headEnd len="sm" w="sm" type="none"/>
-            <a:tailEnd len="med" w="med" type="triangle"/>
-          </a:ln>
-        </p:spPr>
-      </p:cxnSp>
-      <p:cxnSp>
-        <p:nvCxnSpPr>
-          <p:cNvPr id="250" name="Google Shape;250;p31"/>
-          <p:cNvCxnSpPr/>
-          <p:nvPr/>
-        </p:nvCxnSpPr>
-        <p:spPr>
-          <a:xfrm>
-            <a:off x="4061856" y="2039813"/>
-            <a:ext cx="649500" cy="0"/>
-          </a:xfrm>
-          <a:prstGeom prst="straightConnector1">
-            <a:avLst/>
-          </a:prstGeom>
-          <a:noFill/>
-          <a:ln cap="flat" cmpd="sng" w="9525">
-            <a:solidFill>
-              <a:srgbClr val="595959"/>
-            </a:solidFill>
-            <a:prstDash val="solid"/>
-            <a:round/>
-            <a:headEnd len="sm" w="sm" type="none"/>
-            <a:tailEnd len="med" w="med" type="triangle"/>
-          </a:ln>
-        </p:spPr>
-      </p:cxnSp>
-      <p:pic>
-        <p:nvPicPr>
-          <p:cNvPr id="251" name="Google Shape;251;p31"/>
-          <p:cNvPicPr preferRelativeResize="0"/>
-          <p:nvPr/>
-        </p:nvPicPr>
-        <p:blipFill rotWithShape="1">
-          <a:blip r:embed="rId5">
-            <a:alphaModFix/>
-          </a:blip>
-          <a:srcRect b="0" l="0" r="0" t="0"/>
-          <a:stretch/>
-        </p:blipFill>
-        <p:spPr>
-          <a:xfrm>
-            <a:off x="2715719" y="1818825"/>
-            <a:ext cx="214313" cy="171450"/>
-          </a:xfrm>
-          <a:prstGeom prst="rect">
-            <a:avLst/>
-          </a:prstGeom>
-          <a:noFill/>
-          <a:ln>
-            <a:noFill/>
-          </a:ln>
-        </p:spPr>
-      </p:pic>
-      <p:pic>
-        <p:nvPicPr>
-          <p:cNvPr id="252" name="Google Shape;252;p31"/>
-          <p:cNvPicPr preferRelativeResize="0"/>
-          <p:nvPr/>
-        </p:nvPicPr>
-        <p:blipFill rotWithShape="1">
-          <a:blip r:embed="rId6">
-            <a:alphaModFix/>
-          </a:blip>
-          <a:srcRect b="0" l="0" r="0" t="0"/>
-          <a:stretch/>
-        </p:blipFill>
-        <p:spPr>
-          <a:xfrm>
-            <a:off x="4265625" y="1807838"/>
-            <a:ext cx="221456" cy="171450"/>
-          </a:xfrm>
-          <a:prstGeom prst="rect">
-            <a:avLst/>
-          </a:prstGeom>
-          <a:noFill/>
-          <a:ln>
-            <a:noFill/>
-          </a:ln>
-        </p:spPr>
-      </p:pic>
-      <p:sp>
-        <p:nvSpPr>
-          <p:cNvPr id="253" name="Google Shape;253;p31"/>
-          <p:cNvSpPr/>
-          <p:nvPr/>
-        </p:nvSpPr>
-        <p:spPr>
-          <a:xfrm>
-            <a:off x="4740919" y="1489741"/>
-            <a:ext cx="928200" cy="1100100"/>
-          </a:xfrm>
-          <a:prstGeom prst="roundRect">
-            <a:avLst>
-              <a:gd fmla="val 9734" name="adj"/>
-            </a:avLst>
-          </a:prstGeom>
-          <a:solidFill>
-            <a:srgbClr val="EEEEEE"/>
-          </a:solidFill>
-          <a:ln cap="flat" cmpd="sng" w="9525">
-            <a:solidFill>
-              <a:srgbClr val="595959"/>
-            </a:solidFill>
-            <a:prstDash val="solid"/>
-            <a:round/>
-            <a:headEnd len="sm" w="sm" type="none"/>
-            <a:tailEnd len="sm" w="sm" type="none"/>
-          </a:ln>
-        </p:spPr>
-        <p:txBody>
-          <a:bodyPr anchorCtr="0" anchor="ctr" bIns="68575" lIns="68575" spcFirstLastPara="1" rIns="68575" wrap="square" tIns="68575">
-            <a:noAutofit/>
-          </a:bodyPr>
-          <a:lstStyle/>
-          <a:p>
-            <a:pPr indent="0" lvl="0" marL="0" marR="0" rtl="0" algn="l">
-              <a:lnSpc>
-                <a:spcPct val="100000"/>
-              </a:lnSpc>
-              <a:spcBef>
-                <a:spcPts val="0"/>
-              </a:spcBef>
-              <a:spcAft>
-                <a:spcPts val="0"/>
-              </a:spcAft>
-              <a:buClr>
-                <a:srgbClr val="000000"/>
-              </a:buClr>
-              <a:buSzPts val="1100"/>
-              <a:buFont typeface="Arial"/>
-              <a:buNone/>
-            </a:pPr>
-            <a:r>
-              <a:t/>
-            </a:r>
-            <a:endParaRPr sz="1100"/>
-          </a:p>
-        </p:txBody>
-      </p:sp>
-      <p:pic>
-        <p:nvPicPr>
-          <p:cNvPr id="254" name="Google Shape;254;p31" title="[0,0,0,&quot;https://www.codecogs.com/eqnedit.php?latex=W_n#0&quot;]"/>
+          <p:cNvPr descr="{&quot;aid&quot;:null,&quot;code&quot;:&quot;\\begin{gather*}\n{\\text{Let's}\\;\\text{consider}\\;\\text{the}\\;ij^{th}\\;\\text{element}\\;\\text{of}\\;\\diff{v}{A},\\,\\text{i.e.,}\\;\\diff{v}{A_{ij}}}\\\\\n{\\text{Now}\\;\\text{we}\\;\\text{have}\\;\\text{a}\\;\\text{chain..}}\\\\\n{A_{ij}\\to y\\to v,\\,\\text{here}\\;y\\,\\;\\text{is}\\;\\text{a}\\;\\text{vector}}\\\\\n{\\text{Now..}}\\\\\n{y_{i}=\\sum_{j=1}^{m}A_{ij}x_{j}}\\\\\n{\\text{Since}\\;\\text{each}\\;\\text{element}\\;\\text{of}\\;y\\,\\;\\text{is}\\;\\text{the}\\;\\text{corresponding}\\,\\text{row}\\;\\text{of}\\;\\text{A}\\;\\text{multiplied}\\;\\text{with}\\;x,\\,}\\\\\n{\\text{and}\\;\\text{other}\\;\\text{rows}\\;\\text{of}\\;\\text{A}\\,\\text{don't}\\;\\text{affect}\\;y_{i},\\,\\text{the}\\;\\text{chain}\\;\\text{above}\\;\\text{becomes}\\;\\text{a}\\;\\text{scalar}\\;\\text{chain..}\\text{}}\\\\\n{A_{ij}\\to y_{i}\\to v}\\\\\n{\\text{Now}\\;\\text{we}\\;\\text{can}\\;\\text{apply}\\;\\text{the}\\;\\text{chain}\\;\\text{rule..}}\\\\\n{\\diff{v}{A_{ij}}=\\diff{v}{y_{i}}\\diff{y_{i}}{A_{ij}}=\\diff{v}{y_{i}}\\diff{\\sum_{j=1}^{m}A_{ij}x_{j}}{A_{ij}}=\\diff{v}{y_{i}}x_{j}}\\\\\n{\\text{So..}\\;\\diff{v}{A}\\,\\text{becomes}\\;\\text{the}\\;\\text{outer}\\;\\text{product}\\;\\text{of}\\;\\text{the}\\;\\text{vectors}\\;\\diff{v}{y}\\,\\text{and}\\;x!}\\\\\n{\\diff{v}{A}=\\diff{v}{y}x^{T}\\,\\text{}}\\\\\n{\\text{Verify}\\;\\text{that}\\;\\text{the}\\;\\text{dimensions}\\;\\text{work}\\;\\text{out!}}\t\n\\end{gather*}&quot;,&quot;font&quot;:{&quot;size&quot;:10.5,&quot;family&quot;:&quot;Arial&quot;,&quot;color&quot;:&quot;#000000&quot;},&quot;backgroundColorModified&quot;:false,&quot;backgroundColor&quot;:&quot;#FFFFFF&quot;,&quot;type&quot;:&quot;gather*&quot;,&quot;id&quot;:&quot;8&quot;,&quot;ts&quot;:1760275169609,&quot;cs&quot;:&quot;l2j0dH2bjN2hjF9nIGzL3Q==&quot;,&quot;size&quot;:{&quot;width&quot;:557.3779509186352,&quot;height&quot;:409.9841679790026}}" id="271" name="Google Shape;271;p31"/>
           <p:cNvPicPr preferRelativeResize="0"/>
           <p:nvPr/>
         </p:nvPicPr>
         <p:blipFill>
-          <a:blip r:embed="rId7">
+          <a:blip r:embed="rId3">
             <a:alphaModFix/>
           </a:blip>
           <a:stretch>
@@ -10082,8 +10912,8 @@
         </p:blipFill>
         <p:spPr>
           <a:xfrm>
-            <a:off x="4998751" y="1905551"/>
-            <a:ext cx="328625" cy="213905"/>
+            <a:off x="553150" y="806400"/>
+            <a:ext cx="5546225" cy="4079576"/>
           </a:xfrm>
           <a:prstGeom prst="rect">
             <a:avLst/>
@@ -10094,40 +10924,14 @@
           </a:ln>
         </p:spPr>
       </p:pic>
-      <p:cxnSp>
-        <p:nvCxnSpPr>
-          <p:cNvPr id="255" name="Google Shape;255;p31"/>
-          <p:cNvCxnSpPr/>
-          <p:nvPr/>
-        </p:nvCxnSpPr>
-        <p:spPr>
-          <a:xfrm>
-            <a:off x="5669131" y="2012488"/>
-            <a:ext cx="649500" cy="0"/>
-          </a:xfrm>
-          <a:prstGeom prst="straightConnector1">
-            <a:avLst/>
-          </a:prstGeom>
-          <a:noFill/>
-          <a:ln cap="flat" cmpd="sng" w="9525">
-            <a:solidFill>
-              <a:srgbClr val="595959"/>
-            </a:solidFill>
-            <a:prstDash val="solid"/>
-            <a:round/>
-            <a:headEnd len="sm" w="sm" type="none"/>
-            <a:tailEnd len="med" w="med" type="triangle"/>
-          </a:ln>
-        </p:spPr>
-      </p:cxnSp>
       <p:pic>
         <p:nvPicPr>
-          <p:cNvPr id="256" name="Google Shape;256;p31" title="[0,0,0,&quot;https://www.codecogs.com/eqnedit.php?latex=y_n#0&quot;]"/>
+          <p:cNvPr descr="{&quot;id&quot;:&quot;9&quot;,&quot;backgroundColor&quot;:&quot;#FFFFFF&quot;,&quot;code&quot;:&quot;\\begin{gather*}\n{\\text{Now}\\;\\text{let's}\\;\\text{add}\\;\\text{another}\\;\\text{layer}\\;\\text{in}\\;\\text{front..}}\\\\\n{x\\to A\\to y\\to B\\to u\\to f\\to v}\\\\\n{\\text{As}\\;\\text{before,}\\;x:\\,m\\times1,\\,A:\\,n\\times m.\\,B:\\,k\\times n}\\\\\n{\\text{From}\\;\\text{before,}}\\\\\n{\\diff{v}{B}=\\diff{v}{u}y^{T},\\diff{v}{y}=B^{T}\\diff{v}{u}}\\\\\n{\\text{And}}\\\\\n{\\diff{v}{A}=\\diff{v}{y}x^{T}}\\\\\n{\\text{We}\\;\\text{can}\\;\\text{think}\\;\\text{of}\\;\\text{this}\\;\\text{as}\\;\\text{a}\\;2\\,\\text{layer}\\;\\text{network,}\\;\\text{where}\\;\\text{the}\\;\\text{parameters}\\;\\text{of}\\;\\text{each}\\;\\text{layer}\\;\\text{are}\\;\\text{A}\\;\\text{and}\\;\\text{B}}\\\\\n{x\\,\\text{is}\\;\\text{the}\\;\\text{input}\\;\\text{to}\\;\\text{layer}\\;\\text{1,}\\;\\text{and}\\;y\\,\\text{is}\\;\\text{the}\\;\\text{output.}\\;\\text{}}\\\\\n{y\\,\\,\\text{is}\\;\\text{the}\\;\\text{input}\\;\\text{to}\\;\\text{layer}\\;\\text{2.}\\;\\text{Output}\\;\\text{of}\\;\\text{layer}\\;\\text{2},\\,u\\;\\text{goes}\\;\\text{into}\\;\\text{function}\\;f\\,\\text{that}\\;\\text{produces}\\;\\text{a}\\;\\text{scalar}\\;\\text{value}\\;v}\\\\\n{\\text{Layer}\\;\\text{2}\\;\\text{calculates}\\;\\text{the}\\;\\text{gradient}\\;\\text{of}\\;\\text{the}\\;\\text{final}\\;\\text{output}\\;v\\,\\text{wrt}\\;\\text{its}\\;\\text{parameters}\\;B}\\\\\n{\\text{It}\\;\\text{also}\\;\\text{calculates}\\;\\text{the}\\;\\text{gradient}\\;\\text{wrt}\\;\\text{its}\\;\\text{input,}\\;\\text{which}\\;\\text{is}\\;backpropagated\\,\\text{to}\\;\\text{the}\\;\\text{previous}\\;\\text{layer}}\\\\\n{\\text{which}\\;\\text{uses}\\;\\text{it}\\;\\text{to}\\;\\text{calculate}\\;\\text{the}\\;\\text{gradient}\\;\\text{wrt}\\;\\text{its}\\;\\text{parameters}\\;\\text{and}\\;\\text{input..}\\;\\text{}}\t\n\\end{gather*}&quot;,&quot;font&quot;:{&quot;family&quot;:&quot;Arial&quot;,&quot;color&quot;:&quot;#000000&quot;,&quot;size&quot;:10.5},&quot;type&quot;:&quot;gather*&quot;,&quot;aid&quot;:null,&quot;backgroundColorModified&quot;:false,&quot;ts&quot;:1760276974089,&quot;cs&quot;:&quot;w4DnoI+cLB2zQV5+266eWQ==&quot;,&quot;size&quot;:{&quot;width&quot;:677,&quot;height&quot;:313}}" id="272" name="Google Shape;272;p31"/>
           <p:cNvPicPr preferRelativeResize="0"/>
           <p:nvPr/>
         </p:nvPicPr>
         <p:blipFill>
-          <a:blip r:embed="rId8">
+          <a:blip r:embed="rId4">
             <a:alphaModFix/>
           </a:blip>
           <a:stretch>
@@ -10136,8 +10940,8 @@
         </p:blipFill>
         <p:spPr>
           <a:xfrm>
-            <a:off x="5822684" y="1708025"/>
-            <a:ext cx="285139" cy="213900"/>
+            <a:off x="4572000" y="2571750"/>
+            <a:ext cx="6448425" cy="2981325"/>
           </a:xfrm>
           <a:prstGeom prst="rect">
             <a:avLst/>
@@ -10148,810 +10952,6 @@
           </a:ln>
         </p:spPr>
       </p:pic>
-      <p:sp>
-        <p:nvSpPr>
-          <p:cNvPr id="257" name="Google Shape;257;p31"/>
-          <p:cNvSpPr/>
-          <p:nvPr/>
-        </p:nvSpPr>
-        <p:spPr>
-          <a:xfrm>
-            <a:off x="6348124" y="1489800"/>
-            <a:ext cx="717300" cy="1100100"/>
-          </a:xfrm>
-          <a:prstGeom prst="roundRect">
-            <a:avLst>
-              <a:gd fmla="val 9734" name="adj"/>
-            </a:avLst>
-          </a:prstGeom>
-          <a:solidFill>
-            <a:srgbClr val="EEEEEE"/>
-          </a:solidFill>
-          <a:ln cap="flat" cmpd="sng" w="9525">
-            <a:solidFill>
-              <a:srgbClr val="595959"/>
-            </a:solidFill>
-            <a:prstDash val="solid"/>
-            <a:round/>
-            <a:headEnd len="sm" w="sm" type="none"/>
-            <a:tailEnd len="sm" w="sm" type="none"/>
-          </a:ln>
-        </p:spPr>
-        <p:txBody>
-          <a:bodyPr anchorCtr="0" anchor="ctr" bIns="68575" lIns="68575" spcFirstLastPara="1" rIns="68575" wrap="square" tIns="68575">
-            <a:noAutofit/>
-          </a:bodyPr>
-          <a:lstStyle/>
-          <a:p>
-            <a:pPr indent="0" lvl="0" marL="0" marR="0" rtl="0" algn="ctr">
-              <a:lnSpc>
-                <a:spcPct val="100000"/>
-              </a:lnSpc>
-              <a:spcBef>
-                <a:spcPts val="0"/>
-              </a:spcBef>
-              <a:spcAft>
-                <a:spcPts val="0"/>
-              </a:spcAft>
-              <a:buClr>
-                <a:srgbClr val="000000"/>
-              </a:buClr>
-              <a:buSzPts val="1100"/>
-              <a:buFont typeface="Arial"/>
-              <a:buNone/>
-            </a:pPr>
-            <a:r>
-              <a:rPr lang="en" sz="1100"/>
-              <a:t>Loss function</a:t>
-            </a:r>
-            <a:endParaRPr sz="1100"/>
-          </a:p>
-        </p:txBody>
-      </p:sp>
-      <p:cxnSp>
-        <p:nvCxnSpPr>
-          <p:cNvPr id="258" name="Google Shape;258;p31"/>
-          <p:cNvCxnSpPr>
-            <a:endCxn id="257" idx="0"/>
-          </p:cNvCxnSpPr>
-          <p:nvPr/>
-        </p:nvCxnSpPr>
-        <p:spPr>
-          <a:xfrm>
-            <a:off x="6706774" y="1174800"/>
-            <a:ext cx="0" cy="315000"/>
-          </a:xfrm>
-          <a:prstGeom prst="straightConnector1">
-            <a:avLst/>
-          </a:prstGeom>
-          <a:noFill/>
-          <a:ln cap="flat" cmpd="sng" w="9525">
-            <a:solidFill>
-              <a:srgbClr val="595959"/>
-            </a:solidFill>
-            <a:prstDash val="solid"/>
-            <a:round/>
-            <a:headEnd len="sm" w="sm" type="none"/>
-            <a:tailEnd len="med" w="med" type="triangle"/>
-          </a:ln>
-        </p:spPr>
-      </p:cxnSp>
-      <p:sp>
-        <p:nvSpPr>
-          <p:cNvPr id="259" name="Google Shape;259;p31"/>
-          <p:cNvSpPr txBox="1"/>
-          <p:nvPr/>
-        </p:nvSpPr>
-        <p:spPr>
-          <a:xfrm>
-            <a:off x="6410225" y="866975"/>
-            <a:ext cx="593100" cy="307800"/>
-          </a:xfrm>
-          <a:prstGeom prst="rect">
-            <a:avLst/>
-          </a:prstGeom>
-          <a:noFill/>
-          <a:ln>
-            <a:noFill/>
-          </a:ln>
-        </p:spPr>
-        <p:txBody>
-          <a:bodyPr anchorCtr="0" anchor="t" bIns="68575" lIns="68575" spcFirstLastPara="1" rIns="68575" wrap="square" tIns="68575">
-            <a:spAutoFit/>
-          </a:bodyPr>
-          <a:lstStyle/>
-          <a:p>
-            <a:pPr indent="0" lvl="0" marL="0" marR="0" rtl="0" algn="l">
-              <a:lnSpc>
-                <a:spcPct val="100000"/>
-              </a:lnSpc>
-              <a:spcBef>
-                <a:spcPts val="0"/>
-              </a:spcBef>
-              <a:spcAft>
-                <a:spcPts val="0"/>
-              </a:spcAft>
-              <a:buClr>
-                <a:srgbClr val="000000"/>
-              </a:buClr>
-              <a:buSzPts val="1100"/>
-              <a:buFont typeface="Arial"/>
-              <a:buNone/>
-            </a:pPr>
-            <a:r>
-              <a:rPr b="1" lang="en" sz="1100"/>
-              <a:t>labels</a:t>
-            </a:r>
-            <a:endParaRPr b="1" i="0" sz="1100" u="none" cap="none" strike="noStrike">
-              <a:solidFill>
-                <a:srgbClr val="000000"/>
-              </a:solidFill>
-              <a:latin typeface="Arial"/>
-              <a:ea typeface="Arial"/>
-              <a:cs typeface="Arial"/>
-              <a:sym typeface="Arial"/>
-            </a:endParaRPr>
-          </a:p>
-        </p:txBody>
-      </p:sp>
-      <p:sp>
-        <p:nvSpPr>
-          <p:cNvPr id="260" name="Google Shape;260;p31"/>
-          <p:cNvSpPr txBox="1"/>
-          <p:nvPr/>
-        </p:nvSpPr>
-        <p:spPr>
-          <a:xfrm>
-            <a:off x="4170100" y="1979300"/>
-            <a:ext cx="412500" cy="461700"/>
-          </a:xfrm>
-          <a:prstGeom prst="rect">
-            <a:avLst/>
-          </a:prstGeom>
-          <a:noFill/>
-          <a:ln>
-            <a:noFill/>
-          </a:ln>
-        </p:spPr>
-        <p:txBody>
-          <a:bodyPr anchorCtr="0" anchor="t" bIns="91425" lIns="91425" spcFirstLastPara="1" rIns="91425" wrap="square" tIns="91425">
-            <a:spAutoFit/>
-          </a:bodyPr>
-          <a:lstStyle/>
-          <a:p>
-            <a:pPr indent="0" lvl="0" marL="0" rtl="0" algn="l">
-              <a:spcBef>
-                <a:spcPts val="0"/>
-              </a:spcBef>
-              <a:spcAft>
-                <a:spcPts val="0"/>
-              </a:spcAft>
-              <a:buNone/>
-            </a:pPr>
-            <a:r>
-              <a:rPr lang="en" sz="1800">
-                <a:solidFill>
-                  <a:schemeClr val="dk2"/>
-                </a:solidFill>
-              </a:rPr>
-              <a:t>…</a:t>
-            </a:r>
-            <a:endParaRPr sz="1800">
-              <a:solidFill>
-                <a:schemeClr val="dk2"/>
-              </a:solidFill>
-            </a:endParaRPr>
-          </a:p>
-        </p:txBody>
-      </p:sp>
-      <p:cxnSp>
-        <p:nvCxnSpPr>
-          <p:cNvPr id="261" name="Google Shape;261;p31"/>
-          <p:cNvCxnSpPr/>
-          <p:nvPr/>
-        </p:nvCxnSpPr>
-        <p:spPr>
-          <a:xfrm flipH="1" rot="10800000">
-            <a:off x="7065431" y="2007988"/>
-            <a:ext cx="309300" cy="9000"/>
-          </a:xfrm>
-          <a:prstGeom prst="straightConnector1">
-            <a:avLst/>
-          </a:prstGeom>
-          <a:noFill/>
-          <a:ln cap="flat" cmpd="sng" w="9525">
-            <a:solidFill>
-              <a:srgbClr val="595959"/>
-            </a:solidFill>
-            <a:prstDash val="solid"/>
-            <a:round/>
-            <a:headEnd len="sm" w="sm" type="none"/>
-            <a:tailEnd len="med" w="med" type="triangle"/>
-          </a:ln>
-        </p:spPr>
-      </p:cxnSp>
-      <p:sp>
-        <p:nvSpPr>
-          <p:cNvPr id="262" name="Google Shape;262;p31"/>
-          <p:cNvSpPr txBox="1"/>
-          <p:nvPr/>
-        </p:nvSpPr>
-        <p:spPr>
-          <a:xfrm>
-            <a:off x="7374725" y="1858600"/>
-            <a:ext cx="593100" cy="307800"/>
-          </a:xfrm>
-          <a:prstGeom prst="rect">
-            <a:avLst/>
-          </a:prstGeom>
-          <a:noFill/>
-          <a:ln>
-            <a:noFill/>
-          </a:ln>
-        </p:spPr>
-        <p:txBody>
-          <a:bodyPr anchorCtr="0" anchor="t" bIns="68575" lIns="68575" spcFirstLastPara="1" rIns="68575" wrap="square" tIns="68575">
-            <a:spAutoFit/>
-          </a:bodyPr>
-          <a:lstStyle/>
-          <a:p>
-            <a:pPr indent="0" lvl="0" marL="0" marR="0" rtl="0" algn="l">
-              <a:lnSpc>
-                <a:spcPct val="100000"/>
-              </a:lnSpc>
-              <a:spcBef>
-                <a:spcPts val="0"/>
-              </a:spcBef>
-              <a:spcAft>
-                <a:spcPts val="0"/>
-              </a:spcAft>
-              <a:buClr>
-                <a:srgbClr val="000000"/>
-              </a:buClr>
-              <a:buSzPts val="1100"/>
-              <a:buFont typeface="Arial"/>
-              <a:buNone/>
-            </a:pPr>
-            <a:r>
-              <a:rPr b="1" lang="en" sz="1100"/>
-              <a:t>Error</a:t>
-            </a:r>
-            <a:endParaRPr b="1" i="0" sz="1100" u="none" cap="none" strike="noStrike">
-              <a:solidFill>
-                <a:srgbClr val="000000"/>
-              </a:solidFill>
-              <a:latin typeface="Arial"/>
-              <a:ea typeface="Arial"/>
-              <a:cs typeface="Arial"/>
-              <a:sym typeface="Arial"/>
-            </a:endParaRPr>
-          </a:p>
-        </p:txBody>
-      </p:sp>
-      <p:sp>
-        <p:nvSpPr>
-          <p:cNvPr id="263" name="Google Shape;263;p31"/>
-          <p:cNvSpPr/>
-          <p:nvPr/>
-        </p:nvSpPr>
-        <p:spPr>
-          <a:xfrm>
-            <a:off x="3046900" y="1151000"/>
-            <a:ext cx="1244400" cy="235800"/>
-          </a:xfrm>
-          <a:prstGeom prst="rightArrow">
-            <a:avLst>
-              <a:gd fmla="val 50000" name="adj1"/>
-              <a:gd fmla="val 50000" name="adj2"/>
-            </a:avLst>
-          </a:prstGeom>
-          <a:solidFill>
-            <a:schemeClr val="lt2"/>
-          </a:solidFill>
-          <a:ln cap="flat" cmpd="sng" w="9525">
-            <a:solidFill>
-              <a:schemeClr val="dk2"/>
-            </a:solidFill>
-            <a:prstDash val="solid"/>
-            <a:round/>
-            <a:headEnd len="sm" w="sm" type="none"/>
-            <a:tailEnd len="sm" w="sm" type="none"/>
-          </a:ln>
-        </p:spPr>
-        <p:txBody>
-          <a:bodyPr anchorCtr="0" anchor="ctr" bIns="91425" lIns="91425" spcFirstLastPara="1" rIns="91425" wrap="square" tIns="91425">
-            <a:noAutofit/>
-          </a:bodyPr>
-          <a:lstStyle/>
-          <a:p>
-            <a:pPr indent="0" lvl="0" marL="0" rtl="0" algn="ctr">
-              <a:spcBef>
-                <a:spcPts val="0"/>
-              </a:spcBef>
-              <a:spcAft>
-                <a:spcPts val="0"/>
-              </a:spcAft>
-              <a:buNone/>
-            </a:pPr>
-            <a:r>
-              <a:t/>
-            </a:r>
-            <a:endParaRPr/>
-          </a:p>
-        </p:txBody>
-      </p:sp>
-      <p:sp>
-        <p:nvSpPr>
-          <p:cNvPr id="264" name="Google Shape;264;p31"/>
-          <p:cNvSpPr txBox="1"/>
-          <p:nvPr/>
-        </p:nvSpPr>
-        <p:spPr>
-          <a:xfrm>
-            <a:off x="2611096" y="774575"/>
-            <a:ext cx="2346300" cy="400200"/>
-          </a:xfrm>
-          <a:prstGeom prst="rect">
-            <a:avLst/>
-          </a:prstGeom>
-          <a:noFill/>
-          <a:ln>
-            <a:noFill/>
-          </a:ln>
-        </p:spPr>
-        <p:txBody>
-          <a:bodyPr anchorCtr="0" anchor="t" bIns="91425" lIns="91425" spcFirstLastPara="1" rIns="91425" wrap="square" tIns="91425">
-            <a:spAutoFit/>
-          </a:bodyPr>
-          <a:lstStyle/>
-          <a:p>
-            <a:pPr indent="0" lvl="0" marL="0" rtl="0" algn="l">
-              <a:spcBef>
-                <a:spcPts val="0"/>
-              </a:spcBef>
-              <a:spcAft>
-                <a:spcPts val="0"/>
-              </a:spcAft>
-              <a:buNone/>
-            </a:pPr>
-            <a:r>
-              <a:rPr lang="en">
-                <a:solidFill>
-                  <a:schemeClr val="dk2"/>
-                </a:solidFill>
-              </a:rPr>
-              <a:t>Forward Pass or Inference</a:t>
-            </a:r>
-            <a:endParaRPr>
-              <a:solidFill>
-                <a:schemeClr val="dk2"/>
-              </a:solidFill>
-            </a:endParaRPr>
-          </a:p>
-        </p:txBody>
-      </p:sp>
-      <p:cxnSp>
-        <p:nvCxnSpPr>
-          <p:cNvPr id="265" name="Google Shape;265;p31"/>
-          <p:cNvCxnSpPr>
-            <a:stCxn id="262" idx="2"/>
-            <a:endCxn id="253" idx="2"/>
-          </p:cNvCxnSpPr>
-          <p:nvPr/>
-        </p:nvCxnSpPr>
-        <p:spPr>
-          <a:xfrm rot="5400000">
-            <a:off x="6226475" y="1144900"/>
-            <a:ext cx="423300" cy="2466300"/>
-          </a:xfrm>
-          <a:prstGeom prst="bentConnector3">
-            <a:avLst>
-              <a:gd fmla="val 156288" name="adj1"/>
-            </a:avLst>
-          </a:prstGeom>
-          <a:noFill/>
-          <a:ln cap="flat" cmpd="sng" w="9525">
-            <a:solidFill>
-              <a:schemeClr val="dk2"/>
-            </a:solidFill>
-            <a:prstDash val="solid"/>
-            <a:round/>
-            <a:headEnd len="med" w="med" type="none"/>
-            <a:tailEnd len="med" w="med" type="triangle"/>
-          </a:ln>
-        </p:spPr>
-      </p:cxnSp>
-      <p:cxnSp>
-        <p:nvCxnSpPr>
-          <p:cNvPr id="266" name="Google Shape;266;p31"/>
-          <p:cNvCxnSpPr>
-            <a:stCxn id="262" idx="2"/>
-            <a:endCxn id="243" idx="2"/>
-          </p:cNvCxnSpPr>
-          <p:nvPr/>
-        </p:nvCxnSpPr>
-        <p:spPr>
-          <a:xfrm rot="5400000">
-            <a:off x="4633925" y="-447350"/>
-            <a:ext cx="423600" cy="5651100"/>
-          </a:xfrm>
-          <a:prstGeom prst="bentConnector3">
-            <a:avLst>
-              <a:gd fmla="val 156191" name="adj1"/>
-            </a:avLst>
-          </a:prstGeom>
-          <a:noFill/>
-          <a:ln cap="flat" cmpd="sng" w="9525">
-            <a:solidFill>
-              <a:schemeClr val="dk2"/>
-            </a:solidFill>
-            <a:prstDash val="solid"/>
-            <a:round/>
-            <a:headEnd len="med" w="med" type="none"/>
-            <a:tailEnd len="med" w="med" type="triangle"/>
-          </a:ln>
-        </p:spPr>
-      </p:cxnSp>
-      <p:sp>
-        <p:nvSpPr>
-          <p:cNvPr id="267" name="Google Shape;267;p31"/>
-          <p:cNvSpPr txBox="1"/>
-          <p:nvPr/>
-        </p:nvSpPr>
-        <p:spPr>
-          <a:xfrm>
-            <a:off x="3398846" y="2904925"/>
-            <a:ext cx="2346300" cy="400200"/>
-          </a:xfrm>
-          <a:prstGeom prst="rect">
-            <a:avLst/>
-          </a:prstGeom>
-          <a:noFill/>
-          <a:ln>
-            <a:noFill/>
-          </a:ln>
-        </p:spPr>
-        <p:txBody>
-          <a:bodyPr anchorCtr="0" anchor="t" bIns="91425" lIns="91425" spcFirstLastPara="1" rIns="91425" wrap="square" tIns="91425">
-            <a:spAutoFit/>
-          </a:bodyPr>
-          <a:lstStyle/>
-          <a:p>
-            <a:pPr indent="0" lvl="0" marL="0" rtl="0" algn="l">
-              <a:spcBef>
-                <a:spcPts val="0"/>
-              </a:spcBef>
-              <a:spcAft>
-                <a:spcPts val="0"/>
-              </a:spcAft>
-              <a:buNone/>
-            </a:pPr>
-            <a:r>
-              <a:rPr lang="en">
-                <a:solidFill>
-                  <a:schemeClr val="dk2"/>
-                </a:solidFill>
-              </a:rPr>
-              <a:t>Backward pass or training</a:t>
-            </a:r>
-            <a:endParaRPr>
-              <a:solidFill>
-                <a:schemeClr val="dk2"/>
-              </a:solidFill>
-            </a:endParaRPr>
-          </a:p>
-        </p:txBody>
-      </p:sp>
-      <p:sp>
-        <p:nvSpPr>
-          <p:cNvPr id="268" name="Google Shape;268;p31"/>
-          <p:cNvSpPr txBox="1"/>
-          <p:nvPr/>
-        </p:nvSpPr>
-        <p:spPr>
-          <a:xfrm>
-            <a:off x="150574" y="3444325"/>
-            <a:ext cx="4881600" cy="1200600"/>
-          </a:xfrm>
-          <a:prstGeom prst="rect">
-            <a:avLst/>
-          </a:prstGeom>
-          <a:noFill/>
-          <a:ln>
-            <a:noFill/>
-          </a:ln>
-        </p:spPr>
-        <p:txBody>
-          <a:bodyPr anchorCtr="0" anchor="t" bIns="91425" lIns="91425" spcFirstLastPara="1" rIns="91425" wrap="square" tIns="91425">
-            <a:spAutoFit/>
-          </a:bodyPr>
-          <a:lstStyle/>
-          <a:p>
-            <a:pPr indent="-298450" lvl="0" marL="457200" rtl="0" algn="l">
-              <a:spcBef>
-                <a:spcPts val="0"/>
-              </a:spcBef>
-              <a:spcAft>
-                <a:spcPts val="0"/>
-              </a:spcAft>
-              <a:buClr>
-                <a:schemeClr val="dk2"/>
-              </a:buClr>
-              <a:buSzPts val="1100"/>
-              <a:buChar char="●"/>
-            </a:pPr>
-            <a:r>
-              <a:rPr lang="en" sz="1100">
-                <a:solidFill>
-                  <a:schemeClr val="dk2"/>
-                </a:solidFill>
-              </a:rPr>
-              <a:t>Points on a 2D space</a:t>
-            </a:r>
-            <a:endParaRPr sz="1100">
-              <a:solidFill>
-                <a:schemeClr val="dk2"/>
-              </a:solidFill>
-            </a:endParaRPr>
-          </a:p>
-          <a:p>
-            <a:pPr indent="-298450" lvl="0" marL="457200" rtl="0" algn="l">
-              <a:spcBef>
-                <a:spcPts val="0"/>
-              </a:spcBef>
-              <a:spcAft>
-                <a:spcPts val="0"/>
-              </a:spcAft>
-              <a:buClr>
-                <a:schemeClr val="dk2"/>
-              </a:buClr>
-              <a:buSzPts val="1100"/>
-              <a:buChar char="●"/>
-            </a:pPr>
-            <a:r>
-              <a:rPr lang="en" sz="1100">
-                <a:solidFill>
-                  <a:schemeClr val="dk2"/>
-                </a:solidFill>
-              </a:rPr>
-              <a:t>Sequence of embeddings</a:t>
-            </a:r>
-            <a:endParaRPr sz="1100">
-              <a:solidFill>
-                <a:schemeClr val="dk2"/>
-              </a:solidFill>
-            </a:endParaRPr>
-          </a:p>
-          <a:p>
-            <a:pPr indent="-298450" lvl="0" marL="457200" rtl="0" algn="l">
-              <a:spcBef>
-                <a:spcPts val="0"/>
-              </a:spcBef>
-              <a:spcAft>
-                <a:spcPts val="0"/>
-              </a:spcAft>
-              <a:buClr>
-                <a:schemeClr val="dk2"/>
-              </a:buClr>
-              <a:buSzPts val="1100"/>
-              <a:buChar char="●"/>
-            </a:pPr>
-            <a:r>
-              <a:rPr lang="en" sz="1100">
-                <a:solidFill>
-                  <a:schemeClr val="dk2"/>
-                </a:solidFill>
-              </a:rPr>
-              <a:t>Fourier transform coefficients of an audio sample</a:t>
-            </a:r>
-            <a:endParaRPr sz="1100">
-              <a:solidFill>
-                <a:schemeClr val="dk2"/>
-              </a:solidFill>
-            </a:endParaRPr>
-          </a:p>
-          <a:p>
-            <a:pPr indent="-298450" lvl="0" marL="457200" rtl="0" algn="l">
-              <a:spcBef>
-                <a:spcPts val="0"/>
-              </a:spcBef>
-              <a:spcAft>
-                <a:spcPts val="0"/>
-              </a:spcAft>
-              <a:buClr>
-                <a:schemeClr val="dk2"/>
-              </a:buClr>
-              <a:buSzPts val="1100"/>
-              <a:buChar char="●"/>
-            </a:pPr>
-            <a:r>
-              <a:rPr lang="en" sz="1100">
-                <a:solidFill>
-                  <a:schemeClr val="dk2"/>
-                </a:solidFill>
-              </a:rPr>
-              <a:t>Images</a:t>
-            </a:r>
-            <a:endParaRPr sz="1100">
-              <a:solidFill>
-                <a:schemeClr val="dk2"/>
-              </a:solidFill>
-            </a:endParaRPr>
-          </a:p>
-          <a:p>
-            <a:pPr indent="-298450" lvl="0" marL="457200" rtl="0" algn="l">
-              <a:spcBef>
-                <a:spcPts val="0"/>
-              </a:spcBef>
-              <a:spcAft>
-                <a:spcPts val="0"/>
-              </a:spcAft>
-              <a:buClr>
-                <a:schemeClr val="dk2"/>
-              </a:buClr>
-              <a:buSzPts val="1100"/>
-              <a:buChar char="●"/>
-            </a:pPr>
-            <a:r>
-              <a:rPr lang="en" sz="1100">
-                <a:solidFill>
-                  <a:schemeClr val="dk2"/>
-                </a:solidFill>
-              </a:rPr>
-              <a:t>Image patches</a:t>
-            </a:r>
-            <a:endParaRPr sz="1100">
-              <a:solidFill>
-                <a:schemeClr val="dk2"/>
-              </a:solidFill>
-            </a:endParaRPr>
-          </a:p>
-          <a:p>
-            <a:pPr indent="-298450" lvl="0" marL="457200" rtl="0" algn="l">
-              <a:spcBef>
-                <a:spcPts val="0"/>
-              </a:spcBef>
-              <a:spcAft>
-                <a:spcPts val="0"/>
-              </a:spcAft>
-              <a:buClr>
-                <a:schemeClr val="dk2"/>
-              </a:buClr>
-              <a:buSzPts val="1100"/>
-              <a:buChar char="●"/>
-            </a:pPr>
-            <a:r>
-              <a:rPr lang="en" sz="1100">
-                <a:solidFill>
-                  <a:schemeClr val="dk2"/>
-                </a:solidFill>
-              </a:rPr>
-              <a:t>Video frames..</a:t>
-            </a:r>
-            <a:endParaRPr sz="1100">
-              <a:solidFill>
-                <a:schemeClr val="dk2"/>
-              </a:solidFill>
-            </a:endParaRPr>
-          </a:p>
-        </p:txBody>
-      </p:sp>
-      <p:cxnSp>
-        <p:nvCxnSpPr>
-          <p:cNvPr id="269" name="Google Shape;269;p31"/>
-          <p:cNvCxnSpPr/>
-          <p:nvPr/>
-        </p:nvCxnSpPr>
-        <p:spPr>
-          <a:xfrm rot="10800000">
-            <a:off x="773839" y="2297405"/>
-            <a:ext cx="352800" cy="1126800"/>
-          </a:xfrm>
-          <a:prstGeom prst="straightConnector1">
-            <a:avLst/>
-          </a:prstGeom>
-          <a:noFill/>
-          <a:ln cap="flat" cmpd="sng" w="9525">
-            <a:solidFill>
-              <a:srgbClr val="595959"/>
-            </a:solidFill>
-            <a:prstDash val="solid"/>
-            <a:round/>
-            <a:headEnd len="sm" w="sm" type="none"/>
-            <a:tailEnd len="med" w="med" type="triangle"/>
-          </a:ln>
-        </p:spPr>
-      </p:cxnSp>
-      <p:sp>
-        <p:nvSpPr>
-          <p:cNvPr id="270" name="Google Shape;270;p31"/>
-          <p:cNvSpPr txBox="1"/>
-          <p:nvPr/>
-        </p:nvSpPr>
-        <p:spPr>
-          <a:xfrm>
-            <a:off x="3963849" y="3504625"/>
-            <a:ext cx="4881600" cy="523200"/>
-          </a:xfrm>
-          <a:prstGeom prst="rect">
-            <a:avLst/>
-          </a:prstGeom>
-          <a:noFill/>
-          <a:ln>
-            <a:noFill/>
-          </a:ln>
-        </p:spPr>
-        <p:txBody>
-          <a:bodyPr anchorCtr="0" anchor="t" bIns="91425" lIns="91425" spcFirstLastPara="1" rIns="91425" wrap="square" tIns="91425">
-            <a:spAutoFit/>
-          </a:bodyPr>
-          <a:lstStyle/>
-          <a:p>
-            <a:pPr indent="0" lvl="0" marL="0" rtl="0" algn="l">
-              <a:spcBef>
-                <a:spcPts val="0"/>
-              </a:spcBef>
-              <a:spcAft>
-                <a:spcPts val="0"/>
-              </a:spcAft>
-              <a:buNone/>
-            </a:pPr>
-            <a:r>
-              <a:rPr b="1" lang="en" sz="1100">
-                <a:solidFill>
-                  <a:schemeClr val="dk2"/>
-                </a:solidFill>
-              </a:rPr>
-              <a:t>Key question: </a:t>
-            </a:r>
-            <a:r>
-              <a:rPr lang="en" sz="1100">
-                <a:solidFill>
-                  <a:schemeClr val="dk2"/>
-                </a:solidFill>
-              </a:rPr>
-              <a:t>How do I adjust the weights to reduce error? </a:t>
-            </a:r>
-            <a:endParaRPr sz="1100">
-              <a:solidFill>
-                <a:schemeClr val="dk2"/>
-              </a:solidFill>
-            </a:endParaRPr>
-          </a:p>
-          <a:p>
-            <a:pPr indent="0" lvl="0" marL="0" rtl="0" algn="l">
-              <a:spcBef>
-                <a:spcPts val="0"/>
-              </a:spcBef>
-              <a:spcAft>
-                <a:spcPts val="0"/>
-              </a:spcAft>
-              <a:buNone/>
-            </a:pPr>
-            <a:r>
-              <a:rPr b="1" lang="en" sz="1100">
-                <a:solidFill>
-                  <a:schemeClr val="dk2"/>
-                </a:solidFill>
-              </a:rPr>
-              <a:t>Answer:</a:t>
-            </a:r>
-            <a:r>
-              <a:rPr lang="en" sz="1100">
-                <a:solidFill>
-                  <a:schemeClr val="dk2"/>
-                </a:solidFill>
-              </a:rPr>
-              <a:t> Backpropagation!</a:t>
-            </a:r>
-            <a:endParaRPr sz="1100">
-              <a:solidFill>
-                <a:schemeClr val="dk2"/>
-              </a:solidFill>
-            </a:endParaRPr>
-          </a:p>
-        </p:txBody>
-      </p:sp>
     </p:spTree>
   </p:cSld>
   <p:clrMapOvr>
@@ -13161,7 +13161,7 @@
       </p:sp>
       <p:pic>
         <p:nvPicPr>
-          <p:cNvPr descr="{&quot;backgroundColor&quot;:&quot;#FFFFFF&quot;,&quot;aid&quot;:null,&quot;id&quot;:&quot;19&quot;,&quot;backgroundColorModified&quot;:false,&quot;type&quot;:&quot;lalign*&quot;,&quot;font&quot;:{&quot;size&quot;:12,&quot;color&quot;:&quot;#000000&quot;,&quot;family&quot;:&quot;Arial&quot;},&quot;code&quot;:&quot;\\begin{lalign*}\n&amp;{}\\\\\n&amp;{y_{1}=a_{11}x_{1}+a_{12}x_{2}+a_{13}x_{3}}\\\\\n&amp;{y_{2}=a_{21}x_{1}+a_{22}x_{2}+a_{23}x_{3}}\\\\\n&amp;{\\boldsymbol{y_{2\\times1}=A_{2\\times3}x_{3\\times1}}\\,}\\\\\n&amp;{\\pdf{y_{i}}{x_{j}}=a_{ij}}\\\\\n&amp;{\\text{So:}}\\\\\n&amp;{\\pdf{\\mathbf{y}}{\\boldsymbol{x}}=\\begin{pmatrix}\n{\\pdf{y_{1}}{x_{1}}}&amp;{\\pdf{y_{2}}{x_{1}}}\\\\\n{\\pdf{y_{1}}{x_{2}}}&amp;{\\pdf{y_{2}}{x_{2}}}\\\\\n{\\pdf{y_{1}}{x_{3}}}&amp;{\\pdf{y_{2}}{x_{3}}}\\\\\n\\end{pmatrix}=\\begin{pmatrix}\n{a_{11}}&amp;{a_{21}}\\\\\n{a_{12}}&amp;{a_{22}}\\\\\n{a_{13}}&amp;{a_{23}}\\\\\n\\end{pmatrix}=A^{T}}\t\n\\end{lalign*}&quot;,&quot;ts&quot;:1759696641698,&quot;cs&quot;:&quot;bBLcIshkfgSVARCjYAWgYQ==&quot;,&quot;size&quot;:{&quot;width&quot;:341.25000000000006,&quot;height&quot;:241.25}}" id="113" name="Google Shape;113;p18"/>
+          <p:cNvPr descr="{&quot;type&quot;:&quot;lalign*&quot;,&quot;id&quot;:&quot;19&quot;,&quot;font&quot;:{&quot;size&quot;:12,&quot;color&quot;:&quot;#000000&quot;,&quot;family&quot;:&quot;Arial&quot;},&quot;aid&quot;:null,&quot;backgroundColor&quot;:&quot;#FFFFFF&quot;,&quot;code&quot;:&quot;\\begin{lalign*}\n&amp;{\\text{Example:}}\\\\\n&amp;{y_{1}=a_{11}x_{1}+a_{12}x_{2}+a_{13}x_{3}}\\\\\n&amp;{y_{2}=a_{21}x_{1}+a_{22}x_{2}+a_{23}x_{3}}\\\\\n&amp;{\\boldsymbol{y_{2\\times1}=A_{2\\times3}x_{3\\times1}}\\,}\\\\\n&amp;{\\pdf{y_{i}}{x_{j}}=a_{ij}}\\\\\n&amp;{\\text{So:}}\\\\\n&amp;{\\pdf{\\mathbf{y}}{\\boldsymbol{x}}=\\begin{pmatrix}\n{\\pdf{y_{1}}{x_{1}}}&amp;{\\pdf{y_{2}}{x_{1}}}\\\\\n{\\pdf{y_{1}}{x_{2}}}&amp;{\\pdf{y_{2}}{x_{2}}}\\\\\n{\\pdf{y_{1}}{x_{3}}}&amp;{\\pdf{y_{2}}{x_{3}}}\\\\\n\\end{pmatrix}=\\begin{pmatrix}\n{a_{11}}&amp;{a_{21}}\\\\\n{a_{12}}&amp;{a_{22}}\\\\\n{a_{13}}&amp;{a_{23}}\\\\\n\\end{pmatrix}=A^{T}}\t\n\\end{lalign*}&quot;,&quot;backgroundColorModified&quot;:false,&quot;ts&quot;:1762488964678,&quot;cs&quot;:&quot;/CMfnMxKTQJxKPh5loJ/YA==&quot;,&quot;size&quot;:{&quot;width&quot;:341.24999999999994,&quot;height&quot;:267.75}}" id="113" name="Google Shape;113;p18"/>
           <p:cNvPicPr preferRelativeResize="0"/>
           <p:nvPr/>
         </p:nvPicPr>
@@ -13175,8 +13175,36 @@
         </p:blipFill>
         <p:spPr>
           <a:xfrm>
-            <a:off x="395329" y="961797"/>
-            <a:ext cx="3250406" cy="2297906"/>
+            <a:off x="3670777" y="983997"/>
+            <a:ext cx="3924999" cy="3079626"/>
+          </a:xfrm>
+          <a:prstGeom prst="rect">
+            <a:avLst/>
+          </a:prstGeom>
+          <a:noFill/>
+          <a:ln>
+            <a:noFill/>
+          </a:ln>
+        </p:spPr>
+      </p:pic>
+      <p:pic>
+        <p:nvPicPr>
+          <p:cNvPr descr="{&quot;backgroundColorModified&quot;:false,&quot;backgroundColor&quot;:&quot;#FFFFFF&quot;,&quot;aid&quot;:null,&quot;font&quot;:{&quot;family&quot;:&quot;Arial&quot;,&quot;size&quot;:12,&quot;color&quot;:&quot;#000000&quot;},&quot;code&quot;:&quot;\\begin{lalign*}\n&amp;{\\text{In}\\;\\text{denominator}\\;\\text{notation,}}\\\\\n&amp;{\\left[\\pdf{\\mathbf{y}}{\\mathbf{x}}\\right]_{ij}=\\pdf{y_{j}}{x_{i}}}\\\\\n&amp;{\\text{In}\\;\\text{numerator}\\;\\text{notation,}}\\\\\n&amp;{\\left[\\pdf{\\mathbf{y}}{\\mathbf{x}}\\right]_{ij}=\\pdf{y_{i}}{x_{j}}}\\\\\n&amp;{}\t\n\\end{lalign*}&quot;,&quot;type&quot;:&quot;lalign*&quot;,&quot;id&quot;:&quot;19&quot;,&quot;ts&quot;:1762488912203,&quot;cs&quot;:&quot;CkNS3vcbFvO3QmwARsKGmg==&quot;,&quot;size&quot;:{&quot;width&quot;:203.5,&quot;height&quot;:150.66666666666666}}" id="114" name="Google Shape;114;p18"/>
+          <p:cNvPicPr preferRelativeResize="0"/>
+          <p:nvPr/>
+        </p:nvPicPr>
+        <p:blipFill>
+          <a:blip r:embed="rId4">
+            <a:alphaModFix/>
+          </a:blip>
+          <a:stretch>
+            <a:fillRect/>
+          </a:stretch>
+        </p:blipFill>
+        <p:spPr>
+          <a:xfrm>
+            <a:off x="415627" y="983998"/>
+            <a:ext cx="2441899" cy="1807950"/>
           </a:xfrm>
           <a:prstGeom prst="rect">
             <a:avLst/>
@@ -13200,7 +13228,7 @@
   <p:cSld>
     <p:spTree>
       <p:nvGrpSpPr>
-        <p:cNvPr id="117" name="Shape 117"/>
+        <p:cNvPr id="118" name="Shape 118"/>
         <p:cNvGrpSpPr/>
         <p:nvPr/>
       </p:nvGrpSpPr>
@@ -13214,7 +13242,7 @@
       </p:grpSpPr>
       <p:sp>
         <p:nvSpPr>
-          <p:cNvPr id="118" name="Google Shape;118;p19"/>
+          <p:cNvPr id="119" name="Google Shape;119;p19"/>
           <p:cNvSpPr txBox="1"/>
           <p:nvPr>
             <p:ph idx="4294967295" type="title"/>
@@ -13254,7 +13282,7 @@
       </p:sp>
       <p:pic>
         <p:nvPicPr>
-          <p:cNvPr descr="{&quot;backgroundColorModified&quot;:false,&quot;aid&quot;:null,&quot;backgroundColor&quot;:&quot;#FFFFFF&quot;,&quot;font&quot;:{&quot;family&quot;:&quot;Arial&quot;,&quot;size&quot;:7.5,&quot;color&quot;:&quot;#000000&quot;},&quot;type&quot;:&quot;gather*&quot;,&quot;code&quot;:&quot;\\begin{gather*}\n{\\text{In}\\;\\text{1D,}\\;\\text{if}\\;x\\to y\\to z,}\\\\\n{\\diff{z}{x}=\\diff{z}{y}\\diff{y}{x}=\\diff{y}{x}\\diff{z}{y}}\\\\\n{\\text{What}\\;\\text{if}\\;x,y,z\\;\\text{are}\\;\\text{vectors?}}\\\\\n{\\text{Usually}\\;\\text{I}\\;\\text{denote}\\;\\text{vectors}\\;\\text{in}\\;\\text{boldface}\\;\\text{or}\\;\\text{with}\\;\\text{an}\\;\\text{arrow}\\;\\text{above,}}\\\\\n{\\text{but}\\;\\text{I'll}\\;\\text{jus}\\text{t}\\;\\text{use}\\;\\text{plainface}\\;\\text{here..}}\\\\\n{\\text{Let}\\;y=Ax,\\,y:m\\times1,\\,A:m\\times n,x:n\\times1\\,}\\\\\n{z=By,\\,z:k\\times1,B:k\\times m}\\\\\n{\\text{We}\\;\\text{know}\\;\\text{that}\\;\\diff{z}{x}\\,\\text{should}\\;\\text{be}\\;n\\times k\\,\\left(\\text{denominator}\\;\\text{notation}\\right)}\\\\\n{\\text{Let's}\\;\\text{consider}\\;\\text{the}\\;ij^{th}\\text{element}\\;\\text{of}\\;\\diff{z}{x}}\\\\\n{\\left[\\diff{z}{x}\\right]_{ij}=\\diff{z_{j}}{x_{i}}}\\\\\n{z_{j\\,}\\text{is}\\;\\text{the}\\;j^{th}\\,\\text{row}\\;\\text{of}\\;\\text{B}\\;\\text{multiplied}\\;\\text{with}\\;y}\\\\\n{z_{j}=\\sum_{u=1}^{m}B_{ju}y_{u}}\\\\\n{y_{u}\\;\\text{is}\\;\\text{the}\\,u^{th}\\;\\text{row}\\;\\text{of}\\;\\text{A}\\;\\text{multiplied}\\;\\text{with}\\;x}\\\\\n{y_{u}=\\sum_{v=1}^{n}A_{uv}yx_{v}}\\\\\n{\\text{So,}\\;\\text{}}\\\\\n{z_{j}=\\sum_{u=1}^{m}B_{ju}\\sum_{v=1}^{n}A_{uv}x_{v}}\t\n\\end{gather*}&quot;,&quot;id&quot;:&quot;1&quot;,&quot;ts&quot;:1760013042156,&quot;cs&quot;:&quot;1izw6XvnV7aVPEK53ei9yQ==&quot;,&quot;size&quot;:{&quot;width&quot;:304.6666666666667,&quot;height&quot;:364.6666666666667}}" id="119" name="Google Shape;119;p19"/>
+          <p:cNvPr descr="{&quot;backgroundColor&quot;:&quot;#FFFFFF&quot;,&quot;aid&quot;:null,&quot;font&quot;:{&quot;color&quot;:&quot;#000000&quot;,&quot;size&quot;:9,&quot;family&quot;:&quot;Arial&quot;},&quot;backgroundColorModified&quot;:false,&quot;code&quot;:&quot;\\begin{gather*}\n{\\text{In}\\;\\text{1D,}\\;\\text{if}\\;x\\to y\\to z,}\\\\\n{\\diff{z}{x}=\\diff{z}{y}\\diff{y}{x}=\\diff{y}{x}\\diff{z}{y}}\\\\\n{\\text{Example}}\\\\\n{y=\\sin\\left(x\\right),\\,\\diff{y}{x}=\\cos\\left(x\\right)}\\\\\n{z=\\log_{}\\left(y\\right),\\,\\diff{z}{y}=\\frac{1}{y}=\\frac{1}{\\sin\\left(x\\right)}}\\\\\n{\\diff{z}{y}=\\frac{1}{\\sin\\left(x\\right)}\\cos\\left(x\\right)=\\cos\\left(x\\right)\\frac{1}{\\sin\\left(x\\right)}}\\\\\n{}\\\\\n{\\text{What}\\;\\text{if}\\;x,y,z\\;\\text{are}\\;\\text{vectors?}}\\\\\n{\\text{Usually}\\;\\text{vectors}\\,\\text{are}\\;\\text{denoted}\\;\\text{in}\\;\\text{boldface}\\;\\left(\\boldsymbol{x}\\right)\\text{or}\\;\\text{with}\\;\\text{an}\\;\\text{arrow}\\;\\text{above}\\;\\text{(}\\vec{x}\\text{),}}\\\\\n{\\text{but}\\;\\text{I'll}\\;\\text{jus}\\text{t}\\;\\text{use}\\;\\text{plainface}\\;\\text{here..}}\\\\\n{\\text{Let}\\;y=Ax,\\,y:m\\times1,\\,A:m\\times n,x:n\\times1\\,}\\\\\n{z=By,\\,z:k\\times1,B:k\\times m}\\\\\n{\\text{We}\\;\\text{know}\\;\\text{that}\\;\\diff{z}{x}\\,\\text{should}\\;\\text{be}\\;n\\times k\\,\\left(\\text{denominator}\\;\\text{notation}\\right)}\\\\\n{\\text{Let's}\\;\\text{consider}\\;\\text{the}\\;ij^{th}\\text{element}\\;\\text{of}\\;\\diff{z}{x}}\\\\\n{\\left[\\diff{z}{x}\\right]_{ij}=\\diff{z_{j}}{x_{i}}}\t\n\\end{gather*}&quot;,&quot;type&quot;:&quot;gather*&quot;,&quot;id&quot;:&quot;1&quot;,&quot;ts&quot;:1761862747697,&quot;cs&quot;:&quot;J7XvPgH8V8mav32AdK1sJA==&quot;,&quot;size&quot;:{&quot;width&quot;:430.6666666666667,&quot;height&quot;:393.6666666666667}}" id="120" name="Google Shape;120;p19"/>
           <p:cNvPicPr preferRelativeResize="0"/>
           <p:nvPr/>
         </p:nvPicPr>
@@ -13268,8 +13296,8 @@
         </p:blipFill>
         <p:spPr>
           <a:xfrm>
-            <a:off x="56075" y="729950"/>
-            <a:ext cx="3658751" cy="4379301"/>
+            <a:off x="391757" y="949172"/>
+            <a:ext cx="4102100" cy="3749675"/>
           </a:xfrm>
           <a:prstGeom prst="rect">
             <a:avLst/>
@@ -13282,7 +13310,7 @@
       </p:pic>
       <p:pic>
         <p:nvPicPr>
-          <p:cNvPr descr="{&quot;font&quot;:{&quot;color&quot;:&quot;#000000&quot;,&quot;size&quot;:9,&quot;family&quot;:&quot;Arial&quot;},&quot;aid&quot;:null,&quot;backgroundColor&quot;:&quot;#FFFFFF&quot;,&quot;code&quot;:&quot;\\begin{gather*}\n{\\text{We}\\;\\text{are}\\;\\text{only}\\;\\text{interested}\\;\\text{in}\\;\\text{derivative}\\;\\text{wrt}\\;x_{i}.\\,\\diff{x_{k}}{x_{i}}=1,\\,\\text{when}\\;i=k,\\,0\\,\\text{otherwise}}\\\\\n{\\text{So,}}\\\\\n{\\diff{z_{j}}{x_{i}}=\\sum_{u=1}^{m}B_{ju}A_{ui}=\\left(BA\\right)_{ji}=\\left(BA\\right)_{ij}^{T}}\\\\\n{\\text{So}}\\\\\n{\\text{}\\diff{z}{x}=\\left(BA\\right)^{T}=A^{T}B^{T}}\\\\\n{\\text{Since}\\,\\diff{y}{x}=A^{T},\\,\\,\\diff{z}{y}=B^{T},}\\\\\n{\\diff{z}{x}=\\diff{y}{x}\\diff{z}{y}\\neq\\diff{z}{y}\\diff{y}{x}!}\\\\\n{\\text{This}\\;\\text{can}\\;\\text{be}\\;\\text{extended..}\\text{so,}\\;\\text{if}\\;\\text{we}\\;\\text{have}}\\\\\n{x\\to y\\to z\\to w}\\\\\n{w=Cz,\\,z=By,\\,y=Ax}\\\\\n{\\diff{w}{x}=A^{T}B^{T}C^{T}=\\diff{y}{x}\\diff{z}{y}\\diff{w}{z}}\t\n\\end{gather*}&quot;,&quot;backgroundColorModified&quot;:false,&quot;type&quot;:&quot;gather*&quot;,&quot;id&quot;:&quot;2&quot;,&quot;ts&quot;:1760047949497,&quot;cs&quot;:&quot;pfm1ORnRdeXPL5Pyt4jBVg==&quot;,&quot;size&quot;:{&quot;width&quot;:474,&quot;height&quot;:308}}" id="120" name="Google Shape;120;p19"/>
+          <p:cNvPr descr="{&quot;id&quot;:&quot;2&quot;,&quot;font&quot;:{&quot;color&quot;:&quot;#000000&quot;,&quot;family&quot;:&quot;Arial&quot;,&quot;size&quot;:9},&quot;type&quot;:&quot;gather*&quot;,&quot;code&quot;:&quot;\\begin{gather*}\n{z_{j\\,}\\text{is}\\;\\text{the}\\;j^{th}\\,\\text{row}\\;\\text{of}\\;\\text{B}\\;\\text{multiplied}\\;\\text{with}\\;y}\\\\\n{z_{j}=\\sum_{u=1}^{m}B_{ju}y_{u}}\\\\\n{y_{u}\\;\\text{is}\\;\\text{the}\\,u^{th}\\;\\text{row}\\;\\text{of}\\;\\text{A}\\;\\text{multiplied}\\;\\text{with}\\;x}\\\\\n{y_{u}=\\sum_{v=1}^{n}A_{uv}yx_{v}}\\\\\n{\\text{So,}\\;\\text{}}\\\\\n{z_{j}=\\sum_{u=1}^{m}B_{ju}\\sum_{v=1}^{n}A_{uv}x_{v}}\\\\\n{}\\\\\n{\\text{We}\\;\\text{are}\\;\\text{only}\\;\\text{interested}\\;\\text{in}\\;\\text{derivative}\\;\\text{wrt}\\;x_{i}.\\,\\diff{x_{v}}{x_{i}}=1,\\,\\text{when}\\;v=i,\\,0\\,\\text{otherwise}}\\\\\n{\\text{So,}}\\\\\n{\\diff{z_{j}}{x_{i}}=\\sum_{u=1}^{m}B_{ju}A_{ui}=\\left(BA\\right)_{ji}=\\left(BA\\right)_{ij}^{T}}\\\\\n{\\text{So}}\\\\\n{\\text{}\\diff{z}{x}=\\left(BA\\right)^{T}=A^{T}B^{T}}\\\\\n{\\text{Since}\\,\\diff{y}{x}=A^{T},\\,\\,\\diff{z}{y}=B^{T},}\\\\\n{\\diff{z}{x}=\\diff{y}{x}\\diff{z}{y}\\neq\\diff{z}{y}\\diff{y}{x}!}\\\\\n{\\text{This}\\;\\text{can}\\;\\text{be}\\;\\text{extended..}\\text{so,}\\;\\text{if}\\;\\text{we}\\;\\text{have}}\\\\\n{x\\to y\\to z\\to w}\\\\\n{w=Cz,\\,z=By,\\,y=Ax}\\\\\n{\\diff{w}{x}=A^{T}B^{T}C^{T}=\\diff{y}{x}\\diff{z}{y}\\diff{w}{z}}\t\n\\end{gather*}&quot;,&quot;backgroundColorModified&quot;:false,&quot;backgroundColor&quot;:&quot;#FFFFFF&quot;,&quot;aid&quot;:null,&quot;ts&quot;:1761863046328,&quot;cs&quot;:&quot;VhWPwsJUeLM+35t5VpnkqA==&quot;,&quot;size&quot;:{&quot;width&quot;:473.50000000000006,&quot;height&quot;:517.5}}" id="121" name="Google Shape;121;p19"/>
           <p:cNvPicPr preferRelativeResize="0"/>
           <p:nvPr/>
         </p:nvPicPr>
@@ -13296,8 +13324,8 @@
         </p:blipFill>
         <p:spPr>
           <a:xfrm>
-            <a:off x="4451735" y="753138"/>
-            <a:ext cx="4514850" cy="2933700"/>
+            <a:off x="4496241" y="107150"/>
+            <a:ext cx="4510088" cy="4929188"/>
           </a:xfrm>
           <a:prstGeom prst="rect">
             <a:avLst/>
@@ -13310,13 +13338,13 @@
       </p:pic>
       <p:sp>
         <p:nvSpPr>
-          <p:cNvPr id="121" name="Google Shape;121;p19"/>
+          <p:cNvPr id="122" name="Google Shape;122;p19"/>
           <p:cNvSpPr txBox="1"/>
           <p:nvPr/>
         </p:nvSpPr>
         <p:spPr>
           <a:xfrm>
-            <a:off x="2731100" y="4639325"/>
+            <a:off x="1234825" y="4698850"/>
             <a:ext cx="1571400" cy="369300"/>
           </a:xfrm>
           <a:prstGeom prst="rect">
@@ -13371,7 +13399,7 @@
   <p:cSld>
     <p:spTree>
       <p:nvGrpSpPr>
-        <p:cNvPr id="125" name="Shape 125"/>
+        <p:cNvPr id="126" name="Shape 126"/>
         <p:cNvGrpSpPr/>
         <p:nvPr/>
       </p:nvGrpSpPr>
@@ -13385,7 +13413,7 @@
       </p:grpSpPr>
       <p:sp>
         <p:nvSpPr>
-          <p:cNvPr id="126" name="Google Shape;126;p20"/>
+          <p:cNvPr id="127" name="Google Shape;127;p20"/>
           <p:cNvSpPr txBox="1"/>
           <p:nvPr>
             <p:ph idx="4294967295" type="title"/>
@@ -13425,7 +13453,7 @@
       </p:sp>
       <p:pic>
         <p:nvPicPr>
-          <p:cNvPr descr="{&quot;type&quot;:&quot;gather*&quot;,&quot;font&quot;:{&quot;size&quot;:9,&quot;family&quot;:&quot;Arial&quot;,&quot;color&quot;:&quot;#000000&quot;},&quot;backgroundColor&quot;:&quot;#FFFFFF&quot;,&quot;backgroundColorModified&quot;:false,&quot;code&quot;:&quot;\\begin{gather*}\n{x\\to y\\to z\\to w}\\\\\n{w=Cz,\\,z=By,\\,y=Ax}\\\\\n{\\diff{w}{x}=A^{T}B^{T}C^{T}=\\diff{y}{x}\\diff{z}{y}\\diff{w}{z}=\\diff{y}{x}\\diff{w}{y}}\t\n\\end{gather*}&quot;,&quot;aid&quot;:null,&quot;id&quot;:&quot;2&quot;,&quot;ts&quot;:1760212585837,&quot;cs&quot;:&quot;uo+7hTnm9PDjJZZCDW5ICQ==&quot;,&quot;size&quot;:{&quot;width&quot;:247.59999999999994,&quot;height&quot;:65.19999999999999}}" id="127" name="Google Shape;127;p20"/>
+          <p:cNvPr descr="{&quot;type&quot;:&quot;gather*&quot;,&quot;font&quot;:{&quot;size&quot;:9,&quot;family&quot;:&quot;Arial&quot;,&quot;color&quot;:&quot;#000000&quot;},&quot;backgroundColor&quot;:&quot;#FFFFFF&quot;,&quot;backgroundColorModified&quot;:false,&quot;code&quot;:&quot;\\begin{gather*}\n{x\\to y\\to z\\to w}\\\\\n{w=Cz,\\,z=By,\\,y=Ax}\\\\\n{\\diff{w}{x}=A^{T}B^{T}C^{T}=\\diff{y}{x}\\diff{z}{y}\\diff{w}{z}=\\diff{y}{x}\\diff{w}{y}}\t\n\\end{gather*}&quot;,&quot;aid&quot;:null,&quot;id&quot;:&quot;2&quot;,&quot;ts&quot;:1760212585837,&quot;cs&quot;:&quot;uo+7hTnm9PDjJZZCDW5ICQ==&quot;,&quot;size&quot;:{&quot;width&quot;:247.59999999999994,&quot;height&quot;:65.19999999999999}}" id="128" name="Google Shape;128;p20"/>
           <p:cNvPicPr preferRelativeResize="0"/>
           <p:nvPr/>
         </p:nvPicPr>
@@ -13453,7 +13481,7 @@
       </p:pic>
       <p:sp>
         <p:nvSpPr>
-          <p:cNvPr id="128" name="Google Shape;128;p20"/>
+          <p:cNvPr id="129" name="Google Shape;129;p20"/>
           <p:cNvSpPr txBox="1"/>
           <p:nvPr/>
         </p:nvSpPr>
@@ -13503,7 +13531,7 @@
       </p:sp>
       <p:pic>
         <p:nvPicPr>
-          <p:cNvPr id="129" name="Google Shape;129;p20"/>
+          <p:cNvPr id="130" name="Google Shape;130;p20"/>
           <p:cNvPicPr preferRelativeResize="0"/>
           <p:nvPr/>
         </p:nvPicPr>
@@ -13531,7 +13559,7 @@
       </p:pic>
       <p:sp>
         <p:nvSpPr>
-          <p:cNvPr id="130" name="Google Shape;130;p20"/>
+          <p:cNvPr id="131" name="Google Shape;131;p20"/>
           <p:cNvSpPr txBox="1"/>
           <p:nvPr/>
         </p:nvSpPr>
@@ -13581,9 +13609,9 @@
       </p:sp>
       <p:cxnSp>
         <p:nvCxnSpPr>
-          <p:cNvPr id="131" name="Google Shape;131;p20"/>
+          <p:cNvPr id="132" name="Google Shape;132;p20"/>
           <p:cNvCxnSpPr>
-            <a:stCxn id="130" idx="0"/>
+            <a:stCxn id="131" idx="0"/>
           </p:cNvCxnSpPr>
           <p:nvPr/>
         </p:nvCxnSpPr>
@@ -13609,7 +13637,7 @@
       </p:cxnSp>
       <p:cxnSp>
         <p:nvCxnSpPr>
-          <p:cNvPr id="132" name="Google Shape;132;p20"/>
+          <p:cNvPr id="133" name="Google Shape;133;p20"/>
           <p:cNvCxnSpPr/>
           <p:nvPr/>
         </p:nvCxnSpPr>
@@ -13635,7 +13663,7 @@
       </p:cxnSp>
       <p:sp>
         <p:nvSpPr>
-          <p:cNvPr id="133" name="Google Shape;133;p20"/>
+          <p:cNvPr id="134" name="Google Shape;134;p20"/>
           <p:cNvSpPr txBox="1"/>
           <p:nvPr/>
         </p:nvSpPr>
@@ -13685,7 +13713,7 @@
       </p:sp>
       <p:cxnSp>
         <p:nvCxnSpPr>
-          <p:cNvPr id="134" name="Google Shape;134;p20"/>
+          <p:cNvPr id="135" name="Google Shape;135;p20"/>
           <p:cNvCxnSpPr/>
           <p:nvPr/>
         </p:nvCxnSpPr>
@@ -13711,7 +13739,7 @@
       </p:cxnSp>
       <p:pic>
         <p:nvPicPr>
-          <p:cNvPr descr="{&quot;code&quot;:&quot;\\begin{gather*}\n{}\\\\\n{w=Cz,\\,z=By}\\\\\n{\\diff{w}{y}=B^{T}C^{T}=\\diff{z}{y}\\diff{w}{z}}\t\n\\end{gather*}&quot;,&quot;backgroundColorModified&quot;:false,&quot;id&quot;:&quot;2&quot;,&quot;backgroundColor&quot;:&quot;#FFFFFF&quot;,&quot;type&quot;:&quot;gather*&quot;,&quot;font&quot;:{&quot;color&quot;:&quot;#000000&quot;,&quot;family&quot;:&quot;Arial&quot;,&quot;size&quot;:9},&quot;aid&quot;:null,&quot;ts&quot;:1760214530460,&quot;cs&quot;:&quot;Hbh5j4CPBqfYcjEzzmnzuw==&quot;,&quot;size&quot;:{&quot;width&quot;:142.00000000000003,&quot;height&quot;:49.666666666666664}}" id="135" name="Google Shape;135;p20"/>
+          <p:cNvPr descr="{&quot;code&quot;:&quot;\\begin{gather*}\n{}\\\\\n{w=Cz,\\,z=By}\\\\\n{\\diff{w}{y}=B^{T}C^{T}=\\diff{z}{y}\\diff{w}{z}}\t\n\\end{gather*}&quot;,&quot;backgroundColorModified&quot;:false,&quot;id&quot;:&quot;2&quot;,&quot;backgroundColor&quot;:&quot;#FFFFFF&quot;,&quot;type&quot;:&quot;gather*&quot;,&quot;font&quot;:{&quot;color&quot;:&quot;#000000&quot;,&quot;family&quot;:&quot;Arial&quot;,&quot;size&quot;:9},&quot;aid&quot;:null,&quot;ts&quot;:1760214530460,&quot;cs&quot;:&quot;Hbh5j4CPBqfYcjEzzmnzuw==&quot;,&quot;size&quot;:{&quot;width&quot;:142.00000000000003,&quot;height&quot;:49.666666666666664}}" id="136" name="Google Shape;136;p20"/>
           <p:cNvPicPr preferRelativeResize="0"/>
           <p:nvPr/>
         </p:nvPicPr>
@@ -13739,7 +13767,7 @@
       </p:pic>
       <p:sp>
         <p:nvSpPr>
-          <p:cNvPr id="136" name="Google Shape;136;p20"/>
+          <p:cNvPr id="137" name="Google Shape;137;p20"/>
           <p:cNvSpPr txBox="1"/>
           <p:nvPr/>
         </p:nvSpPr>
@@ -13789,7 +13817,7 @@
       </p:sp>
       <p:sp>
         <p:nvSpPr>
-          <p:cNvPr id="137" name="Google Shape;137;p20"/>
+          <p:cNvPr id="138" name="Google Shape;138;p20"/>
           <p:cNvSpPr txBox="1"/>
           <p:nvPr/>
         </p:nvSpPr>
@@ -13839,7 +13867,7 @@
       </p:sp>
       <p:sp>
         <p:nvSpPr>
-          <p:cNvPr id="138" name="Google Shape;138;p20"/>
+          <p:cNvPr id="139" name="Google Shape;139;p20"/>
           <p:cNvSpPr txBox="1"/>
           <p:nvPr/>
         </p:nvSpPr>
@@ -13897,7 +13925,7 @@
       </p:sp>
       <p:cxnSp>
         <p:nvCxnSpPr>
-          <p:cNvPr id="139" name="Google Shape;139;p20"/>
+          <p:cNvPr id="140" name="Google Shape;140;p20"/>
           <p:cNvCxnSpPr/>
           <p:nvPr/>
         </p:nvCxnSpPr>
@@ -13923,7 +13951,7 @@
       </p:cxnSp>
       <p:cxnSp>
         <p:nvCxnSpPr>
-          <p:cNvPr id="140" name="Google Shape;140;p20"/>
+          <p:cNvPr id="141" name="Google Shape;141;p20"/>
           <p:cNvCxnSpPr/>
           <p:nvPr/>
         </p:nvCxnSpPr>
@@ -13949,7 +13977,7 @@
       </p:cxnSp>
       <p:cxnSp>
         <p:nvCxnSpPr>
-          <p:cNvPr id="141" name="Google Shape;141;p20"/>
+          <p:cNvPr id="142" name="Google Shape;142;p20"/>
           <p:cNvCxnSpPr/>
           <p:nvPr/>
         </p:nvCxnSpPr>
@@ -13975,7 +14003,7 @@
       </p:cxnSp>
       <p:pic>
         <p:nvPicPr>
-          <p:cNvPr descr="{&quot;aid&quot;:null,&quot;id&quot;:&quot;2&quot;,&quot;code&quot;:&quot;\\begin{gather*}\n{x\\to y\\to z\\to w}\\\\\n{w=Cz,\\,z=By,\\,y=Ax}\\\\\n{w=C\\left(B\\left(Ax\\right)\\right)}\t\n\\end{gather*}&quot;,&quot;type&quot;:&quot;gather*&quot;,&quot;backgroundColorModified&quot;:false,&quot;backgroundColor&quot;:&quot;#FFFFFF&quot;,&quot;font&quot;:{&quot;family&quot;:&quot;Arial&quot;,&quot;color&quot;:&quot;#000000&quot;,&quot;size&quot;:9},&quot;ts&quot;:1760214739561,&quot;cs&quot;:&quot;jfdMBI+jlJoBAjTmbnzP8A==&quot;,&quot;size&quot;:{&quot;width&quot;:149.66666666666666,&quot;height&quot;:47.333333333333336}}" id="142" name="Google Shape;142;p20"/>
+          <p:cNvPr descr="{&quot;aid&quot;:null,&quot;id&quot;:&quot;2&quot;,&quot;code&quot;:&quot;\\begin{gather*}\n{x\\to y\\to z\\to w}\\\\\n{w=Cz,\\,z=By,\\,y=Ax}\\\\\n{w=C\\left(B\\left(Ax\\right)\\right)}\t\n\\end{gather*}&quot;,&quot;type&quot;:&quot;gather*&quot;,&quot;backgroundColorModified&quot;:false,&quot;backgroundColor&quot;:&quot;#FFFFFF&quot;,&quot;font&quot;:{&quot;family&quot;:&quot;Arial&quot;,&quot;color&quot;:&quot;#000000&quot;,&quot;size&quot;:9},&quot;ts&quot;:1760214739561,&quot;cs&quot;:&quot;jfdMBI+jlJoBAjTmbnzP8A==&quot;,&quot;size&quot;:{&quot;width&quot;:149.66666666666666,&quot;height&quot;:47.333333333333336}}" id="143" name="Google Shape;143;p20"/>
           <p:cNvPicPr preferRelativeResize="0"/>
           <p:nvPr/>
         </p:nvPicPr>
@@ -14003,7 +14031,7 @@
       </p:pic>
       <p:sp>
         <p:nvSpPr>
-          <p:cNvPr id="143" name="Google Shape;143;p20"/>
+          <p:cNvPr id="144" name="Google Shape;144;p20"/>
           <p:cNvSpPr txBox="1"/>
           <p:nvPr/>
         </p:nvSpPr>
@@ -14061,7 +14089,7 @@
       </p:sp>
       <p:sp>
         <p:nvSpPr>
-          <p:cNvPr id="144" name="Google Shape;144;p20"/>
+          <p:cNvPr id="145" name="Google Shape;145;p20"/>
           <p:cNvSpPr/>
           <p:nvPr/>
         </p:nvSpPr>
@@ -14111,7 +14139,7 @@
       </p:sp>
       <p:sp>
         <p:nvSpPr>
-          <p:cNvPr id="145" name="Google Shape;145;p20"/>
+          <p:cNvPr id="146" name="Google Shape;146;p20"/>
           <p:cNvSpPr/>
           <p:nvPr/>
         </p:nvSpPr>
@@ -14161,7 +14189,7 @@
       </p:sp>
       <p:sp>
         <p:nvSpPr>
-          <p:cNvPr id="146" name="Google Shape;146;p20"/>
+          <p:cNvPr id="147" name="Google Shape;147;p20"/>
           <p:cNvSpPr txBox="1"/>
           <p:nvPr/>
         </p:nvSpPr>
@@ -14211,9 +14239,9 @@
       </p:sp>
       <p:cxnSp>
         <p:nvCxnSpPr>
-          <p:cNvPr id="147" name="Google Shape;147;p20"/>
+          <p:cNvPr id="148" name="Google Shape;148;p20"/>
           <p:cNvCxnSpPr>
-            <a:endCxn id="145" idx="1"/>
+            <a:endCxn id="146" idx="1"/>
           </p:cNvCxnSpPr>
           <p:nvPr/>
         </p:nvCxnSpPr>
@@ -14221,6 +14249,34 @@
           <a:xfrm flipH="1" rot="10800000">
             <a:off x="6070900" y="1061750"/>
             <a:ext cx="395100" cy="174000"/>
+          </a:xfrm>
+          <a:prstGeom prst="straightConnector1">
+            <a:avLst/>
+          </a:prstGeom>
+          <a:noFill/>
+          <a:ln cap="flat" cmpd="sng" w="9525">
+            <a:solidFill>
+              <a:schemeClr val="dk2"/>
+            </a:solidFill>
+            <a:prstDash val="solid"/>
+            <a:round/>
+            <a:headEnd len="med" w="med" type="none"/>
+            <a:tailEnd len="med" w="med" type="triangle"/>
+          </a:ln>
+        </p:spPr>
+      </p:cxnSp>
+      <p:cxnSp>
+        <p:nvCxnSpPr>
+          <p:cNvPr id="149" name="Google Shape;149;p20"/>
+          <p:cNvCxnSpPr>
+            <a:stCxn id="144" idx="1"/>
+          </p:cNvCxnSpPr>
+          <p:nvPr/>
+        </p:nvCxnSpPr>
+        <p:spPr>
+          <a:xfrm rot="10800000">
+            <a:off x="3434550" y="2228250"/>
+            <a:ext cx="451800" cy="474000"/>
           </a:xfrm>
           <a:prstGeom prst="straightConnector1">
             <a:avLst/>
@@ -14250,7 +14306,7 @@
   <p:cSld>
     <p:spTree>
       <p:nvGrpSpPr>
-        <p:cNvPr id="151" name="Shape 151"/>
+        <p:cNvPr id="153" name="Shape 153"/>
         <p:cNvGrpSpPr/>
         <p:nvPr/>
       </p:nvGrpSpPr>
@@ -14264,7 +14320,7 @@
       </p:grpSpPr>
       <p:sp>
         <p:nvSpPr>
-          <p:cNvPr id="152" name="Google Shape;152;p21"/>
+          <p:cNvPr id="154" name="Google Shape;154;p21"/>
           <p:cNvSpPr txBox="1"/>
           <p:nvPr>
             <p:ph idx="4294967295" type="title"/>
@@ -14304,7 +14360,7 @@
       </p:sp>
       <p:pic>
         <p:nvPicPr>
-          <p:cNvPr descr="{&quot;id&quot;:&quot;3&quot;,&quot;backgroundColorModified&quot;:false,&quot;font&quot;:{&quot;family&quot;:&quot;Arial&quot;,&quot;size&quot;:12,&quot;color&quot;:&quot;#000000&quot;},&quot;code&quot;:&quot;\\begin{gather*}\n{\\text{Example}\\;\\text{2}}\\\\\n{y=x^{T}A\\,\\,\\,x:n\\times1,\\,A:n\\times m,\\,y:1\\times m\\,}\\\\\n{\\diff{y}{x}:\\,m\\times n\\,\\text{matrix}\\;\\text{in}\\;\\text{denominator}\\;\\text{notation}}\\\\\n{y_{k}=\\sum_{i=1}^{n}x_{i}A_{ik}}\\\\\n{\\pdf{y_{k}}{x_{i}}=A_{ik}}\\\\\n{\\text{So,}\\;\\diff{y}{x}=A}\t\n\\end{gather*}&quot;,&quot;aid&quot;:null,&quot;backgroundColor&quot;:&quot;#FFFFFF&quot;,&quot;type&quot;:&quot;gather*&quot;,&quot;ts&quot;:1760059085957,&quot;cs&quot;:&quot;gh9SqQGpk/5MtrX5xnpwaQ==&quot;,&quot;size&quot;:{&quot;width&quot;:358,&quot;height&quot;:239.66666666666666}}" id="153" name="Google Shape;153;p21"/>
+          <p:cNvPr descr="{&quot;id&quot;:&quot;3&quot;,&quot;backgroundColorModified&quot;:false,&quot;font&quot;:{&quot;family&quot;:&quot;Arial&quot;,&quot;size&quot;:12,&quot;color&quot;:&quot;#000000&quot;},&quot;code&quot;:&quot;\\begin{gather*}\n{\\text{Example}\\;\\text{2}}\\\\\n{y=x^{T}A\\,\\,\\,x:n\\times1,\\,A:n\\times m,\\,y:1\\times m\\,}\\\\\n{\\diff{y}{x}:\\,m\\times n\\,\\text{matrix}\\;\\text{in}\\;\\text{denominator}\\;\\text{notation}}\\\\\n{y_{k}=\\sum_{i=1}^{n}x_{i}A_{ik}}\\\\\n{\\pdf{y_{k}}{x_{i}}=A_{ik}}\\\\\n{\\text{So,}\\;\\diff{y}{x}=A}\t\n\\end{gather*}&quot;,&quot;aid&quot;:null,&quot;backgroundColor&quot;:&quot;#FFFFFF&quot;,&quot;type&quot;:&quot;gather*&quot;,&quot;ts&quot;:1760059085957,&quot;cs&quot;:&quot;gh9SqQGpk/5MtrX5xnpwaQ==&quot;,&quot;size&quot;:{&quot;width&quot;:358,&quot;height&quot;:239.66666666666666}}" id="155" name="Google Shape;155;p21"/>
           <p:cNvPicPr preferRelativeResize="0"/>
           <p:nvPr/>
         </p:nvPicPr>
@@ -14332,7 +14388,7 @@
       </p:pic>
       <p:pic>
         <p:nvPicPr>
-          <p:cNvPr descr="{&quot;code&quot;:&quot;\\begin{gather*}\n{\\text{Example}\\;\\text{3:}}\\\\\n{y=x^{T}Ax\\,\\,A:\\,m\\times m,\\,x:m\\times1,\\,y:\\,1\\times1}\\\\\n{\\text{This}\\;\\text{is}\\;\\text{called}\\;\\text{the}\\;\\text{\&quot;quadratic}\\;\\text{form\&quot;}}\\\\\n{\\text{Let}\\;\\text{m=2}}\\\\\n{y=\\begin{pmatrix}\n{x_{1}}&amp;{x_{2}}\\\\\n\\end{pmatrix}\\begin{pmatrix}\n{a_{11}}&amp;{a_{12}}\\\\\n{a_{21}}&amp;{a_{22}}\\\\\n\\end{pmatrix}\\begin{pmatrix}\n{x_{1}}\\\\\n{x_{2}}\\\\\n\\end{pmatrix}}\\\\\n{y=x_{1}\\left(a_{11}x_{1}+a_{12}x_{2}\\right)+x_{2}\\left(a_{21}x_{1}+a_{22}x_{2}\\right)}\\\\\n{=a_{11}x_{1}^{2}+a_{12}x_{1}x_{2}+a_{21}x_{2}x_{1}+a_{22}x_{2}^{2}}\\\\\n{\\pdf{y}{x_{1}}=2a_{11}x_{1}+a_{12}x_{2}+a_{21}x_{2}=\\left(2a_{11},a_{12}+a_{21}\\right)\\left(x_{1},x_{2}\\right)^{T}}\\\\\n{\\pdf{y}{x_{2}}=2a_{22}x_{2}+a_{21}x_{1}+a_{12}x_{1}=\\left(2a_{22},a_{12}+a_{21}\\right)\\left(x_{1},x_{2}\\right)^{T}}\\\\\n{\\text{combining}\\;\\text{the}\\;\\text{two:}}\\\\\n{\\begin{pmatrix}\n{\\pdf{y}{x_{1}}}\\\\\n{\\pdf{y}{x_{2}}}\\\\\n\\end{pmatrix}=\\begin{pmatrix}\n{2a_{11}}&amp;{a_{12}+a_{21}}\\\\\n{a_{21}+a_{21}}&amp;{2a_{22}}\\\\\n\\end{pmatrix}\\begin{pmatrix}\n{x_{1}}\\\\\n{x_{2}}\\\\\n\\end{pmatrix}}\\\\\n{=\\begin{pmatrix}\n{a_{11}}&amp;{a_{12}}\\\\\n{a_{21}}&amp;{a_{22}}\\\\\n\\end{pmatrix}\\begin{pmatrix}\n{x_{1}}\\\\\n{x_{2}}\\\\\n\\end{pmatrix}+\\begin{pmatrix}\n{a_{11}}&amp;{a_{21}}\\\\\n{a_{12}}&amp;{a_{22}}\\\\\n\\end{pmatrix}\\begin{pmatrix}\n{x_{1}}\\\\\n{x_{2}}\\\\\n\\end{pmatrix}}\\\\\n{=\\left(A+A^{T}\\right)x}\\\\\n{\\text{This}\\;\\text{result}\\;\\text{holds}\\;\\text{in}\\;\\text{dimensions}\\;\\text{&gt;}\\;\\text{2}\\;\\text{also}}\\\\\n{\\text{Note:}\\;\\text{because}\\;y\\;\\text{is}\\;\\text{a}\\;\\text{scalar,}\\;\\left(x^{T}Ax\\right)^{T}=x^{T}Ax\\,}\t\n\\end{gather*}&quot;,&quot;backgroundColor&quot;:&quot;#FFFFFF&quot;,&quot;type&quot;:&quot;gather*&quot;,&quot;aid&quot;:null,&quot;font&quot;:{&quot;color&quot;:&quot;#000000&quot;,&quot;size&quot;:12,&quot;family&quot;:&quot;Arial&quot;},&quot;backgroundColorModified&quot;:false,&quot;id&quot;:&quot;4&quot;,&quot;ts&quot;:1760222612896,&quot;cs&quot;:&quot;ZL8a2rl/1OzKWGEm7olKDA==&quot;,&quot;size&quot;:{&quot;width&quot;:472.49999999999994,&quot;height&quot;:519}}" id="154" name="Google Shape;154;p21"/>
+          <p:cNvPr descr="{&quot;id&quot;:&quot;4&quot;,&quot;type&quot;:&quot;gather*&quot;,&quot;font&quot;:{&quot;size&quot;:11.5,&quot;family&quot;:&quot;Arial&quot;,&quot;color&quot;:&quot;#000000&quot;},&quot;backgroundColorModified&quot;:false,&quot;aid&quot;:null,&quot;code&quot;:&quot;\\begin{gather*}\n{\\text{Example}\\;\\text{3:}}\\\\\n{y=x^{T}Ax\\,\\,A:\\,m\\times m,\\,x:m\\times1,\\,y:\\,1\\times1}\\\\\n{\\text{This}\\;\\text{is}\\;\\text{called}\\;\\text{the}\\;\\text{\&quot;quadratic}\\;\\text{form\&quot;}}\\\\\n{\\text{Let}\\;\\text{m=2}}\\\\\n{y=\\begin{pmatrix}\n{x_{1}}&amp;{x_{2}}\\\\\n\\end{pmatrix}\\begin{pmatrix}\n{a_{11}}&amp;{a_{12}}\\\\\n{a_{21}}&amp;{a_{22}}\\\\\n\\end{pmatrix}\\begin{pmatrix}\n{x_{1}}\\\\\n{x_{2}}\\\\\n\\end{pmatrix}}\\\\\n{y=x_{1}\\left(a_{11}x_{1}+a_{12}x_{2}\\right)+x_{2}\\left(a_{21}x_{1}+a_{22}x_{2}\\right)}\\\\\n{=a_{11}x_{1}^{2}+a_{12}x_{1}x_{2}+a_{21}x_{2}x_{1}+a_{22}x_{2}^{2}}\\\\\n{\\pdf{y}{x_{1}}=2a_{11}x_{1}+a_{12}x_{2}+a_{21}x_{2}=\\left(2a_{11},a_{12}+a_{21}\\right)\\left(x_{1},x_{2}\\right)^{T}}\\\\\n{\\pdf{y}{x_{2}}=2a_{22}x_{2}+a_{21}x_{1}+a_{12}x_{1}=\\left(2a_{22},a_{12}+a_{21}\\right)\\left(x_{1},x_{2}\\right)^{T}}\\\\\n{\\text{combining}\\;\\text{the}\\;\\text{two:}}\\\\\n{\\diff{y}{x}=\\begin{pmatrix}\n{\\pdf{y}{x_{1}}}\\\\\n{\\pdf{y}{x_{2}}}\\\\\n\\end{pmatrix}=\\begin{pmatrix}\n{2a_{11}}&amp;{a_{12}+a_{21}}\\\\\n{a_{21}+a_{21}}&amp;{2a_{22}}\\\\\n\\end{pmatrix}\\begin{pmatrix}\n{x_{1}}\\\\\n{x_{2}}\\\\\n\\end{pmatrix}}\\\\\n{=\\begin{pmatrix}\n{a_{11}}&amp;{a_{12}}\\\\\n{a_{21}}&amp;{a_{22}}\\\\\n\\end{pmatrix}\\begin{pmatrix}\n{x_{1}}\\\\\n{x_{2}}\\\\\n\\end{pmatrix}+\\begin{pmatrix}\n{a_{11}}&amp;{a_{21}}\\\\\n{a_{12}}&amp;{a_{22}}\\\\\n\\end{pmatrix}\\begin{pmatrix}\n{x_{1}}\\\\\n{x_{2}}\\\\\n\\end{pmatrix}}\\\\\n{=\\left(A+A^{T}\\right)x}\\\\\n{\\text{This}\\;\\text{result}\\;\\text{holds}\\;\\text{in}\\;\\text{dimensions}\\;\\text{&gt;}\\;\\text{2}\\;\\text{also}}\\\\\n{\\text{Note:}\\;\\text{because}\\;y\\;\\text{is}\\;\\text{a}\\;\\text{scalar,}\\;\\left(x^{T}Ax\\right)^{T}=x^{T}Ax\\,}\t\n\\end{gather*}&quot;,&quot;backgroundColor&quot;:&quot;#FFFFFF&quot;,&quot;ts&quot;:1761863845612,&quot;cs&quot;:&quot;8NTszws8sKqEA6XeGu/13Q==&quot;,&quot;size&quot;:{&quot;width&quot;:452.99999999999994,&quot;height&quot;:497.5}}" id="156" name="Google Shape;156;p21"/>
           <p:cNvPicPr preferRelativeResize="0"/>
           <p:nvPr/>
         </p:nvPicPr>
@@ -14346,8 +14402,8 @@
         </p:blipFill>
         <p:spPr>
           <a:xfrm>
-            <a:off x="4572000" y="276700"/>
-            <a:ext cx="4433475" cy="4869772"/>
+            <a:off x="4572000" y="277090"/>
+            <a:ext cx="4314825" cy="4738688"/>
           </a:xfrm>
           <a:prstGeom prst="rect">
             <a:avLst/>
@@ -14367,6 +14423,285 @@
 </file>
 
 <file path=ppt/theme/theme1.xml><?xml version="1.0" encoding="utf-8"?>
+<a:theme xmlns:a="http://schemas.openxmlformats.org/drawingml/2006/main" xmlns:r="http://schemas.openxmlformats.org/officeDocument/2006/relationships" name="Simple Light">
+  <a:themeElements>
+    <a:clrScheme name="Simple Light">
+      <a:dk1>
+        <a:srgbClr val="000000"/>
+      </a:dk1>
+      <a:lt1>
+        <a:srgbClr val="FFFFFF"/>
+      </a:lt1>
+      <a:dk2>
+        <a:srgbClr val="595959"/>
+      </a:dk2>
+      <a:lt2>
+        <a:srgbClr val="EEEEEE"/>
+      </a:lt2>
+      <a:accent1>
+        <a:srgbClr val="4285F4"/>
+      </a:accent1>
+      <a:accent2>
+        <a:srgbClr val="212121"/>
+      </a:accent2>
+      <a:accent3>
+        <a:srgbClr val="78909C"/>
+      </a:accent3>
+      <a:accent4>
+        <a:srgbClr val="FFAB40"/>
+      </a:accent4>
+      <a:accent5>
+        <a:srgbClr val="0097A7"/>
+      </a:accent5>
+      <a:accent6>
+        <a:srgbClr val="EEFF41"/>
+      </a:accent6>
+      <a:hlink>
+        <a:srgbClr val="0097A7"/>
+      </a:hlink>
+      <a:folHlink>
+        <a:srgbClr val="0097A7"/>
+      </a:folHlink>
+    </a:clrScheme>
+    <a:fontScheme name="Office">
+      <a:majorFont>
+        <a:latin typeface="Arial"/>
+        <a:ea typeface=""/>
+        <a:cs typeface=""/>
+        <a:font script="Jpan" typeface="ＭＳ Ｐゴシック"/>
+        <a:font script="Hang" typeface="맑은 고딕"/>
+        <a:font script="Hans" typeface="宋体"/>
+        <a:font script="Hant" typeface="新細明體"/>
+        <a:font script="Arab" typeface="Times New Roman"/>
+        <a:font script="Hebr" typeface="Times New Roman"/>
+        <a:font script="Thai" typeface="Angsana New"/>
+        <a:font script="Ethi" typeface="Nyala"/>
+        <a:font script="Beng" typeface="Vrinda"/>
+        <a:font script="Gujr" typeface="Shruti"/>
+        <a:font script="Khmr" typeface="MoolBoran"/>
+        <a:font script="Knda" typeface="Tunga"/>
+        <a:font script="Guru" typeface="Raavi"/>
+        <a:font script="Cans" typeface="Euphemia"/>
+        <a:font script="Cher" typeface="Plantagenet Cherokee"/>
+        <a:font script="Yiii" typeface="Microsoft Yi Baiti"/>
+        <a:font script="Tibt" typeface="Microsoft Himalaya"/>
+        <a:font script="Thaa" typeface="MV Boli"/>
+        <a:font script="Deva" typeface="Mangal"/>
+        <a:font script="Telu" typeface="Gautami"/>
+        <a:font script="Taml" typeface="Latha"/>
+        <a:font script="Syrc" typeface="Estrangelo Edessa"/>
+        <a:font script="Orya" typeface="Kalinga"/>
+        <a:font script="Mlym" typeface="Kartika"/>
+        <a:font script="Laoo" typeface="DokChampa"/>
+        <a:font script="Sinh" typeface="Iskoola Pota"/>
+        <a:font script="Mong" typeface="Mongolian Baiti"/>
+        <a:font script="Viet" typeface="Times New Roman"/>
+        <a:font script="Uigh" typeface="Microsoft Uighur"/>
+        <a:font script="Geor" typeface="Sylfaen"/>
+      </a:majorFont>
+      <a:minorFont>
+        <a:latin typeface="Arial"/>
+        <a:ea typeface=""/>
+        <a:cs typeface=""/>
+        <a:font script="Jpan" typeface="ＭＳ Ｐゴシック"/>
+        <a:font script="Hang" typeface="맑은 고딕"/>
+        <a:font script="Hans" typeface="宋体"/>
+        <a:font script="Hant" typeface="新細明體"/>
+        <a:font script="Arab" typeface="Arial"/>
+        <a:font script="Hebr" typeface="Arial"/>
+        <a:font script="Thai" typeface="Cordia New"/>
+        <a:font script="Ethi" typeface="Nyala"/>
+        <a:font script="Beng" typeface="Vrinda"/>
+        <a:font script="Gujr" typeface="Shruti"/>
+        <a:font script="Khmr" typeface="DaunPenh"/>
+        <a:font script="Knda" typeface="Tunga"/>
+        <a:font script="Guru" typeface="Raavi"/>
+        <a:font script="Cans" typeface="Euphemia"/>
+        <a:font script="Cher" typeface="Plantagenet Cherokee"/>
+        <a:font script="Yiii" typeface="Microsoft Yi Baiti"/>
+        <a:font script="Tibt" typeface="Microsoft Himalaya"/>
+        <a:font script="Thaa" typeface="MV Boli"/>
+        <a:font script="Deva" typeface="Mangal"/>
+        <a:font script="Telu" typeface="Gautami"/>
+        <a:font script="Taml" typeface="Latha"/>
+        <a:font script="Syrc" typeface="Estrangelo Edessa"/>
+        <a:font script="Orya" typeface="Kalinga"/>
+        <a:font script="Mlym" typeface="Kartika"/>
+        <a:font script="Laoo" typeface="DokChampa"/>
+        <a:font script="Sinh" typeface="Iskoola Pota"/>
+        <a:font script="Mong" typeface="Mongolian Baiti"/>
+        <a:font script="Viet" typeface="Arial"/>
+        <a:font script="Uigh" typeface="Microsoft Uighur"/>
+        <a:font script="Geor" typeface="Sylfaen"/>
+      </a:minorFont>
+    </a:fontScheme>
+    <a:fmtScheme name="Office">
+      <a:fillStyleLst>
+        <a:solidFill>
+          <a:schemeClr val="phClr"/>
+        </a:solidFill>
+        <a:gradFill rotWithShape="1">
+          <a:gsLst>
+            <a:gs pos="0">
+              <a:schemeClr val="phClr">
+                <a:tint val="50000"/>
+                <a:satMod val="300000"/>
+              </a:schemeClr>
+            </a:gs>
+            <a:gs pos="35000">
+              <a:schemeClr val="phClr">
+                <a:tint val="37000"/>
+                <a:satMod val="300000"/>
+              </a:schemeClr>
+            </a:gs>
+            <a:gs pos="100000">
+              <a:schemeClr val="phClr">
+                <a:tint val="15000"/>
+                <a:satMod val="350000"/>
+              </a:schemeClr>
+            </a:gs>
+          </a:gsLst>
+          <a:lin ang="16200000" scaled="1"/>
+        </a:gradFill>
+        <a:gradFill rotWithShape="1">
+          <a:gsLst>
+            <a:gs pos="0">
+              <a:schemeClr val="phClr">
+                <a:tint val="100000"/>
+                <a:shade val="100000"/>
+                <a:satMod val="130000"/>
+              </a:schemeClr>
+            </a:gs>
+            <a:gs pos="100000">
+              <a:schemeClr val="phClr">
+                <a:tint val="50000"/>
+                <a:shade val="100000"/>
+                <a:satMod val="350000"/>
+              </a:schemeClr>
+            </a:gs>
+          </a:gsLst>
+          <a:lin ang="16200000" scaled="0"/>
+        </a:gradFill>
+      </a:fillStyleLst>
+      <a:lnStyleLst>
+        <a:ln w="9525" cap="flat" cmpd="sng" algn="ctr">
+          <a:solidFill>
+            <a:schemeClr val="phClr">
+              <a:shade val="95000"/>
+              <a:satMod val="105000"/>
+            </a:schemeClr>
+          </a:solidFill>
+          <a:prstDash val="solid"/>
+        </a:ln>
+        <a:ln w="25400" cap="flat" cmpd="sng" algn="ctr">
+          <a:solidFill>
+            <a:schemeClr val="phClr"/>
+          </a:solidFill>
+          <a:prstDash val="solid"/>
+        </a:ln>
+        <a:ln w="38100" cap="flat" cmpd="sng" algn="ctr">
+          <a:solidFill>
+            <a:schemeClr val="phClr"/>
+          </a:solidFill>
+          <a:prstDash val="solid"/>
+        </a:ln>
+      </a:lnStyleLst>
+      <a:effectStyleLst>
+        <a:effectStyle>
+          <a:effectLst>
+            <a:outerShdw blurRad="40000" dist="20000" dir="5400000" rotWithShape="0">
+              <a:srgbClr val="000000">
+                <a:alpha val="38000"/>
+              </a:srgbClr>
+            </a:outerShdw>
+          </a:effectLst>
+        </a:effectStyle>
+        <a:effectStyle>
+          <a:effectLst>
+            <a:outerShdw blurRad="40000" dist="23000" dir="5400000" rotWithShape="0">
+              <a:srgbClr val="000000">
+                <a:alpha val="35000"/>
+              </a:srgbClr>
+            </a:outerShdw>
+          </a:effectLst>
+        </a:effectStyle>
+        <a:effectStyle>
+          <a:effectLst>
+            <a:outerShdw blurRad="40000" dist="23000" dir="5400000" rotWithShape="0">
+              <a:srgbClr val="000000">
+                <a:alpha val="35000"/>
+              </a:srgbClr>
+            </a:outerShdw>
+          </a:effectLst>
+          <a:scene3d>
+            <a:camera prst="orthographicFront">
+              <a:rot lat="0" lon="0" rev="0"/>
+            </a:camera>
+            <a:lightRig rig="threePt" dir="t">
+              <a:rot lat="0" lon="0" rev="1200000"/>
+            </a:lightRig>
+          </a:scene3d>
+          <a:sp3d>
+            <a:bevelT w="63500" h="25400"/>
+          </a:sp3d>
+        </a:effectStyle>
+      </a:effectStyleLst>
+      <a:bgFillStyleLst>
+        <a:solidFill>
+          <a:schemeClr val="phClr"/>
+        </a:solidFill>
+        <a:gradFill rotWithShape="1">
+          <a:gsLst>
+            <a:gs pos="0">
+              <a:schemeClr val="phClr">
+                <a:tint val="40000"/>
+                <a:satMod val="350000"/>
+              </a:schemeClr>
+            </a:gs>
+            <a:gs pos="40000">
+              <a:schemeClr val="phClr">
+                <a:tint val="45000"/>
+                <a:shade val="99000"/>
+                <a:satMod val="350000"/>
+              </a:schemeClr>
+            </a:gs>
+            <a:gs pos="100000">
+              <a:schemeClr val="phClr">
+                <a:shade val="20000"/>
+                <a:satMod val="255000"/>
+              </a:schemeClr>
+            </a:gs>
+          </a:gsLst>
+          <a:path path="circle">
+            <a:fillToRect l="50000" t="-80000" r="50000" b="180000"/>
+          </a:path>
+        </a:gradFill>
+        <a:gradFill rotWithShape="1">
+          <a:gsLst>
+            <a:gs pos="0">
+              <a:schemeClr val="phClr">
+                <a:tint val="80000"/>
+                <a:satMod val="300000"/>
+              </a:schemeClr>
+            </a:gs>
+            <a:gs pos="100000">
+              <a:schemeClr val="phClr">
+                <a:shade val="30000"/>
+                <a:satMod val="200000"/>
+              </a:schemeClr>
+            </a:gs>
+          </a:gsLst>
+          <a:path path="circle">
+            <a:fillToRect l="50000" t="50000" r="50000" b="50000"/>
+          </a:path>
+        </a:gradFill>
+      </a:bgFillStyleLst>
+    </a:fmtScheme>
+  </a:themeElements>
+</a:theme>
+</file>
+
+<file path=ppt/theme/theme2.xml><?xml version="1.0" encoding="utf-8"?>
 <a:theme xmlns:a="http://schemas.openxmlformats.org/drawingml/2006/main" xmlns:r="http://schemas.openxmlformats.org/officeDocument/2006/relationships">
   <a:themeElements>
     <a:clrScheme name="Default">
@@ -14643,283 +14978,4 @@
     </a:fmtScheme>
   </a:themeElements>
 </a:theme>
-</file>
-
-<file path=ppt/theme/theme2.xml><?xml version="1.0" encoding="utf-8"?>
-<a:theme xmlns:a="http://schemas.openxmlformats.org/drawingml/2006/main" xmlns:r="http://schemas.openxmlformats.org/officeDocument/2006/relationships" name="Simple Light">
-  <a:themeElements>
-    <a:clrScheme name="Simple Light">
-      <a:dk1>
-        <a:srgbClr val="000000"/>
-      </a:dk1>
-      <a:lt1>
-        <a:srgbClr val="FFFFFF"/>
-      </a:lt1>
-      <a:dk2>
-        <a:srgbClr val="595959"/>
-      </a:dk2>
-      <a:lt2>
-        <a:srgbClr val="EEEEEE"/>
-      </a:lt2>
-      <a:accent1>
-        <a:srgbClr val="4285F4"/>
-      </a:accent1>
-      <a:accent2>
-        <a:srgbClr val="212121"/>
-      </a:accent2>
-      <a:accent3>
-        <a:srgbClr val="78909C"/>
-      </a:accent3>
-      <a:accent4>
-        <a:srgbClr val="FFAB40"/>
-      </a:accent4>
-      <a:accent5>
-        <a:srgbClr val="0097A7"/>
-      </a:accent5>
-      <a:accent6>
-        <a:srgbClr val="EEFF41"/>
-      </a:accent6>
-      <a:hlink>
-        <a:srgbClr val="0097A7"/>
-      </a:hlink>
-      <a:folHlink>
-        <a:srgbClr val="0097A7"/>
-      </a:folHlink>
-    </a:clrScheme>
-    <a:fontScheme name="Office">
-      <a:majorFont>
-        <a:latin typeface="Arial"/>
-        <a:ea typeface=""/>
-        <a:cs typeface=""/>
-        <a:font script="Jpan" typeface="ＭＳ Ｐゴシック"/>
-        <a:font script="Hang" typeface="맑은 고딕"/>
-        <a:font script="Hans" typeface="宋体"/>
-        <a:font script="Hant" typeface="新細明體"/>
-        <a:font script="Arab" typeface="Times New Roman"/>
-        <a:font script="Hebr" typeface="Times New Roman"/>
-        <a:font script="Thai" typeface="Angsana New"/>
-        <a:font script="Ethi" typeface="Nyala"/>
-        <a:font script="Beng" typeface="Vrinda"/>
-        <a:font script="Gujr" typeface="Shruti"/>
-        <a:font script="Khmr" typeface="MoolBoran"/>
-        <a:font script="Knda" typeface="Tunga"/>
-        <a:font script="Guru" typeface="Raavi"/>
-        <a:font script="Cans" typeface="Euphemia"/>
-        <a:font script="Cher" typeface="Plantagenet Cherokee"/>
-        <a:font script="Yiii" typeface="Microsoft Yi Baiti"/>
-        <a:font script="Tibt" typeface="Microsoft Himalaya"/>
-        <a:font script="Thaa" typeface="MV Boli"/>
-        <a:font script="Deva" typeface="Mangal"/>
-        <a:font script="Telu" typeface="Gautami"/>
-        <a:font script="Taml" typeface="Latha"/>
-        <a:font script="Syrc" typeface="Estrangelo Edessa"/>
-        <a:font script="Orya" typeface="Kalinga"/>
-        <a:font script="Mlym" typeface="Kartika"/>
-        <a:font script="Laoo" typeface="DokChampa"/>
-        <a:font script="Sinh" typeface="Iskoola Pota"/>
-        <a:font script="Mong" typeface="Mongolian Baiti"/>
-        <a:font script="Viet" typeface="Times New Roman"/>
-        <a:font script="Uigh" typeface="Microsoft Uighur"/>
-        <a:font script="Geor" typeface="Sylfaen"/>
-      </a:majorFont>
-      <a:minorFont>
-        <a:latin typeface="Arial"/>
-        <a:ea typeface=""/>
-        <a:cs typeface=""/>
-        <a:font script="Jpan" typeface="ＭＳ Ｐゴシック"/>
-        <a:font script="Hang" typeface="맑은 고딕"/>
-        <a:font script="Hans" typeface="宋体"/>
-        <a:font script="Hant" typeface="新細明體"/>
-        <a:font script="Arab" typeface="Arial"/>
-        <a:font script="Hebr" typeface="Arial"/>
-        <a:font script="Thai" typeface="Cordia New"/>
-        <a:font script="Ethi" typeface="Nyala"/>
-        <a:font script="Beng" typeface="Vrinda"/>
-        <a:font script="Gujr" typeface="Shruti"/>
-        <a:font script="Khmr" typeface="DaunPenh"/>
-        <a:font script="Knda" typeface="Tunga"/>
-        <a:font script="Guru" typeface="Raavi"/>
-        <a:font script="Cans" typeface="Euphemia"/>
-        <a:font script="Cher" typeface="Plantagenet Cherokee"/>
-        <a:font script="Yiii" typeface="Microsoft Yi Baiti"/>
-        <a:font script="Tibt" typeface="Microsoft Himalaya"/>
-        <a:font script="Thaa" typeface="MV Boli"/>
-        <a:font script="Deva" typeface="Mangal"/>
-        <a:font script="Telu" typeface="Gautami"/>
-        <a:font script="Taml" typeface="Latha"/>
-        <a:font script="Syrc" typeface="Estrangelo Edessa"/>
-        <a:font script="Orya" typeface="Kalinga"/>
-        <a:font script="Mlym" typeface="Kartika"/>
-        <a:font script="Laoo" typeface="DokChampa"/>
-        <a:font script="Sinh" typeface="Iskoola Pota"/>
-        <a:font script="Mong" typeface="Mongolian Baiti"/>
-        <a:font script="Viet" typeface="Arial"/>
-        <a:font script="Uigh" typeface="Microsoft Uighur"/>
-        <a:font script="Geor" typeface="Sylfaen"/>
-      </a:minorFont>
-    </a:fontScheme>
-    <a:fmtScheme name="Office">
-      <a:fillStyleLst>
-        <a:solidFill>
-          <a:schemeClr val="phClr"/>
-        </a:solidFill>
-        <a:gradFill rotWithShape="1">
-          <a:gsLst>
-            <a:gs pos="0">
-              <a:schemeClr val="phClr">
-                <a:tint val="50000"/>
-                <a:satMod val="300000"/>
-              </a:schemeClr>
-            </a:gs>
-            <a:gs pos="35000">
-              <a:schemeClr val="phClr">
-                <a:tint val="37000"/>
-                <a:satMod val="300000"/>
-              </a:schemeClr>
-            </a:gs>
-            <a:gs pos="100000">
-              <a:schemeClr val="phClr">
-                <a:tint val="15000"/>
-                <a:satMod val="350000"/>
-              </a:schemeClr>
-            </a:gs>
-          </a:gsLst>
-          <a:lin ang="16200000" scaled="1"/>
-        </a:gradFill>
-        <a:gradFill rotWithShape="1">
-          <a:gsLst>
-            <a:gs pos="0">
-              <a:schemeClr val="phClr">
-                <a:tint val="100000"/>
-                <a:shade val="100000"/>
-                <a:satMod val="130000"/>
-              </a:schemeClr>
-            </a:gs>
-            <a:gs pos="100000">
-              <a:schemeClr val="phClr">
-                <a:tint val="50000"/>
-                <a:shade val="100000"/>
-                <a:satMod val="350000"/>
-              </a:schemeClr>
-            </a:gs>
-          </a:gsLst>
-          <a:lin ang="16200000" scaled="0"/>
-        </a:gradFill>
-      </a:fillStyleLst>
-      <a:lnStyleLst>
-        <a:ln w="9525" cap="flat" cmpd="sng" algn="ctr">
-          <a:solidFill>
-            <a:schemeClr val="phClr">
-              <a:shade val="95000"/>
-              <a:satMod val="105000"/>
-            </a:schemeClr>
-          </a:solidFill>
-          <a:prstDash val="solid"/>
-        </a:ln>
-        <a:ln w="25400" cap="flat" cmpd="sng" algn="ctr">
-          <a:solidFill>
-            <a:schemeClr val="phClr"/>
-          </a:solidFill>
-          <a:prstDash val="solid"/>
-        </a:ln>
-        <a:ln w="38100" cap="flat" cmpd="sng" algn="ctr">
-          <a:solidFill>
-            <a:schemeClr val="phClr"/>
-          </a:solidFill>
-          <a:prstDash val="solid"/>
-        </a:ln>
-      </a:lnStyleLst>
-      <a:effectStyleLst>
-        <a:effectStyle>
-          <a:effectLst>
-            <a:outerShdw blurRad="40000" dist="20000" dir="5400000" rotWithShape="0">
-              <a:srgbClr val="000000">
-                <a:alpha val="38000"/>
-              </a:srgbClr>
-            </a:outerShdw>
-          </a:effectLst>
-        </a:effectStyle>
-        <a:effectStyle>
-          <a:effectLst>
-            <a:outerShdw blurRad="40000" dist="23000" dir="5400000" rotWithShape="0">
-              <a:srgbClr val="000000">
-                <a:alpha val="35000"/>
-              </a:srgbClr>
-            </a:outerShdw>
-          </a:effectLst>
-        </a:effectStyle>
-        <a:effectStyle>
-          <a:effectLst>
-            <a:outerShdw blurRad="40000" dist="23000" dir="5400000" rotWithShape="0">
-              <a:srgbClr val="000000">
-                <a:alpha val="35000"/>
-              </a:srgbClr>
-            </a:outerShdw>
-          </a:effectLst>
-          <a:scene3d>
-            <a:camera prst="orthographicFront">
-              <a:rot lat="0" lon="0" rev="0"/>
-            </a:camera>
-            <a:lightRig rig="threePt" dir="t">
-              <a:rot lat="0" lon="0" rev="1200000"/>
-            </a:lightRig>
-          </a:scene3d>
-          <a:sp3d>
-            <a:bevelT w="63500" h="25400"/>
-          </a:sp3d>
-        </a:effectStyle>
-      </a:effectStyleLst>
-      <a:bgFillStyleLst>
-        <a:solidFill>
-          <a:schemeClr val="phClr"/>
-        </a:solidFill>
-        <a:gradFill rotWithShape="1">
-          <a:gsLst>
-            <a:gs pos="0">
-              <a:schemeClr val="phClr">
-                <a:tint val="40000"/>
-                <a:satMod val="350000"/>
-              </a:schemeClr>
-            </a:gs>
-            <a:gs pos="40000">
-              <a:schemeClr val="phClr">
-                <a:tint val="45000"/>
-                <a:shade val="99000"/>
-                <a:satMod val="350000"/>
-              </a:schemeClr>
-            </a:gs>
-            <a:gs pos="100000">
-              <a:schemeClr val="phClr">
-                <a:shade val="20000"/>
-                <a:satMod val="255000"/>
-              </a:schemeClr>
-            </a:gs>
-          </a:gsLst>
-          <a:path path="circle">
-            <a:fillToRect l="50000" t="-80000" r="50000" b="180000"/>
-          </a:path>
-        </a:gradFill>
-        <a:gradFill rotWithShape="1">
-          <a:gsLst>
-            <a:gs pos="0">
-              <a:schemeClr val="phClr">
-                <a:tint val="80000"/>
-                <a:satMod val="300000"/>
-              </a:schemeClr>
-            </a:gs>
-            <a:gs pos="100000">
-              <a:schemeClr val="phClr">
-                <a:shade val="30000"/>
-                <a:satMod val="200000"/>
-              </a:schemeClr>
-            </a:gs>
-          </a:gsLst>
-          <a:path path="circle">
-            <a:fillToRect l="50000" t="50000" r="50000" b="50000"/>
-          </a:path>
-        </a:gradFill>
-      </a:bgFillStyleLst>
-    </a:fmtScheme>
-  </a:themeElements>
-</a:theme>
 </file>
--- a/Module 1/class_1.4/deep_learning_course_class_1.4.pptx
+++ b/Module 1/class_1.4/deep_learning_course_class_1.4.pptx
@@ -26,7 +26,6 @@
     <p:sldId id="271" r:id="rId21"/>
     <p:sldId id="272" r:id="rId22"/>
     <p:sldId id="273" r:id="rId23"/>
-    <p:sldId id="274" r:id="rId24"/>
   </p:sldIdLst>
   <p:sldSz cy="5143500" cx="9144000"/>
   <p:notesSz cx="6858000" cy="9144000"/>
@@ -1650,105 +1649,6 @@
       <p:sp>
         <p:nvSpPr>
           <p:cNvPr id="233" name="Google Shape;233;g37426365403_0_11:notes"/>
-          <p:cNvSpPr txBox="1"/>
-          <p:nvPr>
-            <p:ph idx="1" type="body"/>
-          </p:nvPr>
-        </p:nvSpPr>
-        <p:spPr>
-          <a:xfrm>
-            <a:off x="685800" y="4343400"/>
-            <a:ext cx="5486400" cy="4114800"/>
-          </a:xfrm>
-          <a:prstGeom prst="rect">
-            <a:avLst/>
-          </a:prstGeom>
-        </p:spPr>
-        <p:txBody>
-          <a:bodyPr anchorCtr="0" anchor="t" bIns="91425" lIns="91425" spcFirstLastPara="1" rIns="91425" wrap="square" tIns="91425">
-            <a:noAutofit/>
-          </a:bodyPr>
-          <a:lstStyle/>
-          <a:p>
-            <a:pPr indent="0" lvl="0" marL="0" rtl="0" algn="l">
-              <a:spcBef>
-                <a:spcPts val="0"/>
-              </a:spcBef>
-              <a:spcAft>
-                <a:spcPts val="0"/>
-              </a:spcAft>
-              <a:buNone/>
-            </a:pPr>
-            <a:r>
-              <a:t/>
-            </a:r>
-            <a:endParaRPr/>
-          </a:p>
-        </p:txBody>
-      </p:sp>
-    </p:spTree>
-  </p:cSld>
-  <p:clrMapOvr>
-    <a:masterClrMapping/>
-  </p:clrMapOvr>
-</p:notes>
-</file>
-
-<file path=ppt/notesSlides/notesSlide19.xml><?xml version="1.0" encoding="utf-8"?>
-<p:notes xmlns:a="http://schemas.openxmlformats.org/drawingml/2006/main" xmlns:r="http://schemas.openxmlformats.org/officeDocument/2006/relationships" xmlns:mc="http://schemas.openxmlformats.org/markup-compatibility/2006" xmlns:mv="urn:schemas-microsoft-com:mac:vml" xmlns:p="http://schemas.openxmlformats.org/presentationml/2006/main" xmlns:c="http://schemas.openxmlformats.org/drawingml/2006/chart" xmlns:dgm="http://schemas.openxmlformats.org/drawingml/2006/diagram" xmlns:o="urn:schemas-microsoft-com:office:office" xmlns:v="urn:schemas-microsoft-com:vml" xmlns:pvml="urn:schemas-microsoft-com:office:powerpoint" xmlns:com="http://schemas.openxmlformats.org/drawingml/2006/compatibility" xmlns:p14="http://schemas.microsoft.com/office/powerpoint/2010/main" xmlns:p15="http://schemas.microsoft.com/office/powerpoint/2012/main" xmlns:ahyp="http://schemas.microsoft.com/office/drawing/2018/hyperlinkcolor" showMasterPhAnim="0" showMasterSp="0">
-  <p:cSld>
-    <p:spTree>
-      <p:nvGrpSpPr>
-        <p:cNvPr id="265" name="Shape 265"/>
-        <p:cNvGrpSpPr/>
-        <p:nvPr/>
-      </p:nvGrpSpPr>
-      <p:grpSpPr>
-        <a:xfrm>
-          <a:off x="0" y="0"/>
-          <a:ext cx="0" cy="0"/>
-          <a:chOff x="0" y="0"/>
-          <a:chExt cx="0" cy="0"/>
-        </a:xfrm>
-      </p:grpSpPr>
-      <p:sp>
-        <p:nvSpPr>
-          <p:cNvPr id="266" name="Google Shape;266;g38bdd1193af_0_53:notes"/>
-          <p:cNvSpPr/>
-          <p:nvPr>
-            <p:ph idx="2" type="sldImg"/>
-          </p:nvPr>
-        </p:nvSpPr>
-        <p:spPr>
-          <a:xfrm>
-            <a:off x="381300" y="685800"/>
-            <a:ext cx="6096000" cy="3429000"/>
-          </a:xfrm>
-          <a:custGeom>
-            <a:rect b="b" l="l" r="r" t="t"/>
-            <a:pathLst>
-              <a:path extrusionOk="0" h="120000" w="120000">
-                <a:moveTo>
-                  <a:pt x="0" y="0"/>
-                </a:moveTo>
-                <a:lnTo>
-                  <a:pt x="120000" y="0"/>
-                </a:lnTo>
-                <a:lnTo>
-                  <a:pt x="120000" y="120000"/>
-                </a:lnTo>
-                <a:lnTo>
-                  <a:pt x="0" y="120000"/>
-                </a:lnTo>
-                <a:close/>
-              </a:path>
-            </a:pathLst>
-          </a:custGeom>
-        </p:spPr>
-      </p:sp>
-      <p:sp>
-        <p:nvSpPr>
-          <p:cNvPr id="267" name="Google Shape;267;g38bdd1193af_0_53:notes"/>
           <p:cNvSpPr txBox="1"/>
           <p:nvPr>
             <p:ph idx="1" type="body"/>
@@ -7887,7 +7787,7 @@
       </p:sp>
       <p:pic>
         <p:nvPicPr>
-          <p:cNvPr descr="{&quot;type&quot;:&quot;gather*&quot;,&quot;aid&quot;:null,&quot;backgroundColor&quot;:&quot;#FFFFFF&quot;,&quot;id&quot;:&quot;7&quot;,&quot;font&quot;:{&quot;size&quot;:10,&quot;color&quot;:&quot;#595959&quot;,&quot;family&quot;:&quot;Arial&quot;},&quot;code&quot;:&quot;\\begin{gather*}\n{y=Ax,\\,x:m\\times1,\\,A:\\,n\\times m,\\,y:\\,n\\times1}\\\\\n{\\text{We}\\,\\text{know}\\;\\text{that}}\\\\\n{\\diff{y}{x}=A^{T}}\\\\\n{\\text{What}\\;\\text{about}\\;\\diff{y}{W}?}\\\\\n{\\text{This}\\;\\text{is}\\;\\text{a}\\;\\text{derivative}\\;\\text{of}\\;\\text{a}\\;\\text{vector}\\;\\text{against}\\;\\text{a}\\;\\text{matrix},\\,\\text{which}\\;\\text{is}\\;\\text{a}\\;\\text{hard}\\;\\text{concept}\\;\\text{to}\\;\\text{think}\\;\\text{about}.}\\\\\n{\\text{But..}\\;\\text{if}\\;\\text{we}\\;\\text{add}\\;\\text{a}\\;\\text{function}\\;\\text{that}\\;\\text{maps}\\;\\text{the}\\;\\text{vector}\\,\\text{to}\\;\\text{a}\\;\\text{scalar,}\\;\\text{then}\\;\\text{the}\\;\\text{derivative}\\;\\text{becomes}\\;\\text{tractable..}}\\\\\n{x\\to y=Ax\\to v=f\\left(y\\right)}\\\\\n{\\text{Here}\\;v\\,\\text{is}\\;\\text{a}\\;\\text{scalar..}}\\\\\n{\\text{Now}\\;\\text{we}\\;\\text{can}\\;\\text{calculate}\\;\\diff{v}{A},\\,\\text{a}\\;\\text{matrix}\\;\\text{with}\\;\\text{the}\\;\\text{same}\\;\\text{dimension}\\;\\text{as}\\;A}\t\n\\end{gather*}&quot;,&quot;backgroundColorModified&quot;:false,&quot;ts&quot;:1760223512959,&quot;cs&quot;:&quot;CUiisz3z3r6qsdC/5GOGwA==&quot;,&quot;size&quot;:{&quot;width&quot;:662,&quot;height&quot;:228}}" id="180" name="Google Shape;180;p24"/>
+          <p:cNvPr descr="{&quot;type&quot;:&quot;gather*&quot;,&quot;font&quot;:{&quot;color&quot;:&quot;#595959&quot;,&quot;size&quot;:10,&quot;family&quot;:&quot;Arial&quot;},&quot;id&quot;:&quot;7&quot;,&quot;backgroundColor&quot;:&quot;#FFFFFF&quot;,&quot;aid&quot;:null,&quot;backgroundColorModified&quot;:false,&quot;code&quot;:&quot;\\begin{gather*}\n{\\boldsymbol{y}=A\\boldsymbol{x},\\,\\boldsymbol{x}:m\\times1,\\,A:\\,n\\times m,\\,\\boldsymbol{y}:\\,n\\times1}\\\\\n{\\text{We}\\,\\text{know}\\;\\text{that}}\\\\\n{\\diff{\\boldsymbol{y}}{\\boldsymbol{x}}=A^{T}}\\\\\n{\\text{What}\\;\\text{about}\\;\\diff{y}{W}?}\\\\\n{\\text{This}\\;\\text{is}\\;\\text{a}\\;\\text{derivative}\\;\\text{of}\\;\\text{a}\\;\\text{vector}\\;\\text{against}\\;\\text{a}\\;\\text{matrix},\\,\\text{which}\\;\\text{is}\\;\\text{a}\\;\\text{hard}\\;\\text{concept}\\;\\text{to}\\;\\text{think}\\;\\text{about}.}\\\\\n{\\text{But..}\\;\\text{if}\\;\\text{we}\\;\\text{add}\\;\\text{a}\\;\\text{function}\\;\\text{that}\\;\\text{maps}\\;\\text{the}\\;\\text{vector}\\,\\text{to}\\;\\text{a}\\;\\text{scalar,}\\;\\text{then}\\;\\text{the}\\;\\text{derivative}\\;\\text{becomes}\\;\\text{tractable..}}\\\\\n{\\boldsymbol{x}\\to \\boldsymbol{y}=A\\boldsymbol{x}\\to v=f\\left(\\boldsymbol{y}\\right)}\\\\\n{\\text{Here}\\;v\\,\\text{is}\\;\\text{a}\\;\\text{scalar..}}\\\\\n{\\text{Now}\\;\\text{we}\\;\\text{can}\\;\\text{calculate}\\;\\diff{v}{A},\\,\\text{a}\\;\\text{matrix}\\;\\text{with}\\;\\text{the}\\;\\text{same}\\;\\text{dimension}\\;\\text{as}\\;A}\t\n\\end{gather*}&quot;,&quot;ts&quot;:1762637740406,&quot;cs&quot;:&quot;i2U16b0oEe2UuK5Y15h9Lg==&quot;,&quot;size&quot;:{&quot;width&quot;:662.0000000000001,&quot;height&quot;:228}}" id="180" name="Google Shape;180;p24"/>
           <p:cNvPicPr preferRelativeResize="0"/>
           <p:nvPr/>
         </p:nvPicPr>
@@ -7901,8 +7801,8 @@
         </p:blipFill>
         <p:spPr>
           <a:xfrm>
-            <a:off x="136750" y="806400"/>
-            <a:ext cx="8047073" cy="2771500"/>
+            <a:off x="417946" y="810714"/>
+            <a:ext cx="6305550" cy="2171700"/>
           </a:xfrm>
           <a:prstGeom prst="rect">
             <a:avLst/>
@@ -8025,7 +7925,7 @@
       </p:sp>
       <p:pic>
         <p:nvPicPr>
-          <p:cNvPr descr="{&quot;aid&quot;:null,&quot;id&quot;:&quot;8&quot;,&quot;backgroundColor&quot;:&quot;#FFFFFF&quot;,&quot;type&quot;:&quot;gather*&quot;,&quot;font&quot;:{&quot;size&quot;:10.5,&quot;color&quot;:&quot;#000000&quot;,&quot;family&quot;:&quot;Arial&quot;},&quot;backgroundColorModified&quot;:false,&quot;code&quot;:&quot;\\begin{gather*}\n{\\text{Let's}\\;\\text{consider}\\;\\text{the}\\;ij^{th}\\;\\text{element}\\;\\text{of}\\;\\diff{v}{A},\\,\\text{i.e.,}\\;\\diff{v}{A_{ij}}}\\\\\n{\\text{Now}\\;\\text{we}\\;\\text{have}\\;\\text{a}\\;\\text{chain..}}\\\\\n{A_{ij}\\to y\\to v,\\,\\text{here}\\;y\\,\\;\\text{is}\\;\\text{a}\\;\\text{vector}}\\\\\n{\\text{Now..}}\\\\\n{y_{i}=\\sum_{j=1}^{m}A_{ij}x_{j}}\\\\\n{\\text{Since}\\;\\text{each}\\;\\text{element}\\;\\text{of}\\;y\\,\\;\\text{is}\\;\\text{the}\\;\\text{corresponding}\\,\\text{row}\\;\\text{of}\\;\\text{A}\\;\\text{multiplied}\\;\\text{with}\\;x,\\,}\\\\\n{\\text{and}\\;\\text{other}\\;\\text{rows}\\;\\text{of}\\;\\text{A}\\,\\text{don't}\\;\\text{affect}\\;y_{i},\\,\\text{the}\\;\\text{chain}\\;\\text{above}\\;\\text{becomes}\\;\\text{a}\\;\\text{scalar}\\;\\text{chain..}\\text{}}\\\\\n{A_{ij}\\to y_{i}\\to v}\\\\\n{\\text{Now}\\;\\text{we}\\;\\text{can}\\;\\text{apply}\\;\\text{the}\\;\\text{chain}\\;\\text{rule..}}\\\\\n{\\diff{v}{A_{ij}}=\\diff{v}{y_{i}}\\diff{y_{i}}{A_{ij}}=\\diff{v}{y_{i}}\\diff{\\sum_{k=1}^{m}A_{ik}x_{k}}{A_{ij}}=\\diff{v}{y_{i}}x_{j}}\\\\\n{\\text{So..}\\;\\diff{v}{A}\\,\\text{becomes}\\;\\text{the}\\;\\text{outer}\\;\\text{product}\\;\\text{of}\\;\\text{the}\\;\\text{vectors}\\;\\diff{v}{y}\\,\\text{and}\\;x!}\\\\\n{\\diff{v}{A}=\\diff{v}{y}x^{T}\\,\\text{}}\\\\\n{\\text{Verify}\\;\\text{that}\\;\\text{the}\\;\\text{dimensions}\\;\\text{work}\\;\\text{out!}}\t\n\\end{gather*}&quot;,&quot;ts&quot;:1761864528197,&quot;cs&quot;:&quot;8H3P/qcorq4VeM9gFDYMtQ==&quot;,&quot;size&quot;:{&quot;width&quot;:537.5,&quot;height&quot;:394}}" id="187" name="Google Shape;187;p25"/>
+          <p:cNvPr descr="{&quot;code&quot;:&quot;\\begin{gather*}\n{\\text{Let's}\\;\\text{consider}\\;\\text{the}\\;ij^{th}\\;\\text{element}\\;\\text{of}\\;\\diff{v}{A},\\,\\text{i.e.,}\\;\\diff{v}{A_{ij}}}\\\\\n{\\text{Now}\\;\\text{we}\\;\\text{have}\\;\\text{a}\\;\\text{chain..}}\\\\\n{A_{ij}\\to \\boldsymbol{y}\\to v,\\,\\text{here}\\;\\boldsymbol{y}\\,\\;\\text{is}\\;\\text{a}\\;\\text{vector}}\\\\\n{\\text{Now..}}\\\\\n{y_{i}=\\sum_{j=1}^{m}A_{ij}x_{j}}\\\\\n{\\text{Since}\\;\\text{each}\\;\\text{element}\\;\\text{of}\\;y\\,\\;\\text{is}\\;\\text{the}\\;\\text{corresponding}\\,\\text{row}\\;\\text{of}\\;\\text{A}\\;\\text{multiplied}\\;\\text{with}\\;x,\\,}\\\\\n{\\text{and}\\;\\text{other}\\;\\text{rows}\\;\\text{of}\\;\\text{A}\\,\\text{don't}\\;\\text{affect}\\;y_{i},\\,\\text{the}\\;\\text{chain}\\;\\text{above}\\;\\text{becomes}\\;\\text{a}\\;\\text{scalar}\\;\\text{chain..}\\text{}}\\\\\n{A_{ij}\\to y_{i}\\to v}\\\\\n{\\text{Now}\\;\\text{we}\\;\\text{can}\\;\\text{apply}\\;\\text{the}\\;\\text{chain}\\;\\text{rule..}}\\\\\n{\\diff{v}{A_{ij}}=\\diff{v}{y_{i}}\\diff{y_{i}}{A_{ij}}=\\diff{v}{y_{i}}\\diff{\\sum_{k=1}^{m}A_{ik}x_{k}}{A_{ij}}=\\diff{v}{y_{i}}x_{j}}\\\\\n{\\text{So..}\\;\\diff{v}{A}\\,\\text{becomes}\\;\\text{the}\\;\\text{outer}\\;\\text{product}\\;\\text{of}\\;\\text{the}\\;\\text{vectors}\\;\\diff{v}{\\boldsymbol{y}}\\,\\text{and}\\;\\boldsymbol{x}!}\\\\\n{\\diff{v}{A}=\\diff{v}{\\boldsymbol{y}}\\boldsymbol{x^{T}}\\,\\text{}}\\\\\n{\\text{Verify}\\;\\text{that}\\;\\text{the}\\;\\text{dimensions}\\;\\text{work}\\;\\text{out!}}\t\n\\end{gather*}&quot;,&quot;type&quot;:&quot;gather*&quot;,&quot;font&quot;:{&quot;size&quot;:10.5,&quot;color&quot;:&quot;#000000&quot;,&quot;family&quot;:&quot;Arial&quot;},&quot;aid&quot;:null,&quot;backgroundColorModified&quot;:false,&quot;backgroundColor&quot;:&quot;#FFFFFF&quot;,&quot;id&quot;:&quot;8&quot;,&quot;ts&quot;:1762637977502,&quot;cs&quot;:&quot;gyVuWBDQeMhyfvsLz/yWvA==&quot;,&quot;size&quot;:{&quot;width&quot;:537.5,&quot;height&quot;:394}}" id="187" name="Google Shape;187;p25"/>
           <p:cNvPicPr preferRelativeResize="0"/>
           <p:nvPr/>
         </p:nvPicPr>
@@ -8161,9 +8061,59 @@
           </a:p>
         </p:txBody>
       </p:sp>
+      <p:sp>
+        <p:nvSpPr>
+          <p:cNvPr id="194" name="Google Shape;194;p26"/>
+          <p:cNvSpPr txBox="1"/>
+          <p:nvPr/>
+        </p:nvSpPr>
+        <p:spPr>
+          <a:xfrm>
+            <a:off x="579775" y="4740375"/>
+            <a:ext cx="5421600" cy="400200"/>
+          </a:xfrm>
+          <a:prstGeom prst="rect">
+            <a:avLst/>
+          </a:prstGeom>
+          <a:noFill/>
+          <a:ln>
+            <a:noFill/>
+          </a:ln>
+        </p:spPr>
+        <p:txBody>
+          <a:bodyPr anchorCtr="0" anchor="t" bIns="91425" lIns="91425" spcFirstLastPara="1" rIns="91425" wrap="square" tIns="91425">
+            <a:spAutoFit/>
+          </a:bodyPr>
+          <a:lstStyle/>
+          <a:p>
+            <a:pPr indent="0" lvl="0" marL="0" rtl="0" algn="l">
+              <a:spcBef>
+                <a:spcPts val="0"/>
+              </a:spcBef>
+              <a:spcAft>
+                <a:spcPts val="0"/>
+              </a:spcAft>
+              <a:buNone/>
+            </a:pPr>
+            <a:r>
+              <a:rPr lang="en">
+                <a:solidFill>
+                  <a:schemeClr val="dk2"/>
+                </a:solidFill>
+              </a:rPr>
+              <a:t>Code: 2_layer_network_derivatives.py</a:t>
+            </a:r>
+            <a:endParaRPr>
+              <a:solidFill>
+                <a:schemeClr val="dk2"/>
+              </a:solidFill>
+            </a:endParaRPr>
+          </a:p>
+        </p:txBody>
+      </p:sp>
       <p:pic>
         <p:nvPicPr>
-          <p:cNvPr descr="{&quot;id&quot;:&quot;9&quot;,&quot;backgroundColor&quot;:&quot;#FFFFFF&quot;,&quot;code&quot;:&quot;\\begin{gather*}\n{\\text{Now}\\;\\text{let's}\\;\\text{add}\\;\\text{another}\\;\\text{layer}\\;\\text{in}\\;\\text{front..}}\\\\\n{x\\to A\\to y\\to B\\to u\\to f\\to v}\\\\\n{\\text{As}\\;\\text{before,}\\;x:\\,m\\times1,\\,A:\\,n\\times m.\\,B:\\,k\\times n}\\\\\n{\\text{From}\\;\\text{before,}}\\\\\n{\\diff{v}{B}=\\diff{v}{u}y^{T},\\diff{v}{y}=B^{T}\\diff{v}{u}}\\\\\n{\\text{And}}\\\\\n{\\diff{v}{A}=\\diff{v}{y}x^{T}}\\\\\n{\\text{We}\\;\\text{can}\\;\\text{think}\\;\\text{of}\\;\\text{this}\\;\\text{as}\\;\\text{a}\\;2\\,\\text{layer}\\;\\text{network,}\\;\\text{where}\\;\\text{the}\\;\\text{parameters}\\;\\text{of}\\;\\text{each}\\;\\text{layer}\\;\\text{are}\\;\\text{A}\\;\\text{and}\\;\\text{B}}\\\\\n{x\\,\\text{is}\\;\\text{the}\\;\\text{input}\\;\\text{to}\\;\\text{layer}\\;\\text{1,}\\;\\text{and}\\;y\\,\\text{is}\\;\\text{the}\\;\\text{output.}\\;\\text{}}\\\\\n{y\\,\\,\\text{is}\\;\\text{the}\\;\\text{input}\\;\\text{to}\\;\\text{layer}\\;\\text{2.}\\;\\text{Output}\\;\\text{of}\\;\\text{layer}\\;\\text{2},\\,u\\;\\text{goes}\\;\\text{into}\\;\\text{function}\\;f\\,\\text{that}\\;\\text{produces}\\;\\text{a}\\;\\text{scalar}\\;\\text{value}\\;v}\\\\\n{\\text{Layer}\\;\\text{2}\\;\\text{calculates}\\;\\text{the}\\;\\text{gradient}\\;\\text{of}\\;\\text{the}\\;\\text{final}\\;\\text{output}\\;v\\,\\text{wrt}\\;\\text{its}\\;\\text{parameters}\\;B}\\\\\n{\\text{It}\\;\\text{also}\\;\\text{calculates}\\;\\text{the}\\;\\text{gradient}\\;\\text{wrt}\\;\\text{its}\\;\\text{input,}\\;\\text{which}\\;\\text{is}\\;backpropagated\\,\\text{to}\\;\\text{the}\\;\\text{previous}\\;\\text{layer}}\\\\\n{\\text{which}\\;\\text{uses}\\;\\text{it}\\;\\text{to}\\;\\text{calculate}\\;\\text{the}\\;\\text{gradient}\\;\\text{wrt}\\;\\text{its}\\;\\text{parameters}\\;\\text{and}\\;\\text{input..}\\;\\text{}}\t\n\\end{gather*}&quot;,&quot;font&quot;:{&quot;family&quot;:&quot;Arial&quot;,&quot;color&quot;:&quot;#000000&quot;,&quot;size&quot;:11},&quot;type&quot;:&quot;gather*&quot;,&quot;aid&quot;:null,&quot;backgroundColorModified&quot;:false,&quot;ts&quot;:1761865024995,&quot;cs&quot;:&quot;YgDsJi4vKp34NJxwIex2FQ==&quot;,&quot;size&quot;:{&quot;width&quot;:732.7087485564304,&quot;height&quot;:338.75587454068244}}" id="194" name="Google Shape;194;p26"/>
+          <p:cNvPr descr="{&quot;id&quot;:&quot;13&quot;,&quot;code&quot;:&quot;\\begin{gather*}\n{\\text{Now}\\;\\text{let's}\\;\\text{add}\\;\\text{another}\\;\\text{layer}\\;\\text{in}\\;\\text{front..}}\\\\\n{\\boldsymbol{x}\\to A\\to \\boldsymbol{y}\\to B\\to \\boldsymbol{u}\\to f\\to v}\\\\\n{\\text{As}\\;\\text{before,}\\;\\boldsymbol{x}:\\,m\\times1,\\,A:\\,n\\times m.\\,B:\\,k\\times n}\\\\\n{\\text{From}\\;\\text{before,}}\\\\\n{\\diff{v}{B}=\\diff{v}{\\boldsymbol{u}}\\boldsymbol{y^{T}},\\diff{v}{\\boldsymbol{y}}=B^{T}\\diff{v}{\\boldsymbol{u}}}\\\\\n{\\text{And}}\\\\\n{\\diff{v}{A}=\\diff{v}{\\boldsymbol{y}}\\boldsymbol{x^{T}}}\\\\\n{\\text{We}\\;\\text{can}\\;\\text{think}\\;\\text{of}\\;\\text{this}\\;\\text{as}\\;\\text{a}\\;2\\,\\text{layer}\\;\\text{network,}\\;\\text{where}\\;\\text{the}\\;\\text{parameters}\\;\\text{of}\\;\\text{each}\\;\\text{layer}\\;\\text{are}\\;\\text{A}\\;\\text{and}\\;\\text{B}}\\\\\n{\\boldsymbol{x}\\,\\text{is}\\;\\text{the}\\;\\text{input}\\;\\text{to}\\;\\text{layer}\\;\\text{1,}\\;\\text{and}\\;\\boldsymbol{y}\\,\\text{is}\\;\\text{the}\\;\\text{output.}\\;\\text{}}\\\\\n{\\boldsymbol{y}\\,\\,\\text{is}\\;\\text{the}\\;\\text{input}\\;\\text{to}\\;\\text{layer}\\;\\text{2.}\\;\\text{Output}\\;\\text{of}\\;\\text{layer}\\;\\text{2},\\,\\boldsymbol{u}\\;\\text{goes}\\;\\text{into}\\;\\text{function}\\;f\\,\\text{that}\\;\\text{produces}\\;\\text{a}\\;\\text{scalar}\\;\\text{value}\\;v}\\\\\n{\\text{Layer}\\;\\text{2}\\;\\text{calculates}\\;\\text{the}\\;\\text{gradient}\\;\\text{of}\\;\\text{the}\\;\\text{final}\\;\\text{output}\\;v\\,\\text{wrt}\\;\\text{its}\\;\\text{parameters}\\;B}\\\\\n{\\text{It}\\;\\text{also}\\;\\text{calculates}\\;\\text{the}\\;\\text{gradient}\\;\\text{wrt}\\;\\text{its}\\;\\text{input,}\\;\\text{which}\\;\\text{is}\\;backpropagated\\,\\text{to}\\;\\text{the}\\;\\text{previous}\\;\\text{layer}}\\\\\n{\\text{which}\\;\\text{uses}\\;\\text{it}\\;\\text{to}\\;\\text{calculate}\\;\\text{the}\\;\\text{gradient}\\;\\text{wrt}\\;\\text{its}\\;\\text{parameters}\\;\\text{and}\\;\\text{input..}\\;\\text{}}\t\n\\end{gather*}&quot;,&quot;aid&quot;:null,&quot;backgroundColor&quot;:&quot;#FFFFFF&quot;,&quot;font&quot;:{&quot;color&quot;:&quot;#000000&quot;,&quot;family&quot;:&quot;Arial&quot;,&quot;size&quot;:11},&quot;type&quot;:&quot;gather*&quot;,&quot;backgroundColorModified&quot;:false,&quot;ts&quot;:1762638101703,&quot;cs&quot;:&quot;N5njzFHWNPMBPQ6iATRiuw==&quot;,&quot;size&quot;:{&quot;width&quot;:713,&quot;height&quot;:328}}" id="195" name="Google Shape;195;p26"/>
           <p:cNvPicPr preferRelativeResize="0"/>
           <p:nvPr/>
         </p:nvPicPr>
@@ -8177,8 +8127,8 @@
         </p:blipFill>
         <p:spPr>
           <a:xfrm>
-            <a:off x="615450" y="884175"/>
-            <a:ext cx="6979051" cy="3226650"/>
+            <a:off x="381450" y="915925"/>
+            <a:ext cx="6791325" cy="3124200"/>
           </a:xfrm>
           <a:prstGeom prst="rect">
             <a:avLst/>
@@ -8189,56 +8139,6 @@
           </a:ln>
         </p:spPr>
       </p:pic>
-      <p:sp>
-        <p:nvSpPr>
-          <p:cNvPr id="195" name="Google Shape;195;p26"/>
-          <p:cNvSpPr txBox="1"/>
-          <p:nvPr/>
-        </p:nvSpPr>
-        <p:spPr>
-          <a:xfrm>
-            <a:off x="579775" y="4740375"/>
-            <a:ext cx="5421600" cy="400200"/>
-          </a:xfrm>
-          <a:prstGeom prst="rect">
-            <a:avLst/>
-          </a:prstGeom>
-          <a:noFill/>
-          <a:ln>
-            <a:noFill/>
-          </a:ln>
-        </p:spPr>
-        <p:txBody>
-          <a:bodyPr anchorCtr="0" anchor="t" bIns="91425" lIns="91425" spcFirstLastPara="1" rIns="91425" wrap="square" tIns="91425">
-            <a:spAutoFit/>
-          </a:bodyPr>
-          <a:lstStyle/>
-          <a:p>
-            <a:pPr indent="0" lvl="0" marL="0" rtl="0" algn="l">
-              <a:spcBef>
-                <a:spcPts val="0"/>
-              </a:spcBef>
-              <a:spcAft>
-                <a:spcPts val="0"/>
-              </a:spcAft>
-              <a:buNone/>
-            </a:pPr>
-            <a:r>
-              <a:rPr lang="en">
-                <a:solidFill>
-                  <a:schemeClr val="dk2"/>
-                </a:solidFill>
-              </a:rPr>
-              <a:t>Code: 2_layer_network_derivatives.py</a:t>
-            </a:r>
-            <a:endParaRPr>
-              <a:solidFill>
-                <a:schemeClr val="dk2"/>
-              </a:solidFill>
-            </a:endParaRPr>
-          </a:p>
-        </p:txBody>
-      </p:sp>
     </p:spTree>
   </p:cSld>
   <p:clrMapOvr>
@@ -8401,7 +8301,7 @@
       </p:sp>
       <p:pic>
         <p:nvPicPr>
-          <p:cNvPr descr="{&quot;backgroundColorModified&quot;:false,&quot;backgroundColor&quot;:&quot;#FFFFFF&quot;,&quot;id&quot;:&quot;10&quot;,&quot;aid&quot;:null,&quot;font&quot;:{&quot;color&quot;:&quot;#000000&quot;,&quot;size&quot;:11,&quot;family&quot;:&quot;Arial&quot;},&quot;code&quot;:&quot;\\begin{gather*}\n{\\text{Let's}\\;\\text{look}\\;\\text{at}\\;\\text{some}\\;\\text{examples}\\;\\text{of}\\;f}\\\\\n{x\\to A\\to y\\to B\\to u\\to f\\to v}\\\\\n{\\text{Example}\\;\\text{1:}}\\\\\n{f:\\,\\text{Sum}\\;\\text{function}}\\\\\n{v=\\sum_{i=1}^{k}u_{k}}\\\\\n{\\diff{v}{u}:\\,k\\times1\\,\\text{vector}}\\\\\n{\\text{Let's}\\;\\text{consider}\\;i^{th\\,}\\text{element}\\;\\text{of}\\;\\diff{v}{u}}\\\\\n{\\diff{v}{u_{i}}=1}\\\\\n{\\text{so}\\;\\diff{v}{u}=ones\\,\\left(n\\times1\\right)}\t\n\\end{gather*}&quot;,&quot;type&quot;:&quot;gather*&quot;,&quot;ts&quot;:1760305614423,&quot;cs&quot;:&quot;LoN2fiPvYipRZGBesM+EXg==&quot;,&quot;size&quot;:{&quot;width&quot;:240.5,&quot;height&quot;:305.75}}" id="203" name="Google Shape;203;p27"/>
+          <p:cNvPr descr="{&quot;backgroundColorModified&quot;:false,&quot;backgroundColor&quot;:&quot;#FFFFFF&quot;,&quot;font&quot;:{&quot;color&quot;:&quot;#000000&quot;,&quot;family&quot;:&quot;Arial&quot;,&quot;size&quot;:11},&quot;type&quot;:&quot;gather*&quot;,&quot;aid&quot;:null,&quot;id&quot;:&quot;10&quot;,&quot;code&quot;:&quot;\\begin{gather*}\n{\\text{Let's}\\;\\text{look}\\;\\text{at}\\;\\text{some}\\;\\text{examples}\\;\\text{of}\\;f}\\\\\n{\\boldsymbol{x}\\to A\\to \\boldsymbol{y}\\to B\\to \\boldsymbol{u}\\to f\\to v}\\\\\n{\\text{Example}\\;\\text{1:}}\\\\\n{f:\\,\\text{Sum}\\;\\text{function}}\\\\\n{v=\\sum_{i=1}^{k}u_{k}}\\\\\n{\\diff{v}{\\boldsymbol{u}}:\\,k\\times1\\,\\text{vector}}\\\\\n{\\text{Let's}\\;\\text{consider}\\;i^{th\\,}\\text{element}\\;\\text{of}\\;\\diff{v}{\\boldsymbol{u}}}\\\\\n{\\diff{v}{u_{i}}=1}\\\\\n{\\text{so}\\;\\diff{v}{\\boldsymbol{u}}=ones\\,\\left(n\\times1\\right)}\t\n\\end{gather*}&quot;,&quot;ts&quot;:1762638165845,&quot;cs&quot;:&quot;VbHhF5Si9/YQphdgAfBNPA==&quot;,&quot;size&quot;:{&quot;width&quot;:240.5,&quot;height&quot;:305.75}}" id="203" name="Google Shape;203;p27"/>
           <p:cNvPicPr preferRelativeResize="0"/>
           <p:nvPr/>
         </p:nvPicPr>
@@ -8429,7 +8329,7 @@
       </p:pic>
       <p:pic>
         <p:nvPicPr>
-          <p:cNvPr descr="{&quot;aid&quot;:null,&quot;code&quot;:&quot;\\begin{gather*}\n{\\text{Example}\\;\\text{2:}}\\\\\n{f:\\,\\text{Norm}}\\\\\n{v=\\frac{1}{2}\\sum_{i=1}^{k}u_{k}^{2}}\\\\\n{\\diff{v}{u_{i}}=u_{i}}\\\\\n{\\text{so}\\;\\diff{v}{u}=u}\t\n\\end{gather*}&quot;,&quot;backgroundColorModified&quot;:false,&quot;font&quot;:{&quot;size&quot;:11,&quot;family&quot;:&quot;Arial&quot;,&quot;color&quot;:&quot;#000000&quot;},&quot;type&quot;:&quot;gather*&quot;,&quot;id&quot;:&quot;10&quot;,&quot;backgroundColor&quot;:&quot;#FFFFFF&quot;,&quot;ts&quot;:1760305994868,&quot;cs&quot;:&quot;0CnibtYFpyvKYn0aLUIA2w==&quot;,&quot;size&quot;:{&quot;width&quot;:94.33333333333333,&quot;height&quot;:179.33333333333334}}" id="204" name="Google Shape;204;p27"/>
+          <p:cNvPr descr="{&quot;aid&quot;:null,&quot;backgroundColorModified&quot;:false,&quot;code&quot;:&quot;\\begin{gather*}\n{\\text{Example}\\;\\text{2:}}\\\\\n{f:\\,\\text{Norm}}\\\\\n{v=\\frac{1}{2}\\sum_{i=1}^{k}u_{k}^{2}}\\\\\n{\\diff{v}{u_{i}}=u_{i}}\\\\\n{\\text{so}\\;\\diff{v}{\\boldsymbol{u}}=\\boldsymbol{u}}\t\n\\end{gather*}&quot;,&quot;type&quot;:&quot;gather*&quot;,&quot;backgroundColor&quot;:&quot;#FFFFFF&quot;,&quot;font&quot;:{&quot;family&quot;:&quot;Arial&quot;,&quot;size&quot;:13,&quot;color&quot;:&quot;#000000&quot;},&quot;id&quot;:&quot;10&quot;,&quot;ts&quot;:1762638198040,&quot;cs&quot;:&quot;+yP3/dbMF0n6CjToIuFVYA==&quot;,&quot;size&quot;:{&quot;width&quot;:111.5,&quot;height&quot;:211.83333333333334}}" id="204" name="Google Shape;204;p27"/>
           <p:cNvPicPr preferRelativeResize="0"/>
           <p:nvPr/>
         </p:nvPicPr>
@@ -8443,8 +8343,8 @@
         </p:blipFill>
         <p:spPr>
           <a:xfrm>
-            <a:off x="4212225" y="1005275"/>
-            <a:ext cx="1077174" cy="2047776"/>
+            <a:off x="4212225" y="1005928"/>
+            <a:ext cx="1062038" cy="2017713"/>
           </a:xfrm>
           <a:prstGeom prst="rect">
             <a:avLst/>
@@ -8985,7 +8885,7 @@
       </p:sp>
       <p:pic>
         <p:nvPicPr>
-          <p:cNvPr descr="{&quot;code&quot;:&quot;\\begin{gather*}\n{\\text{Now}\\;\\text{lets}\\;\\text{add}\\;\\text{a}\\;\\text{bias}\\;\\text{term}}\\\\\n{\\text{So,}\\;y=Ax+b;\\,x:m\\times1,\\,A:\\,n\\times m,\\,b:\\,n\\times1}\\\\\n{L=f\\left(y\\right)\\,}\\\\\n{\\text{We}\\;\\text{want}\\;\\diff{L}{b}}\\\\\n{\\text{Let's}\\;\\text{consider}\\;i^{th\\,}\\text{element}\\;\\text{of}\\,\\diff{L}{b}}\\\\\n{\\text{It}\\;\\text{is}\\;\\text{easy}\\;\\text{to}\\;\\text{see}\\;\\text{that}\\;b_{i}\\,\\text{only}\\;\\text{affects}\\;y_{i},\\,\\text{so}\\;\\text{we}\\;\\text{get}\\;\\text{a}\\;\\text{scalar}\\;\\text{chain}\\;\\text{rule}}\\\\\n{b_{i}\\to y_{i}\\to L}\\\\\n{\\diff{L}{b_{i}}=\\diff{L}{y_{i}}\\diff{y_{i}}{b_{i}}=\\diff{L}{y_{i}}}\t\n\\end{gather*}&quot;,&quot;type&quot;:&quot;gather*&quot;,&quot;backgroundColorModified&quot;:false,&quot;backgroundColor&quot;:&quot;#FFFFFF&quot;,&quot;aid&quot;:null,&quot;font&quot;:{&quot;size&quot;:12,&quot;color&quot;:&quot;#000000&quot;,&quot;family&quot;:&quot;Arial&quot;},&quot;id&quot;:&quot;11&quot;,&quot;ts&quot;:1760307980441,&quot;cs&quot;:&quot;+MCI3wTTaXcxbjPD5qWmgQ==&quot;,&quot;size&quot;:{&quot;width&quot;:536,&quot;height&quot;:252.5}}" id="221" name="Google Shape;221;p28"/>
+          <p:cNvPr descr="{&quot;aid&quot;:null,&quot;code&quot;:&quot;\\begin{gather*}\n{\\text{Now}\\;\\text{lets}\\;\\text{add}\\;\\text{a}\\;\\text{bias}\\;\\text{term}}\\\\\n{\\text{So,}\\;\\boldsymbol{y}=A\\boldsymbol{x}+b;\\,\\boldsymbol{x}:m\\times1,\\,A:\\,n\\times m,\\,\\boldsymbol{b}:\\,n\\times1}\\\\\n{L=f\\left(\\boldsymbol{y}\\right)\\,}\\\\\n{\\text{We}\\;\\text{want}\\;\\diff{L}{\\boldsymbol{b}}}\\\\\n{\\text{Let's}\\;\\text{consider}\\;i^{th\\,}\\text{element}\\;\\text{of}\\,\\diff{L}{\\boldsymbol{b}}}\\\\\n{\\text{It}\\;\\text{is}\\;\\text{easy}\\;\\text{to}\\;\\text{see}\\;\\text{that}\\;b_{i}\\,\\text{only}\\;\\text{affects}\\;y_{i},\\,\\text{so}\\;\\text{we}\\;\\text{get}\\;\\text{a}\\;\\text{scalar}\\;\\text{chain}\\;\\text{rule}}\\\\\n{b_{i}\\to y_{i}\\to L}\\\\\n{\\diff{L}{b_{i}}=\\diff{L}{y_{i}}\\diff{y_{i}}{b_{i}}=\\diff{L}{y_{i}}\\,\\because\\diff{y_{i}}{b_{i}}=1}\t\n\\end{gather*}&quot;,&quot;backgroundColorModified&quot;:false,&quot;type&quot;:&quot;gather*&quot;,&quot;font&quot;:{&quot;family&quot;:&quot;Arial&quot;,&quot;size&quot;:12,&quot;color&quot;:&quot;#000000&quot;},&quot;backgroundColor&quot;:&quot;#FFFFFF&quot;,&quot;id&quot;:&quot;11&quot;,&quot;ts&quot;:1762638331327,&quot;cs&quot;:&quot;Kefnvxvd6ejLTnmE2aVeWw==&quot;,&quot;size&quot;:{&quot;width&quot;:536,&quot;height&quot;:252.5}}" id="221" name="Google Shape;221;p28"/>
           <p:cNvPicPr preferRelativeResize="0"/>
           <p:nvPr/>
         </p:nvPicPr>
@@ -10794,172 +10694,6 @@
 </p:sld>
 </file>
 
-<file path=ppt/slides/slide19.xml><?xml version="1.0" encoding="utf-8"?>
-<p:sld xmlns:a="http://schemas.openxmlformats.org/drawingml/2006/main" xmlns:r="http://schemas.openxmlformats.org/officeDocument/2006/relationships" xmlns:mc="http://schemas.openxmlformats.org/markup-compatibility/2006" xmlns:mv="urn:schemas-microsoft-com:mac:vml" xmlns:p="http://schemas.openxmlformats.org/presentationml/2006/main" xmlns:c="http://schemas.openxmlformats.org/drawingml/2006/chart" xmlns:dgm="http://schemas.openxmlformats.org/drawingml/2006/diagram" xmlns:o="urn:schemas-microsoft-com:office:office" xmlns:v="urn:schemas-microsoft-com:vml" xmlns:pvml="urn:schemas-microsoft-com:office:powerpoint" xmlns:com="http://schemas.openxmlformats.org/drawingml/2006/compatibility" xmlns:p14="http://schemas.microsoft.com/office/powerpoint/2010/main" xmlns:p15="http://schemas.microsoft.com/office/powerpoint/2012/main" xmlns:ahyp="http://schemas.microsoft.com/office/drawing/2018/hyperlinkcolor">
-  <p:cSld>
-    <p:spTree>
-      <p:nvGrpSpPr>
-        <p:cNvPr id="268" name="Shape 268"/>
-        <p:cNvGrpSpPr/>
-        <p:nvPr/>
-      </p:nvGrpSpPr>
-      <p:grpSpPr>
-        <a:xfrm>
-          <a:off x="0" y="0"/>
-          <a:ext cx="0" cy="0"/>
-          <a:chOff x="0" y="0"/>
-          <a:chExt cx="0" cy="0"/>
-        </a:xfrm>
-      </p:grpSpPr>
-      <p:sp>
-        <p:nvSpPr>
-          <p:cNvPr id="269" name="Google Shape;269;p31"/>
-          <p:cNvSpPr txBox="1"/>
-          <p:nvPr>
-            <p:ph idx="4294967295" type="title"/>
-          </p:nvPr>
-        </p:nvSpPr>
-        <p:spPr>
-          <a:xfrm>
-            <a:off x="259350" y="157250"/>
-            <a:ext cx="8520600" cy="572700"/>
-          </a:xfrm>
-          <a:prstGeom prst="rect">
-            <a:avLst/>
-          </a:prstGeom>
-        </p:spPr>
-        <p:txBody>
-          <a:bodyPr anchorCtr="0" anchor="t" bIns="91425" lIns="91425" spcFirstLastPara="1" rIns="91425" wrap="square" tIns="91425">
-            <a:normAutofit fontScale="90000"/>
-          </a:bodyPr>
-          <a:lstStyle/>
-          <a:p>
-            <a:pPr indent="0" lvl="0" marL="0" rtl="0" algn="l">
-              <a:spcBef>
-                <a:spcPts val="0"/>
-              </a:spcBef>
-              <a:spcAft>
-                <a:spcPts val="0"/>
-              </a:spcAft>
-              <a:buNone/>
-            </a:pPr>
-            <a:r>
-              <a:rPr lang="en"/>
-              <a:t>Derivative of a vector against a matrix</a:t>
-            </a:r>
-            <a:endParaRPr/>
-          </a:p>
-        </p:txBody>
-      </p:sp>
-      <p:sp>
-        <p:nvSpPr>
-          <p:cNvPr id="270" name="Google Shape;270;p31"/>
-          <p:cNvSpPr txBox="1"/>
-          <p:nvPr/>
-        </p:nvSpPr>
-        <p:spPr>
-          <a:xfrm>
-            <a:off x="381450" y="806388"/>
-            <a:ext cx="3013800" cy="461700"/>
-          </a:xfrm>
-          <a:prstGeom prst="rect">
-            <a:avLst/>
-          </a:prstGeom>
-          <a:noFill/>
-          <a:ln>
-            <a:noFill/>
-          </a:ln>
-        </p:spPr>
-        <p:txBody>
-          <a:bodyPr anchorCtr="0" anchor="t" bIns="91425" lIns="91425" spcFirstLastPara="1" rIns="91425" wrap="square" tIns="91425">
-            <a:spAutoFit/>
-          </a:bodyPr>
-          <a:lstStyle/>
-          <a:p>
-            <a:pPr indent="0" lvl="0" marL="0" rtl="0" algn="l">
-              <a:spcBef>
-                <a:spcPts val="0"/>
-              </a:spcBef>
-              <a:spcAft>
-                <a:spcPts val="0"/>
-              </a:spcAft>
-              <a:buNone/>
-            </a:pPr>
-            <a:r>
-              <a:t/>
-            </a:r>
-            <a:endParaRPr sz="1800">
-              <a:solidFill>
-                <a:schemeClr val="dk2"/>
-              </a:solidFill>
-            </a:endParaRPr>
-          </a:p>
-        </p:txBody>
-      </p:sp>
-      <p:pic>
-        <p:nvPicPr>
-          <p:cNvPr descr="{&quot;aid&quot;:null,&quot;code&quot;:&quot;\\begin{gather*}\n{\\text{Let's}\\;\\text{consider}\\;\\text{the}\\;ij^{th}\\;\\text{element}\\;\\text{of}\\;\\diff{v}{A},\\,\\text{i.e.,}\\;\\diff{v}{A_{ij}}}\\\\\n{\\text{Now}\\;\\text{we}\\;\\text{have}\\;\\text{a}\\;\\text{chain..}}\\\\\n{A_{ij}\\to y\\to v,\\,\\text{here}\\;y\\,\\;\\text{is}\\;\\text{a}\\;\\text{vector}}\\\\\n{\\text{Now..}}\\\\\n{y_{i}=\\sum_{j=1}^{m}A_{ij}x_{j}}\\\\\n{\\text{Since}\\;\\text{each}\\;\\text{element}\\;\\text{of}\\;y\\,\\;\\text{is}\\;\\text{the}\\;\\text{corresponding}\\,\\text{row}\\;\\text{of}\\;\\text{A}\\;\\text{multiplied}\\;\\text{with}\\;x,\\,}\\\\\n{\\text{and}\\;\\text{other}\\;\\text{rows}\\;\\text{of}\\;\\text{A}\\,\\text{don't}\\;\\text{affect}\\;y_{i},\\,\\text{the}\\;\\text{chain}\\;\\text{above}\\;\\text{becomes}\\;\\text{a}\\;\\text{scalar}\\;\\text{chain..}\\text{}}\\\\\n{A_{ij}\\to y_{i}\\to v}\\\\\n{\\text{Now}\\;\\text{we}\\;\\text{can}\\;\\text{apply}\\;\\text{the}\\;\\text{chain}\\;\\text{rule..}}\\\\\n{\\diff{v}{A_{ij}}=\\diff{v}{y_{i}}\\diff{y_{i}}{A_{ij}}=\\diff{v}{y_{i}}\\diff{\\sum_{j=1}^{m}A_{ij}x_{j}}{A_{ij}}=\\diff{v}{y_{i}}x_{j}}\\\\\n{\\text{So..}\\;\\diff{v}{A}\\,\\text{becomes}\\;\\text{the}\\;\\text{outer}\\;\\text{product}\\;\\text{of}\\;\\text{the}\\;\\text{vectors}\\;\\diff{v}{y}\\,\\text{and}\\;x!}\\\\\n{\\diff{v}{A}=\\diff{v}{y}x^{T}\\,\\text{}}\\\\\n{\\text{Verify}\\;\\text{that}\\;\\text{the}\\;\\text{dimensions}\\;\\text{work}\\;\\text{out!}}\t\n\\end{gather*}&quot;,&quot;font&quot;:{&quot;size&quot;:10.5,&quot;family&quot;:&quot;Arial&quot;,&quot;color&quot;:&quot;#000000&quot;},&quot;backgroundColorModified&quot;:false,&quot;backgroundColor&quot;:&quot;#FFFFFF&quot;,&quot;type&quot;:&quot;gather*&quot;,&quot;id&quot;:&quot;8&quot;,&quot;ts&quot;:1760275169609,&quot;cs&quot;:&quot;l2j0dH2bjN2hjF9nIGzL3Q==&quot;,&quot;size&quot;:{&quot;width&quot;:557.3779509186352,&quot;height&quot;:409.9841679790026}}" id="271" name="Google Shape;271;p31"/>
-          <p:cNvPicPr preferRelativeResize="0"/>
-          <p:nvPr/>
-        </p:nvPicPr>
-        <p:blipFill>
-          <a:blip r:embed="rId3">
-            <a:alphaModFix/>
-          </a:blip>
-          <a:stretch>
-            <a:fillRect/>
-          </a:stretch>
-        </p:blipFill>
-        <p:spPr>
-          <a:xfrm>
-            <a:off x="553150" y="806400"/>
-            <a:ext cx="5546225" cy="4079576"/>
-          </a:xfrm>
-          <a:prstGeom prst="rect">
-            <a:avLst/>
-          </a:prstGeom>
-          <a:noFill/>
-          <a:ln>
-            <a:noFill/>
-          </a:ln>
-        </p:spPr>
-      </p:pic>
-      <p:pic>
-        <p:nvPicPr>
-          <p:cNvPr descr="{&quot;id&quot;:&quot;9&quot;,&quot;backgroundColor&quot;:&quot;#FFFFFF&quot;,&quot;code&quot;:&quot;\\begin{gather*}\n{\\text{Now}\\;\\text{let's}\\;\\text{add}\\;\\text{another}\\;\\text{layer}\\;\\text{in}\\;\\text{front..}}\\\\\n{x\\to A\\to y\\to B\\to u\\to f\\to v}\\\\\n{\\text{As}\\;\\text{before,}\\;x:\\,m\\times1,\\,A:\\,n\\times m.\\,B:\\,k\\times n}\\\\\n{\\text{From}\\;\\text{before,}}\\\\\n{\\diff{v}{B}=\\diff{v}{u}y^{T},\\diff{v}{y}=B^{T}\\diff{v}{u}}\\\\\n{\\text{And}}\\\\\n{\\diff{v}{A}=\\diff{v}{y}x^{T}}\\\\\n{\\text{We}\\;\\text{can}\\;\\text{think}\\;\\text{of}\\;\\text{this}\\;\\text{as}\\;\\text{a}\\;2\\,\\text{layer}\\;\\text{network,}\\;\\text{where}\\;\\text{the}\\;\\text{parameters}\\;\\text{of}\\;\\text{each}\\;\\text{layer}\\;\\text{are}\\;\\text{A}\\;\\text{and}\\;\\text{B}}\\\\\n{x\\,\\text{is}\\;\\text{the}\\;\\text{input}\\;\\text{to}\\;\\text{layer}\\;\\text{1,}\\;\\text{and}\\;y\\,\\text{is}\\;\\text{the}\\;\\text{output.}\\;\\text{}}\\\\\n{y\\,\\,\\text{is}\\;\\text{the}\\;\\text{input}\\;\\text{to}\\;\\text{layer}\\;\\text{2.}\\;\\text{Output}\\;\\text{of}\\;\\text{layer}\\;\\text{2},\\,u\\;\\text{goes}\\;\\text{into}\\;\\text{function}\\;f\\,\\text{that}\\;\\text{produces}\\;\\text{a}\\;\\text{scalar}\\;\\text{value}\\;v}\\\\\n{\\text{Layer}\\;\\text{2}\\;\\text{calculates}\\;\\text{the}\\;\\text{gradient}\\;\\text{of}\\;\\text{the}\\;\\text{final}\\;\\text{output}\\;v\\,\\text{wrt}\\;\\text{its}\\;\\text{parameters}\\;B}\\\\\n{\\text{It}\\;\\text{also}\\;\\text{calculates}\\;\\text{the}\\;\\text{gradient}\\;\\text{wrt}\\;\\text{its}\\;\\text{input,}\\;\\text{which}\\;\\text{is}\\;backpropagated\\,\\text{to}\\;\\text{the}\\;\\text{previous}\\;\\text{layer}}\\\\\n{\\text{which}\\;\\text{uses}\\;\\text{it}\\;\\text{to}\\;\\text{calculate}\\;\\text{the}\\;\\text{gradient}\\;\\text{wrt}\\;\\text{its}\\;\\text{parameters}\\;\\text{and}\\;\\text{input..}\\;\\text{}}\t\n\\end{gather*}&quot;,&quot;font&quot;:{&quot;family&quot;:&quot;Arial&quot;,&quot;color&quot;:&quot;#000000&quot;,&quot;size&quot;:10.5},&quot;type&quot;:&quot;gather*&quot;,&quot;aid&quot;:null,&quot;backgroundColorModified&quot;:false,&quot;ts&quot;:1760276974089,&quot;cs&quot;:&quot;w4DnoI+cLB2zQV5+266eWQ==&quot;,&quot;size&quot;:{&quot;width&quot;:677,&quot;height&quot;:313}}" id="272" name="Google Shape;272;p31"/>
-          <p:cNvPicPr preferRelativeResize="0"/>
-          <p:nvPr/>
-        </p:nvPicPr>
-        <p:blipFill>
-          <a:blip r:embed="rId4">
-            <a:alphaModFix/>
-          </a:blip>
-          <a:stretch>
-            <a:fillRect/>
-          </a:stretch>
-        </p:blipFill>
-        <p:spPr>
-          <a:xfrm>
-            <a:off x="4572000" y="2571750"/>
-            <a:ext cx="6448425" cy="2981325"/>
-          </a:xfrm>
-          <a:prstGeom prst="rect">
-            <a:avLst/>
-          </a:prstGeom>
-          <a:noFill/>
-          <a:ln>
-            <a:noFill/>
-          </a:ln>
-        </p:spPr>
-      </p:pic>
-    </p:spTree>
-  </p:cSld>
-  <p:clrMapOvr>
-    <a:masterClrMapping/>
-  </p:clrMapOvr>
-</p:sld>
-</file>
-
 <file path=ppt/slides/slide2.xml><?xml version="1.0" encoding="utf-8"?>
 <p:sld xmlns:a="http://schemas.openxmlformats.org/drawingml/2006/main" xmlns:r="http://schemas.openxmlformats.org/officeDocument/2006/relationships" xmlns:mc="http://schemas.openxmlformats.org/markup-compatibility/2006" xmlns:mv="urn:schemas-microsoft-com:mac:vml" xmlns:p="http://schemas.openxmlformats.org/presentationml/2006/main" xmlns:c="http://schemas.openxmlformats.org/drawingml/2006/chart" xmlns:dgm="http://schemas.openxmlformats.org/drawingml/2006/diagram" xmlns:o="urn:schemas-microsoft-com:office:office" xmlns:v="urn:schemas-microsoft-com:vml" xmlns:pvml="urn:schemas-microsoft-com:office:powerpoint" xmlns:com="http://schemas.openxmlformats.org/drawingml/2006/compatibility" xmlns:p14="http://schemas.microsoft.com/office/powerpoint/2010/main" xmlns:p15="http://schemas.microsoft.com/office/powerpoint/2012/main" xmlns:ahyp="http://schemas.microsoft.com/office/drawing/2018/hyperlinkcolor">
   <p:cSld>
@@ -11466,7 +11200,7 @@
         <p:spPr>
           <a:xfrm>
             <a:off x="480050" y="1195250"/>
-            <a:ext cx="6747300" cy="1569900"/>
+            <a:ext cx="6747300" cy="2124000"/>
           </a:xfrm>
           <a:prstGeom prst="rect">
             <a:avLst/>
@@ -11501,7 +11235,7 @@
                   <a:schemeClr val="dk2"/>
                 </a:solidFill>
               </a:rPr>
-              <a:t>Introduction to multivariate functions</a:t>
+              <a:t>Introduction to multi-valued functions of many variables</a:t>
             </a:r>
             <a:endParaRPr sz="1800">
               <a:solidFill>
@@ -11529,15 +11263,7 @@
                   <a:schemeClr val="dk2"/>
                 </a:solidFill>
               </a:rPr>
-              <a:t>Geometric </a:t>
-            </a:r>
-            <a:r>
-              <a:rPr lang="en" sz="1800">
-                <a:solidFill>
-                  <a:schemeClr val="dk2"/>
-                </a:solidFill>
-              </a:rPr>
-              <a:t>interpretation</a:t>
+              <a:t>Numerator and Denominator notation</a:t>
             </a:r>
             <a:endParaRPr sz="1800">
               <a:solidFill>
@@ -11565,7 +11291,7 @@
                   <a:schemeClr val="dk2"/>
                 </a:solidFill>
               </a:rPr>
-              <a:t>Chain rule in a computational graph</a:t>
+              <a:t>Extension of chain rule to multivariate functions</a:t>
             </a:r>
             <a:endParaRPr sz="1800">
               <a:solidFill>
@@ -11593,23 +11319,63 @@
                   <a:schemeClr val="dk2"/>
                 </a:solidFill>
               </a:rPr>
-              <a:t>Using partial </a:t>
-            </a:r>
+              <a:t>Derivatives of matrix operations</a:t>
+            </a:r>
+            <a:endParaRPr sz="1800">
+              <a:solidFill>
+                <a:schemeClr val="dk2"/>
+              </a:solidFill>
+            </a:endParaRPr>
+          </a:p>
+          <a:p>
+            <a:pPr indent="-342900" lvl="0" marL="457200" rtl="0" algn="l">
+              <a:spcBef>
+                <a:spcPts val="0"/>
+              </a:spcBef>
+              <a:spcAft>
+                <a:spcPts val="0"/>
+              </a:spcAft>
+              <a:buClr>
+                <a:schemeClr val="dk2"/>
+              </a:buClr>
+              <a:buSzPts val="1800"/>
+              <a:buChar char="-"/>
+            </a:pPr>
             <a:r>
               <a:rPr lang="en" sz="1800">
                 <a:solidFill>
                   <a:schemeClr val="dk2"/>
                 </a:solidFill>
               </a:rPr>
-              <a:t>derivatives</a:t>
-            </a:r>
+              <a:t>Solving linear regression using matrix math</a:t>
+            </a:r>
+            <a:endParaRPr sz="1800">
+              <a:solidFill>
+                <a:schemeClr val="dk2"/>
+              </a:solidFill>
+            </a:endParaRPr>
+          </a:p>
+          <a:p>
+            <a:pPr indent="-342900" lvl="0" marL="457200" rtl="0" algn="l">
+              <a:spcBef>
+                <a:spcPts val="0"/>
+              </a:spcBef>
+              <a:spcAft>
+                <a:spcPts val="0"/>
+              </a:spcAft>
+              <a:buClr>
+                <a:schemeClr val="dk2"/>
+              </a:buClr>
+              <a:buSzPts val="1800"/>
+              <a:buChar char="-"/>
+            </a:pPr>
             <a:r>
               <a:rPr lang="en" sz="1800">
                 <a:solidFill>
                   <a:schemeClr val="dk2"/>
                 </a:solidFill>
               </a:rPr>
-              <a:t> to solve linear regression</a:t>
+              <a:t>Derivation of backpropagation</a:t>
             </a:r>
             <a:endParaRPr sz="1800">
               <a:solidFill>
